--- a/assets/lessons/lectures/digital-signal-processing/signals-2018.pptx
+++ b/assets/lessons/lectures/digital-signal-processing/signals-2018.pptx
@@ -21,7 +21,7 @@
     <p:sldId id="268" r:id="rId12"/>
     <p:sldId id="269" r:id="rId13"/>
   </p:sldIdLst>
-  <p:sldSz cx="12192000" cy="6858000"/>
+  <p:sldSz cx="12192000" cy="7543800"/>
   <p:notesSz cx="6858000" cy="9144000"/>
   <p:defaultTextStyle>
     <a:defPPr>
@@ -124,6 +124,185 @@
     </p:ext>
   </p:extLst>
 </p:presentation>
+</file>
+
+<file path=ppt/customXml/item1.xml><?xml version="1.0" encoding="utf-8"?>
+<ct:contentTypeSchema xmlns:ct="http://schemas.microsoft.com/office/2006/metadata/contentType" xmlns:ma="http://schemas.microsoft.com/office/2006/metadata/properties/metaAttributes" ct:_="" ma:_="" ma:contentTypeName="Document" ma:contentTypeID="0x01010016C36F108F9F92488C988DDF36346911" ma:contentTypeVersion="5" ma:contentTypeDescription="Create a new document." ma:contentTypeScope="" ma:versionID="c417924321fef32731141cd966ef6f94">
+  <xsd:schema xmlns:xsd="http://www.w3.org/2001/XMLSchema" xmlns:xs="http://www.w3.org/2001/XMLSchema" xmlns:p="http://schemas.microsoft.com/office/2006/metadata/properties" xmlns:ns2="1bb24863-89de-455f-aabf-4424925aa312" targetNamespace="http://schemas.microsoft.com/office/2006/metadata/properties" ma:root="true" ma:fieldsID="a7d3b2212d350eb904df17fc79fef4f4" ns2:_="">
+    <xsd:import namespace="1bb24863-89de-455f-aabf-4424925aa312"/>
+    <xsd:element name="properties">
+      <xsd:complexType>
+        <xsd:sequence>
+          <xsd:element name="documentManagement">
+            <xsd:complexType>
+              <xsd:all>
+                <xsd:element ref="ns2:MediaServiceMetadata" minOccurs="0"/>
+                <xsd:element ref="ns2:MediaServiceFastMetadata" minOccurs="0"/>
+                <xsd:element ref="ns2:MediaServiceAutoTags" minOccurs="0"/>
+                <xsd:element ref="ns2:MediaServiceOCR" minOccurs="0"/>
+                <xsd:element ref="ns2:MediaServiceDateTaken" minOccurs="0"/>
+              </xsd:all>
+            </xsd:complexType>
+          </xsd:element>
+        </xsd:sequence>
+      </xsd:complexType>
+    </xsd:element>
+  </xsd:schema>
+  <xsd:schema xmlns:xsd="http://www.w3.org/2001/XMLSchema" xmlns:xs="http://www.w3.org/2001/XMLSchema" xmlns:dms="http://schemas.microsoft.com/office/2006/documentManagement/types" xmlns:pc="http://schemas.microsoft.com/office/infopath/2007/PartnerControls" targetNamespace="1bb24863-89de-455f-aabf-4424925aa312" elementFormDefault="qualified">
+    <xsd:import namespace="http://schemas.microsoft.com/office/2006/documentManagement/types"/>
+    <xsd:import namespace="http://schemas.microsoft.com/office/infopath/2007/PartnerControls"/>
+    <xsd:element name="MediaServiceMetadata" ma:index="8" nillable="true" ma:displayName="MediaServiceMetadata" ma:hidden="true" ma:internalName="MediaServiceMetadata" ma:readOnly="true">
+      <xsd:simpleType>
+        <xsd:restriction base="dms:Note"/>
+      </xsd:simpleType>
+    </xsd:element>
+    <xsd:element name="MediaServiceFastMetadata" ma:index="9" nillable="true" ma:displayName="MediaServiceFastMetadata" ma:hidden="true" ma:internalName="MediaServiceFastMetadata" ma:readOnly="true">
+      <xsd:simpleType>
+        <xsd:restriction base="dms:Note"/>
+      </xsd:simpleType>
+    </xsd:element>
+    <xsd:element name="MediaServiceAutoTags" ma:index="10" nillable="true" ma:displayName="MediaServiceAutoTags" ma:internalName="MediaServiceAutoTags" ma:readOnly="true">
+      <xsd:simpleType>
+        <xsd:restriction base="dms:Text"/>
+      </xsd:simpleType>
+    </xsd:element>
+    <xsd:element name="MediaServiceOCR" ma:index="11" nillable="true" ma:displayName="MediaServiceOCR" ma:internalName="MediaServiceOCR" ma:readOnly="true">
+      <xsd:simpleType>
+        <xsd:restriction base="dms:Note">
+          <xsd:maxLength value="255"/>
+        </xsd:restriction>
+      </xsd:simpleType>
+    </xsd:element>
+    <xsd:element name="MediaServiceDateTaken" ma:index="12" nillable="true" ma:displayName="MediaServiceDateTaken" ma:hidden="true" ma:internalName="MediaServiceDateTaken" ma:readOnly="true">
+      <xsd:simpleType>
+        <xsd:restriction base="dms:Text"/>
+      </xsd:simpleType>
+    </xsd:element>
+  </xsd:schema>
+  <xsd:schema xmlns="http://schemas.openxmlformats.org/package/2006/metadata/core-properties" xmlns:xsd="http://www.w3.org/2001/XMLSchema" xmlns:xsi="http://www.w3.org/2001/XMLSchema-instance" xmlns:dc="http://purl.org/dc/elements/1.1/" xmlns:dcterms="http://purl.org/dc/terms/" xmlns:odoc="http://schemas.microsoft.com/internal/obd" targetNamespace="http://schemas.openxmlformats.org/package/2006/metadata/core-properties" elementFormDefault="qualified" attributeFormDefault="unqualified" blockDefault="#all">
+    <xsd:import namespace="http://purl.org/dc/elements/1.1/" schemaLocation="http://dublincore.org/schemas/xmls/qdc/2003/04/02/dc.xsd"/>
+    <xsd:import namespace="http://purl.org/dc/terms/" schemaLocation="http://dublincore.org/schemas/xmls/qdc/2003/04/02/dcterms.xsd"/>
+    <xsd:element name="coreProperties" type="CT_coreProperties"/>
+    <xsd:complexType name="CT_coreProperties">
+      <xsd:all>
+        <xsd:element ref="dc:creator" minOccurs="0" maxOccurs="1"/>
+        <xsd:element ref="dcterms:created" minOccurs="0" maxOccurs="1"/>
+        <xsd:element ref="dc:identifier" minOccurs="0" maxOccurs="1"/>
+        <xsd:element name="contentType" minOccurs="0" maxOccurs="1" type="xsd:string" ma:index="0" ma:displayName="Content Type"/>
+        <xsd:element ref="dc:title" minOccurs="0" maxOccurs="1" ma:index="4" ma:displayName="Title"/>
+        <xsd:element ref="dc:subject" minOccurs="0" maxOccurs="1"/>
+        <xsd:element ref="dc:description" minOccurs="0" maxOccurs="1"/>
+        <xsd:element name="keywords" minOccurs="0" maxOccurs="1" type="xsd:string"/>
+        <xsd:element ref="dc:language" minOccurs="0" maxOccurs="1"/>
+        <xsd:element name="category" minOccurs="0" maxOccurs="1" type="xsd:string"/>
+        <xsd:element name="version" minOccurs="0" maxOccurs="1" type="xsd:string"/>
+        <xsd:element name="revision" minOccurs="0" maxOccurs="1" type="xsd:string">
+          <xsd:annotation>
+            <xsd:documentation>
+                        This value indicates the number of saves or revisions. The application is responsible for updating this value after each revision.
+                    </xsd:documentation>
+          </xsd:annotation>
+        </xsd:element>
+        <xsd:element name="lastModifiedBy" minOccurs="0" maxOccurs="1" type="xsd:string"/>
+        <xsd:element ref="dcterms:modified" minOccurs="0" maxOccurs="1"/>
+        <xsd:element name="contentStatus" minOccurs="0" maxOccurs="1" type="xsd:string"/>
+      </xsd:all>
+    </xsd:complexType>
+  </xsd:schema>
+  <xs:schema xmlns:pc="http://schemas.microsoft.com/office/infopath/2007/PartnerControls" xmlns:xs="http://www.w3.org/2001/XMLSchema" targetNamespace="http://schemas.microsoft.com/office/infopath/2007/PartnerControls" elementFormDefault="qualified" attributeFormDefault="unqualified">
+    <xs:element name="Person">
+      <xs:complexType>
+        <xs:sequence>
+          <xs:element ref="pc:DisplayName" minOccurs="0"/>
+          <xs:element ref="pc:AccountId" minOccurs="0"/>
+          <xs:element ref="pc:AccountType" minOccurs="0"/>
+        </xs:sequence>
+      </xs:complexType>
+    </xs:element>
+    <xs:element name="DisplayName" type="xs:string"/>
+    <xs:element name="AccountId" type="xs:string"/>
+    <xs:element name="AccountType" type="xs:string"/>
+    <xs:element name="BDCAssociatedEntity">
+      <xs:complexType>
+        <xs:sequence>
+          <xs:element ref="pc:BDCEntity" minOccurs="0" maxOccurs="unbounded"/>
+        </xs:sequence>
+        <xs:attribute ref="pc:EntityNamespace"/>
+        <xs:attribute ref="pc:EntityName"/>
+        <xs:attribute ref="pc:SystemInstanceName"/>
+        <xs:attribute ref="pc:AssociationName"/>
+      </xs:complexType>
+    </xs:element>
+    <xs:attribute name="EntityNamespace" type="xs:string"/>
+    <xs:attribute name="EntityName" type="xs:string"/>
+    <xs:attribute name="SystemInstanceName" type="xs:string"/>
+    <xs:attribute name="AssociationName" type="xs:string"/>
+    <xs:element name="BDCEntity">
+      <xs:complexType>
+        <xs:sequence>
+          <xs:element ref="pc:EntityDisplayName" minOccurs="0"/>
+          <xs:element ref="pc:EntityInstanceReference" minOccurs="0"/>
+          <xs:element ref="pc:EntityId1" minOccurs="0"/>
+          <xs:element ref="pc:EntityId2" minOccurs="0"/>
+          <xs:element ref="pc:EntityId3" minOccurs="0"/>
+          <xs:element ref="pc:EntityId4" minOccurs="0"/>
+          <xs:element ref="pc:EntityId5" minOccurs="0"/>
+        </xs:sequence>
+      </xs:complexType>
+    </xs:element>
+    <xs:element name="EntityDisplayName" type="xs:string"/>
+    <xs:element name="EntityInstanceReference" type="xs:string"/>
+    <xs:element name="EntityId1" type="xs:string"/>
+    <xs:element name="EntityId2" type="xs:string"/>
+    <xs:element name="EntityId3" type="xs:string"/>
+    <xs:element name="EntityId4" type="xs:string"/>
+    <xs:element name="EntityId5" type="xs:string"/>
+    <xs:element name="Terms">
+      <xs:complexType>
+        <xs:sequence>
+          <xs:element ref="pc:TermInfo" minOccurs="0" maxOccurs="unbounded"/>
+        </xs:sequence>
+      </xs:complexType>
+    </xs:element>
+    <xs:element name="TermInfo">
+      <xs:complexType>
+        <xs:sequence>
+          <xs:element ref="pc:TermName" minOccurs="0"/>
+          <xs:element ref="pc:TermId" minOccurs="0"/>
+        </xs:sequence>
+      </xs:complexType>
+    </xs:element>
+    <xs:element name="TermName" type="xs:string"/>
+    <xs:element name="TermId" type="xs:string"/>
+  </xs:schema>
+</ct:contentTypeSchema>
+</file>
+
+<file path=ppt/customXml/item2.xml><?xml version="1.0" encoding="utf-8"?>
+<?mso-contentType ?>
+<FormTemplates xmlns="http://schemas.microsoft.com/sharepoint/v3/contenttype/forms">
+  <Display>DocumentLibraryForm</Display>
+  <Edit>DocumentLibraryForm</Edit>
+  <New>DocumentLibraryForm</New>
+</FormTemplates>
+</file>
+
+<file path=ppt/customXml/item3.xml><?xml version="1.0" encoding="utf-8"?>
+<p:properties xmlns:p="http://schemas.microsoft.com/office/2006/metadata/properties" xmlns:xsi="http://www.w3.org/2001/XMLSchema-instance" xmlns:pc="http://schemas.microsoft.com/office/infopath/2007/PartnerControls">
+  <documentManagement/>
+</p:properties>
+</file>
+
+<file path=ppt/customXml/itemProps1.xml><?xml version="1.0" encoding="utf-8"?>
+<ds:datastoreItem xmlns:ds="http://schemas.openxmlformats.org/officeDocument/2006/customXml" ds:itemID="{B45020C5-55C2-4AFA-AF2C-DAAC0E095DF7}"/>
+</file>
+
+<file path=ppt/customXml/itemProps2.xml><?xml version="1.0" encoding="utf-8"?>
+<ds:datastoreItem xmlns:ds="http://schemas.openxmlformats.org/officeDocument/2006/customXml" ds:itemID="{2A695F96-2F3D-474B-AB42-04C2AB694C3A}"/>
+</file>
+
+<file path=ppt/customXml/itemProps3.xml><?xml version="1.0" encoding="utf-8"?>
+<ds:datastoreItem xmlns:ds="http://schemas.openxmlformats.org/officeDocument/2006/customXml" ds:itemID="{78EE5182-D919-474D-A3B9-9992CFF23077}"/>
 </file>
 
 <file path=ppt/diagrams/colors1.xml><?xml version="1.0" encoding="utf-8"?>
@@ -3815,7 +3994,7 @@
         </p:nvSpPr>
         <p:spPr>
           <a:xfrm>
-            <a:off x="1524000" y="1122363"/>
+            <a:off x="1524000" y="1465263"/>
             <a:ext cx="9144000" cy="2387600"/>
           </a:xfrm>
         </p:spPr>
@@ -3823,7 +4002,7 @@
           <a:bodyPr anchor="b"/>
           <a:lstStyle>
             <a:lvl1pPr algn="ctr">
-              <a:defRPr sz="6000"/>
+              <a:defRPr sz="4800"/>
             </a:lvl1pPr>
           </a:lstStyle>
           <a:p>
@@ -3852,7 +4031,7 @@
         </p:nvSpPr>
         <p:spPr>
           <a:xfrm>
-            <a:off x="1524000" y="3602038"/>
+            <a:off x="1524000" y="3944938"/>
             <a:ext cx="9144000" cy="1655762"/>
           </a:xfrm>
         </p:spPr>
@@ -3861,39 +4040,39 @@
           <a:lstStyle>
             <a:lvl1pPr marL="0" indent="0" algn="ctr">
               <a:buNone/>
-              <a:defRPr sz="2400"/>
+              <a:defRPr sz="1920"/>
             </a:lvl1pPr>
             <a:lvl2pPr marL="457200" indent="0" algn="ctr">
               <a:buNone/>
-              <a:defRPr sz="2000"/>
+              <a:defRPr sz="1600"/>
             </a:lvl2pPr>
             <a:lvl3pPr marL="914400" indent="0" algn="ctr">
               <a:buNone/>
-              <a:defRPr sz="1800"/>
+              <a:defRPr sz="1440"/>
             </a:lvl3pPr>
             <a:lvl4pPr marL="1371600" indent="0" algn="ctr">
               <a:buNone/>
-              <a:defRPr sz="1600"/>
+              <a:defRPr sz="1280"/>
             </a:lvl4pPr>
             <a:lvl5pPr marL="1828800" indent="0" algn="ctr">
               <a:buNone/>
-              <a:defRPr sz="1600"/>
+              <a:defRPr sz="1280"/>
             </a:lvl5pPr>
             <a:lvl6pPr marL="2286000" indent="0" algn="ctr">
               <a:buNone/>
-              <a:defRPr sz="1600"/>
+              <a:defRPr sz="1280"/>
             </a:lvl6pPr>
             <a:lvl7pPr marL="2743200" indent="0" algn="ctr">
               <a:buNone/>
-              <a:defRPr sz="1600"/>
+              <a:defRPr sz="1280"/>
             </a:lvl7pPr>
             <a:lvl8pPr marL="3200400" indent="0" algn="ctr">
               <a:buNone/>
-              <a:defRPr sz="1600"/>
+              <a:defRPr sz="1280"/>
             </a:lvl8pPr>
             <a:lvl9pPr marL="3657600" indent="0" algn="ctr">
               <a:buNone/>
-              <a:defRPr sz="1600"/>
+              <a:defRPr sz="1280"/>
             </a:lvl9pPr>
           </a:lstStyle>
           <a:p>
@@ -3954,35 +4133,6 @@
           <a:bodyPr/>
           <a:lstStyle/>
           <a:p>
-            <a:endParaRPr lang="en-US"/>
-          </a:p>
-        </p:txBody>
-      </p:sp>
-      <p:sp>
-        <p:nvSpPr>
-          <p:cNvPr id="6" name="Slide Number Placeholder 5">
-            <a:extLst>
-              <a:ext uri="{FF2B5EF4-FFF2-40B4-BE49-F238E27FC236}">
-                <a16:creationId xmlns:a16="http://schemas.microsoft.com/office/drawing/2014/main" id="{A70D0B99-A58C-4A02-ADDA-63BE3C252587}"/>
-              </a:ext>
-            </a:extLst>
-          </p:cNvPr>
-          <p:cNvSpPr>
-            <a:spLocks noGrp="1"/>
-          </p:cNvSpPr>
-          <p:nvPr>
-            <p:ph type="sldNum" sz="quarter" idx="12"/>
-          </p:nvPr>
-        </p:nvSpPr>
-        <p:spPr/>
-        <p:txBody>
-          <a:bodyPr/>
-          <a:lstStyle/>
-          <a:p>
-            <a:fld id="{982A7450-C9B7-48AD-BEA2-175AC75E73D8}" type="slidenum">
-              <a:rPr lang="en-US" smtClean="0"/>
-              <a:t>‹#›</a:t>
-            </a:fld>
             <a:endParaRPr lang="en-US"/>
           </a:p>
         </p:txBody>
@@ -4156,35 +4306,6 @@
           </a:p>
         </p:txBody>
       </p:sp>
-      <p:sp>
-        <p:nvSpPr>
-          <p:cNvPr id="6" name="Slide Number Placeholder 5">
-            <a:extLst>
-              <a:ext uri="{FF2B5EF4-FFF2-40B4-BE49-F238E27FC236}">
-                <a16:creationId xmlns:a16="http://schemas.microsoft.com/office/drawing/2014/main" id="{85FCB4CF-23FB-473D-B3B0-8C846C65DE60}"/>
-              </a:ext>
-            </a:extLst>
-          </p:cNvPr>
-          <p:cNvSpPr>
-            <a:spLocks noGrp="1"/>
-          </p:cNvSpPr>
-          <p:nvPr>
-            <p:ph type="sldNum" sz="quarter" idx="12"/>
-          </p:nvPr>
-        </p:nvSpPr>
-        <p:spPr/>
-        <p:txBody>
-          <a:bodyPr/>
-          <a:lstStyle/>
-          <a:p>
-            <a:fld id="{982A7450-C9B7-48AD-BEA2-175AC75E73D8}" type="slidenum">
-              <a:rPr lang="en-US" smtClean="0"/>
-              <a:t>‹#›</a:t>
-            </a:fld>
-            <a:endParaRPr lang="en-US"/>
-          </a:p>
-        </p:txBody>
-      </p:sp>
     </p:spTree>
     <p:extLst>
       <p:ext uri="{BB962C8B-B14F-4D97-AF65-F5344CB8AC3E}">
@@ -4233,7 +4354,7 @@
         </p:nvSpPr>
         <p:spPr>
           <a:xfrm>
-            <a:off x="8724900" y="365125"/>
+            <a:off x="8724900" y="708025"/>
             <a:ext cx="2628900" cy="5811838"/>
           </a:xfrm>
         </p:spPr>
@@ -4266,7 +4387,7 @@
         </p:nvSpPr>
         <p:spPr>
           <a:xfrm>
-            <a:off x="838200" y="365125"/>
+            <a:off x="838200" y="708025"/>
             <a:ext cx="7734300" cy="5811838"/>
           </a:xfrm>
         </p:spPr>
@@ -4360,35 +4481,6 @@
           <a:bodyPr/>
           <a:lstStyle/>
           <a:p>
-            <a:endParaRPr lang="en-US"/>
-          </a:p>
-        </p:txBody>
-      </p:sp>
-      <p:sp>
-        <p:nvSpPr>
-          <p:cNvPr id="6" name="Slide Number Placeholder 5">
-            <a:extLst>
-              <a:ext uri="{FF2B5EF4-FFF2-40B4-BE49-F238E27FC236}">
-                <a16:creationId xmlns:a16="http://schemas.microsoft.com/office/drawing/2014/main" id="{CF933CF5-9F5F-47D8-8888-FEF98325ED9F}"/>
-              </a:ext>
-            </a:extLst>
-          </p:cNvPr>
-          <p:cNvSpPr>
-            <a:spLocks noGrp="1"/>
-          </p:cNvSpPr>
-          <p:nvPr>
-            <p:ph type="sldNum" sz="quarter" idx="12"/>
-          </p:nvPr>
-        </p:nvSpPr>
-        <p:spPr/>
-        <p:txBody>
-          <a:bodyPr/>
-          <a:lstStyle/>
-          <a:p>
-            <a:fld id="{982A7450-C9B7-48AD-BEA2-175AC75E73D8}" type="slidenum">
-              <a:rPr lang="en-US" smtClean="0"/>
-              <a:t>‹#›</a:t>
-            </a:fld>
             <a:endParaRPr lang="en-US"/>
           </a:p>
         </p:txBody>
@@ -4562,35 +4654,6 @@
           </a:p>
         </p:txBody>
       </p:sp>
-      <p:sp>
-        <p:nvSpPr>
-          <p:cNvPr id="6" name="Slide Number Placeholder 5">
-            <a:extLst>
-              <a:ext uri="{FF2B5EF4-FFF2-40B4-BE49-F238E27FC236}">
-                <a16:creationId xmlns:a16="http://schemas.microsoft.com/office/drawing/2014/main" id="{28C406AE-A605-4817-94E1-31E39631009D}"/>
-              </a:ext>
-            </a:extLst>
-          </p:cNvPr>
-          <p:cNvSpPr>
-            <a:spLocks noGrp="1"/>
-          </p:cNvSpPr>
-          <p:nvPr>
-            <p:ph type="sldNum" sz="quarter" idx="12"/>
-          </p:nvPr>
-        </p:nvSpPr>
-        <p:spPr/>
-        <p:txBody>
-          <a:bodyPr/>
-          <a:lstStyle/>
-          <a:p>
-            <a:fld id="{982A7450-C9B7-48AD-BEA2-175AC75E73D8}" type="slidenum">
-              <a:rPr lang="en-US" smtClean="0"/>
-              <a:t>‹#›</a:t>
-            </a:fld>
-            <a:endParaRPr lang="en-US"/>
-          </a:p>
-        </p:txBody>
-      </p:sp>
     </p:spTree>
     <p:extLst>
       <p:ext uri="{BB962C8B-B14F-4D97-AF65-F5344CB8AC3E}">
@@ -4639,7 +4702,7 @@
         </p:nvSpPr>
         <p:spPr>
           <a:xfrm>
-            <a:off x="831850" y="1709738"/>
+            <a:off x="831850" y="2052638"/>
             <a:ext cx="10515600" cy="2852737"/>
           </a:xfrm>
         </p:spPr>
@@ -4647,7 +4710,7 @@
           <a:bodyPr anchor="b"/>
           <a:lstStyle>
             <a:lvl1pPr>
-              <a:defRPr sz="6000"/>
+              <a:defRPr sz="4800"/>
             </a:lvl1pPr>
           </a:lstStyle>
           <a:p>
@@ -4676,7 +4739,7 @@
         </p:nvSpPr>
         <p:spPr>
           <a:xfrm>
-            <a:off x="831850" y="4589463"/>
+            <a:off x="831850" y="4932363"/>
             <a:ext cx="10515600" cy="1500187"/>
           </a:xfrm>
         </p:spPr>
@@ -4685,7 +4748,7 @@
           <a:lstStyle>
             <a:lvl1pPr marL="0" indent="0">
               <a:buNone/>
-              <a:defRPr sz="2400">
+              <a:defRPr sz="1920">
                 <a:solidFill>
                   <a:schemeClr val="tx1">
                     <a:tint val="75000"/>
@@ -4695,7 +4758,7 @@
             </a:lvl1pPr>
             <a:lvl2pPr marL="457200" indent="0">
               <a:buNone/>
-              <a:defRPr sz="2000">
+              <a:defRPr sz="1600">
                 <a:solidFill>
                   <a:schemeClr val="tx1">
                     <a:tint val="75000"/>
@@ -4705,7 +4768,7 @@
             </a:lvl2pPr>
             <a:lvl3pPr marL="914400" indent="0">
               <a:buNone/>
-              <a:defRPr sz="1800">
+              <a:defRPr sz="1440">
                 <a:solidFill>
                   <a:schemeClr val="tx1">
                     <a:tint val="75000"/>
@@ -4715,7 +4778,7 @@
             </a:lvl3pPr>
             <a:lvl4pPr marL="1371600" indent="0">
               <a:buNone/>
-              <a:defRPr sz="1600">
+              <a:defRPr sz="1280">
                 <a:solidFill>
                   <a:schemeClr val="tx1">
                     <a:tint val="75000"/>
@@ -4725,7 +4788,7 @@
             </a:lvl4pPr>
             <a:lvl5pPr marL="1828800" indent="0">
               <a:buNone/>
-              <a:defRPr sz="1600">
+              <a:defRPr sz="1280">
                 <a:solidFill>
                   <a:schemeClr val="tx1">
                     <a:tint val="75000"/>
@@ -4735,7 +4798,7 @@
             </a:lvl5pPr>
             <a:lvl6pPr marL="2286000" indent="0">
               <a:buNone/>
-              <a:defRPr sz="1600">
+              <a:defRPr sz="1280">
                 <a:solidFill>
                   <a:schemeClr val="tx1">
                     <a:tint val="75000"/>
@@ -4745,7 +4808,7 @@
             </a:lvl6pPr>
             <a:lvl7pPr marL="2743200" indent="0">
               <a:buNone/>
-              <a:defRPr sz="1600">
+              <a:defRPr sz="1280">
                 <a:solidFill>
                   <a:schemeClr val="tx1">
                     <a:tint val="75000"/>
@@ -4755,7 +4818,7 @@
             </a:lvl7pPr>
             <a:lvl8pPr marL="3200400" indent="0">
               <a:buNone/>
-              <a:defRPr sz="1600">
+              <a:defRPr sz="1280">
                 <a:solidFill>
                   <a:schemeClr val="tx1">
                     <a:tint val="75000"/>
@@ -4765,7 +4828,7 @@
             </a:lvl8pPr>
             <a:lvl9pPr marL="3657600" indent="0">
               <a:buNone/>
-              <a:defRPr sz="1600">
+              <a:defRPr sz="1280">
                 <a:solidFill>
                   <a:schemeClr val="tx1">
                     <a:tint val="75000"/>
@@ -4833,35 +4896,6 @@
           <a:bodyPr/>
           <a:lstStyle/>
           <a:p>
-            <a:endParaRPr lang="en-US"/>
-          </a:p>
-        </p:txBody>
-      </p:sp>
-      <p:sp>
-        <p:nvSpPr>
-          <p:cNvPr id="6" name="Slide Number Placeholder 5">
-            <a:extLst>
-              <a:ext uri="{FF2B5EF4-FFF2-40B4-BE49-F238E27FC236}">
-                <a16:creationId xmlns:a16="http://schemas.microsoft.com/office/drawing/2014/main" id="{AA0E0AD8-7D14-4C22-908C-C03A9AF3C8F2}"/>
-              </a:ext>
-            </a:extLst>
-          </p:cNvPr>
-          <p:cNvSpPr>
-            <a:spLocks noGrp="1"/>
-          </p:cNvSpPr>
-          <p:nvPr>
-            <p:ph type="sldNum" sz="quarter" idx="12"/>
-          </p:nvPr>
-        </p:nvSpPr>
-        <p:spPr/>
-        <p:txBody>
-          <a:bodyPr/>
-          <a:lstStyle/>
-          <a:p>
-            <a:fld id="{982A7450-C9B7-48AD-BEA2-175AC75E73D8}" type="slidenum">
-              <a:rPr lang="en-US" smtClean="0"/>
-              <a:t>‹#›</a:t>
-            </a:fld>
             <a:endParaRPr lang="en-US"/>
           </a:p>
         </p:txBody>
@@ -4942,7 +4976,7 @@
         </p:nvSpPr>
         <p:spPr>
           <a:xfrm>
-            <a:off x="838200" y="1825625"/>
+            <a:off x="838200" y="2168525"/>
             <a:ext cx="5181600" cy="4351338"/>
           </a:xfrm>
         </p:spPr>
@@ -5004,7 +5038,7 @@
         </p:nvSpPr>
         <p:spPr>
           <a:xfrm>
-            <a:off x="6172200" y="1825625"/>
+            <a:off x="6172200" y="2168525"/>
             <a:ext cx="5181600" cy="4351338"/>
           </a:xfrm>
         </p:spPr>
@@ -5098,35 +5132,6 @@
           <a:bodyPr/>
           <a:lstStyle/>
           <a:p>
-            <a:endParaRPr lang="en-US"/>
-          </a:p>
-        </p:txBody>
-      </p:sp>
-      <p:sp>
-        <p:nvSpPr>
-          <p:cNvPr id="7" name="Slide Number Placeholder 6">
-            <a:extLst>
-              <a:ext uri="{FF2B5EF4-FFF2-40B4-BE49-F238E27FC236}">
-                <a16:creationId xmlns:a16="http://schemas.microsoft.com/office/drawing/2014/main" id="{F92A7113-D789-45A4-B8D5-92877644F003}"/>
-              </a:ext>
-            </a:extLst>
-          </p:cNvPr>
-          <p:cNvSpPr>
-            <a:spLocks noGrp="1"/>
-          </p:cNvSpPr>
-          <p:nvPr>
-            <p:ph type="sldNum" sz="quarter" idx="12"/>
-          </p:nvPr>
-        </p:nvSpPr>
-        <p:spPr/>
-        <p:txBody>
-          <a:bodyPr/>
-          <a:lstStyle/>
-          <a:p>
-            <a:fld id="{982A7450-C9B7-48AD-BEA2-175AC75E73D8}" type="slidenum">
-              <a:rPr lang="en-US" smtClean="0"/>
-              <a:t>‹#›</a:t>
-            </a:fld>
             <a:endParaRPr lang="en-US"/>
           </a:p>
         </p:txBody>
@@ -5179,7 +5184,7 @@
         </p:nvSpPr>
         <p:spPr>
           <a:xfrm>
-            <a:off x="839788" y="365125"/>
+            <a:off x="839788" y="708025"/>
             <a:ext cx="10515600" cy="1325563"/>
           </a:xfrm>
         </p:spPr>
@@ -5212,7 +5217,7 @@
         </p:nvSpPr>
         <p:spPr>
           <a:xfrm>
-            <a:off x="839788" y="1681163"/>
+            <a:off x="839788" y="2024063"/>
             <a:ext cx="5157787" cy="823912"/>
           </a:xfrm>
         </p:spPr>
@@ -5221,39 +5226,39 @@
           <a:lstStyle>
             <a:lvl1pPr marL="0" indent="0">
               <a:buNone/>
-              <a:defRPr sz="2400" b="1"/>
+              <a:defRPr sz="1920" b="1"/>
             </a:lvl1pPr>
             <a:lvl2pPr marL="457200" indent="0">
               <a:buNone/>
-              <a:defRPr sz="2000" b="1"/>
+              <a:defRPr sz="1600" b="1"/>
             </a:lvl2pPr>
             <a:lvl3pPr marL="914400" indent="0">
               <a:buNone/>
-              <a:defRPr sz="1800" b="1"/>
+              <a:defRPr sz="1440" b="1"/>
             </a:lvl3pPr>
             <a:lvl4pPr marL="1371600" indent="0">
               <a:buNone/>
-              <a:defRPr sz="1600" b="1"/>
+              <a:defRPr sz="1280" b="1"/>
             </a:lvl4pPr>
             <a:lvl5pPr marL="1828800" indent="0">
               <a:buNone/>
-              <a:defRPr sz="1600" b="1"/>
+              <a:defRPr sz="1280" b="1"/>
             </a:lvl5pPr>
             <a:lvl6pPr marL="2286000" indent="0">
               <a:buNone/>
-              <a:defRPr sz="1600" b="1"/>
+              <a:defRPr sz="1280" b="1"/>
             </a:lvl6pPr>
             <a:lvl7pPr marL="2743200" indent="0">
               <a:buNone/>
-              <a:defRPr sz="1600" b="1"/>
+              <a:defRPr sz="1280" b="1"/>
             </a:lvl7pPr>
             <a:lvl8pPr marL="3200400" indent="0">
               <a:buNone/>
-              <a:defRPr sz="1600" b="1"/>
+              <a:defRPr sz="1280" b="1"/>
             </a:lvl8pPr>
             <a:lvl9pPr marL="3657600" indent="0">
               <a:buNone/>
-              <a:defRPr sz="1600" b="1"/>
+              <a:defRPr sz="1280" b="1"/>
             </a:lvl9pPr>
           </a:lstStyle>
           <a:p>
@@ -5283,7 +5288,7 @@
         </p:nvSpPr>
         <p:spPr>
           <a:xfrm>
-            <a:off x="839788" y="2505075"/>
+            <a:off x="839788" y="2847975"/>
             <a:ext cx="5157787" cy="3684588"/>
           </a:xfrm>
         </p:spPr>
@@ -5345,7 +5350,7 @@
         </p:nvSpPr>
         <p:spPr>
           <a:xfrm>
-            <a:off x="6172200" y="1681163"/>
+            <a:off x="6172200" y="2024063"/>
             <a:ext cx="5183188" cy="823912"/>
           </a:xfrm>
         </p:spPr>
@@ -5354,39 +5359,39 @@
           <a:lstStyle>
             <a:lvl1pPr marL="0" indent="0">
               <a:buNone/>
-              <a:defRPr sz="2400" b="1"/>
+              <a:defRPr sz="1920" b="1"/>
             </a:lvl1pPr>
             <a:lvl2pPr marL="457200" indent="0">
               <a:buNone/>
-              <a:defRPr sz="2000" b="1"/>
+              <a:defRPr sz="1600" b="1"/>
             </a:lvl2pPr>
             <a:lvl3pPr marL="914400" indent="0">
               <a:buNone/>
-              <a:defRPr sz="1800" b="1"/>
+              <a:defRPr sz="1440" b="1"/>
             </a:lvl3pPr>
             <a:lvl4pPr marL="1371600" indent="0">
               <a:buNone/>
-              <a:defRPr sz="1600" b="1"/>
+              <a:defRPr sz="1280" b="1"/>
             </a:lvl4pPr>
             <a:lvl5pPr marL="1828800" indent="0">
               <a:buNone/>
-              <a:defRPr sz="1600" b="1"/>
+              <a:defRPr sz="1280" b="1"/>
             </a:lvl5pPr>
             <a:lvl6pPr marL="2286000" indent="0">
               <a:buNone/>
-              <a:defRPr sz="1600" b="1"/>
+              <a:defRPr sz="1280" b="1"/>
             </a:lvl6pPr>
             <a:lvl7pPr marL="2743200" indent="0">
               <a:buNone/>
-              <a:defRPr sz="1600" b="1"/>
+              <a:defRPr sz="1280" b="1"/>
             </a:lvl7pPr>
             <a:lvl8pPr marL="3200400" indent="0">
               <a:buNone/>
-              <a:defRPr sz="1600" b="1"/>
+              <a:defRPr sz="1280" b="1"/>
             </a:lvl8pPr>
             <a:lvl9pPr marL="3657600" indent="0">
               <a:buNone/>
-              <a:defRPr sz="1600" b="1"/>
+              <a:defRPr sz="1280" b="1"/>
             </a:lvl9pPr>
           </a:lstStyle>
           <a:p>
@@ -5416,7 +5421,7 @@
         </p:nvSpPr>
         <p:spPr>
           <a:xfrm>
-            <a:off x="6172200" y="2505075"/>
+            <a:off x="6172200" y="2847975"/>
             <a:ext cx="5183188" cy="3684588"/>
           </a:xfrm>
         </p:spPr>
@@ -5510,35 +5515,6 @@
           <a:bodyPr/>
           <a:lstStyle/>
           <a:p>
-            <a:endParaRPr lang="en-US"/>
-          </a:p>
-        </p:txBody>
-      </p:sp>
-      <p:sp>
-        <p:nvSpPr>
-          <p:cNvPr id="9" name="Slide Number Placeholder 8">
-            <a:extLst>
-              <a:ext uri="{FF2B5EF4-FFF2-40B4-BE49-F238E27FC236}">
-                <a16:creationId xmlns:a16="http://schemas.microsoft.com/office/drawing/2014/main" id="{105CB092-0039-4B18-8D51-DA50C46C8764}"/>
-              </a:ext>
-            </a:extLst>
-          </p:cNvPr>
-          <p:cNvSpPr>
-            <a:spLocks noGrp="1"/>
-          </p:cNvSpPr>
-          <p:nvPr>
-            <p:ph type="sldNum" sz="quarter" idx="12"/>
-          </p:nvPr>
-        </p:nvSpPr>
-        <p:spPr/>
-        <p:txBody>
-          <a:bodyPr/>
-          <a:lstStyle/>
-          <a:p>
-            <a:fld id="{982A7450-C9B7-48AD-BEA2-175AC75E73D8}" type="slidenum">
-              <a:rPr lang="en-US" smtClean="0"/>
-              <a:t>‹#›</a:t>
-            </a:fld>
             <a:endParaRPr lang="en-US"/>
           </a:p>
         </p:txBody>
@@ -5655,35 +5631,6 @@
           </a:p>
         </p:txBody>
       </p:sp>
-      <p:sp>
-        <p:nvSpPr>
-          <p:cNvPr id="5" name="Slide Number Placeholder 4">
-            <a:extLst>
-              <a:ext uri="{FF2B5EF4-FFF2-40B4-BE49-F238E27FC236}">
-                <a16:creationId xmlns:a16="http://schemas.microsoft.com/office/drawing/2014/main" id="{D7EC4E1A-57D1-4168-AA42-79FDF6433951}"/>
-              </a:ext>
-            </a:extLst>
-          </p:cNvPr>
-          <p:cNvSpPr>
-            <a:spLocks noGrp="1"/>
-          </p:cNvSpPr>
-          <p:nvPr>
-            <p:ph type="sldNum" sz="quarter" idx="12"/>
-          </p:nvPr>
-        </p:nvSpPr>
-        <p:spPr/>
-        <p:txBody>
-          <a:bodyPr/>
-          <a:lstStyle/>
-          <a:p>
-            <a:fld id="{982A7450-C9B7-48AD-BEA2-175AC75E73D8}" type="slidenum">
-              <a:rPr lang="en-US" smtClean="0"/>
-              <a:t>‹#›</a:t>
-            </a:fld>
-            <a:endParaRPr lang="en-US"/>
-          </a:p>
-        </p:txBody>
-      </p:sp>
     </p:spTree>
     <p:extLst>
       <p:ext uri="{BB962C8B-B14F-4D97-AF65-F5344CB8AC3E}">
@@ -5768,35 +5715,6 @@
           </a:p>
         </p:txBody>
       </p:sp>
-      <p:sp>
-        <p:nvSpPr>
-          <p:cNvPr id="4" name="Slide Number Placeholder 3">
-            <a:extLst>
-              <a:ext uri="{FF2B5EF4-FFF2-40B4-BE49-F238E27FC236}">
-                <a16:creationId xmlns:a16="http://schemas.microsoft.com/office/drawing/2014/main" id="{E5F4B204-A1EE-442D-8B56-60BF9D89B591}"/>
-              </a:ext>
-            </a:extLst>
-          </p:cNvPr>
-          <p:cNvSpPr>
-            <a:spLocks noGrp="1"/>
-          </p:cNvSpPr>
-          <p:nvPr>
-            <p:ph type="sldNum" sz="quarter" idx="12"/>
-          </p:nvPr>
-        </p:nvSpPr>
-        <p:spPr/>
-        <p:txBody>
-          <a:bodyPr/>
-          <a:lstStyle/>
-          <a:p>
-            <a:fld id="{982A7450-C9B7-48AD-BEA2-175AC75E73D8}" type="slidenum">
-              <a:rPr lang="en-US" smtClean="0"/>
-              <a:t>‹#›</a:t>
-            </a:fld>
-            <a:endParaRPr lang="en-US"/>
-          </a:p>
-        </p:txBody>
-      </p:sp>
     </p:spTree>
     <p:extLst>
       <p:ext uri="{BB962C8B-B14F-4D97-AF65-F5344CB8AC3E}">
@@ -5845,7 +5763,7 @@
         </p:nvSpPr>
         <p:spPr>
           <a:xfrm>
-            <a:off x="839788" y="457200"/>
+            <a:off x="839788" y="800100"/>
             <a:ext cx="3932237" cy="1600200"/>
           </a:xfrm>
         </p:spPr>
@@ -5853,7 +5771,7 @@
           <a:bodyPr anchor="b"/>
           <a:lstStyle>
             <a:lvl1pPr>
-              <a:defRPr sz="3200"/>
+              <a:defRPr sz="2560"/>
             </a:lvl1pPr>
           </a:lstStyle>
           <a:p>
@@ -5882,7 +5800,7 @@
         </p:nvSpPr>
         <p:spPr>
           <a:xfrm>
-            <a:off x="5183188" y="987425"/>
+            <a:off x="5183188" y="1330325"/>
             <a:ext cx="6172200" cy="4873625"/>
           </a:xfrm>
         </p:spPr>
@@ -5890,31 +5808,31 @@
           <a:bodyPr/>
           <a:lstStyle>
             <a:lvl1pPr>
-              <a:defRPr sz="3200"/>
+              <a:defRPr sz="2560"/>
             </a:lvl1pPr>
             <a:lvl2pPr>
-              <a:defRPr sz="2800"/>
+              <a:defRPr sz="2240"/>
             </a:lvl2pPr>
             <a:lvl3pPr>
-              <a:defRPr sz="2400"/>
+              <a:defRPr sz="1920"/>
             </a:lvl3pPr>
             <a:lvl4pPr>
-              <a:defRPr sz="2000"/>
+              <a:defRPr sz="1600"/>
             </a:lvl4pPr>
             <a:lvl5pPr>
-              <a:defRPr sz="2000"/>
+              <a:defRPr sz="1600"/>
             </a:lvl5pPr>
             <a:lvl6pPr>
-              <a:defRPr sz="2000"/>
+              <a:defRPr sz="1600"/>
             </a:lvl6pPr>
             <a:lvl7pPr>
-              <a:defRPr sz="2000"/>
+              <a:defRPr sz="1600"/>
             </a:lvl7pPr>
             <a:lvl8pPr>
-              <a:defRPr sz="2000"/>
+              <a:defRPr sz="1600"/>
             </a:lvl8pPr>
             <a:lvl9pPr>
-              <a:defRPr sz="2000"/>
+              <a:defRPr sz="1600"/>
             </a:lvl9pPr>
           </a:lstStyle>
           <a:p>
@@ -5972,7 +5890,7 @@
         </p:nvSpPr>
         <p:spPr>
           <a:xfrm>
-            <a:off x="839788" y="2057400"/>
+            <a:off x="839788" y="2400300"/>
             <a:ext cx="3932237" cy="3811588"/>
           </a:xfrm>
         </p:spPr>
@@ -5981,39 +5899,39 @@
           <a:lstStyle>
             <a:lvl1pPr marL="0" indent="0">
               <a:buNone/>
-              <a:defRPr sz="1600"/>
+              <a:defRPr sz="1280"/>
             </a:lvl1pPr>
             <a:lvl2pPr marL="457200" indent="0">
               <a:buNone/>
-              <a:defRPr sz="1400"/>
+              <a:defRPr sz="1120"/>
             </a:lvl2pPr>
             <a:lvl3pPr marL="914400" indent="0">
               <a:buNone/>
-              <a:defRPr sz="1200"/>
+              <a:defRPr sz="960"/>
             </a:lvl3pPr>
             <a:lvl4pPr marL="1371600" indent="0">
               <a:buNone/>
-              <a:defRPr sz="1000"/>
+              <a:defRPr sz="800"/>
             </a:lvl4pPr>
             <a:lvl5pPr marL="1828800" indent="0">
               <a:buNone/>
-              <a:defRPr sz="1000"/>
+              <a:defRPr sz="800"/>
             </a:lvl5pPr>
             <a:lvl6pPr marL="2286000" indent="0">
               <a:buNone/>
-              <a:defRPr sz="1000"/>
+              <a:defRPr sz="800"/>
             </a:lvl6pPr>
             <a:lvl7pPr marL="2743200" indent="0">
               <a:buNone/>
-              <a:defRPr sz="1000"/>
+              <a:defRPr sz="800"/>
             </a:lvl7pPr>
             <a:lvl8pPr marL="3200400" indent="0">
               <a:buNone/>
-              <a:defRPr sz="1000"/>
+              <a:defRPr sz="800"/>
             </a:lvl8pPr>
             <a:lvl9pPr marL="3657600" indent="0">
               <a:buNone/>
-              <a:defRPr sz="1000"/>
+              <a:defRPr sz="800"/>
             </a:lvl9pPr>
           </a:lstStyle>
           <a:p>
@@ -6075,35 +5993,6 @@
           <a:bodyPr/>
           <a:lstStyle/>
           <a:p>
-            <a:endParaRPr lang="en-US"/>
-          </a:p>
-        </p:txBody>
-      </p:sp>
-      <p:sp>
-        <p:nvSpPr>
-          <p:cNvPr id="7" name="Slide Number Placeholder 6">
-            <a:extLst>
-              <a:ext uri="{FF2B5EF4-FFF2-40B4-BE49-F238E27FC236}">
-                <a16:creationId xmlns:a16="http://schemas.microsoft.com/office/drawing/2014/main" id="{50B06748-EB27-41F7-9EFF-59DED548F7BE}"/>
-              </a:ext>
-            </a:extLst>
-          </p:cNvPr>
-          <p:cNvSpPr>
-            <a:spLocks noGrp="1"/>
-          </p:cNvSpPr>
-          <p:nvPr>
-            <p:ph type="sldNum" sz="quarter" idx="12"/>
-          </p:nvPr>
-        </p:nvSpPr>
-        <p:spPr/>
-        <p:txBody>
-          <a:bodyPr/>
-          <a:lstStyle/>
-          <a:p>
-            <a:fld id="{982A7450-C9B7-48AD-BEA2-175AC75E73D8}" type="slidenum">
-              <a:rPr lang="en-US" smtClean="0"/>
-              <a:t>‹#›</a:t>
-            </a:fld>
             <a:endParaRPr lang="en-US"/>
           </a:p>
         </p:txBody>
@@ -6156,7 +6045,7 @@
         </p:nvSpPr>
         <p:spPr>
           <a:xfrm>
-            <a:off x="839788" y="457200"/>
+            <a:off x="839788" y="800100"/>
             <a:ext cx="3932237" cy="1600200"/>
           </a:xfrm>
         </p:spPr>
@@ -6164,7 +6053,7 @@
           <a:bodyPr anchor="b"/>
           <a:lstStyle>
             <a:lvl1pPr>
-              <a:defRPr sz="3200"/>
+              <a:defRPr sz="2560"/>
             </a:lvl1pPr>
           </a:lstStyle>
           <a:p>
@@ -6193,7 +6082,7 @@
         </p:nvSpPr>
         <p:spPr>
           <a:xfrm>
-            <a:off x="5183188" y="987425"/>
+            <a:off x="5183188" y="1330325"/>
             <a:ext cx="6172200" cy="4873625"/>
           </a:xfrm>
         </p:spPr>
@@ -6202,39 +6091,39 @@
           <a:lstStyle>
             <a:lvl1pPr marL="0" indent="0">
               <a:buNone/>
-              <a:defRPr sz="3200"/>
+              <a:defRPr sz="2560"/>
             </a:lvl1pPr>
             <a:lvl2pPr marL="457200" indent="0">
               <a:buNone/>
-              <a:defRPr sz="2800"/>
+              <a:defRPr sz="2240"/>
             </a:lvl2pPr>
             <a:lvl3pPr marL="914400" indent="0">
               <a:buNone/>
-              <a:defRPr sz="2400"/>
+              <a:defRPr sz="1920"/>
             </a:lvl3pPr>
             <a:lvl4pPr marL="1371600" indent="0">
               <a:buNone/>
-              <a:defRPr sz="2000"/>
+              <a:defRPr sz="1600"/>
             </a:lvl4pPr>
             <a:lvl5pPr marL="1828800" indent="0">
               <a:buNone/>
-              <a:defRPr sz="2000"/>
+              <a:defRPr sz="1600"/>
             </a:lvl5pPr>
             <a:lvl6pPr marL="2286000" indent="0">
               <a:buNone/>
-              <a:defRPr sz="2000"/>
+              <a:defRPr sz="1600"/>
             </a:lvl6pPr>
             <a:lvl7pPr marL="2743200" indent="0">
               <a:buNone/>
-              <a:defRPr sz="2000"/>
+              <a:defRPr sz="1600"/>
             </a:lvl7pPr>
             <a:lvl8pPr marL="3200400" indent="0">
               <a:buNone/>
-              <a:defRPr sz="2000"/>
+              <a:defRPr sz="1600"/>
             </a:lvl8pPr>
             <a:lvl9pPr marL="3657600" indent="0">
               <a:buNone/>
-              <a:defRPr sz="2000"/>
+              <a:defRPr sz="1600"/>
             </a:lvl9pPr>
           </a:lstStyle>
           <a:p>
@@ -6260,7 +6149,7 @@
         </p:nvSpPr>
         <p:spPr>
           <a:xfrm>
-            <a:off x="839788" y="2057400"/>
+            <a:off x="839788" y="2400300"/>
             <a:ext cx="3932237" cy="3811588"/>
           </a:xfrm>
         </p:spPr>
@@ -6269,39 +6158,39 @@
           <a:lstStyle>
             <a:lvl1pPr marL="0" indent="0">
               <a:buNone/>
-              <a:defRPr sz="1600"/>
+              <a:defRPr sz="1280"/>
             </a:lvl1pPr>
             <a:lvl2pPr marL="457200" indent="0">
               <a:buNone/>
-              <a:defRPr sz="1400"/>
+              <a:defRPr sz="1120"/>
             </a:lvl2pPr>
             <a:lvl3pPr marL="914400" indent="0">
               <a:buNone/>
-              <a:defRPr sz="1200"/>
+              <a:defRPr sz="960"/>
             </a:lvl3pPr>
             <a:lvl4pPr marL="1371600" indent="0">
               <a:buNone/>
-              <a:defRPr sz="1000"/>
+              <a:defRPr sz="800"/>
             </a:lvl4pPr>
             <a:lvl5pPr marL="1828800" indent="0">
               <a:buNone/>
-              <a:defRPr sz="1000"/>
+              <a:defRPr sz="800"/>
             </a:lvl5pPr>
             <a:lvl6pPr marL="2286000" indent="0">
               <a:buNone/>
-              <a:defRPr sz="1000"/>
+              <a:defRPr sz="800"/>
             </a:lvl6pPr>
             <a:lvl7pPr marL="2743200" indent="0">
               <a:buNone/>
-              <a:defRPr sz="1000"/>
+              <a:defRPr sz="800"/>
             </a:lvl7pPr>
             <a:lvl8pPr marL="3200400" indent="0">
               <a:buNone/>
-              <a:defRPr sz="1000"/>
+              <a:defRPr sz="800"/>
             </a:lvl8pPr>
             <a:lvl9pPr marL="3657600" indent="0">
               <a:buNone/>
-              <a:defRPr sz="1000"/>
+              <a:defRPr sz="800"/>
             </a:lvl9pPr>
           </a:lstStyle>
           <a:p>
@@ -6363,35 +6252,6 @@
           <a:bodyPr/>
           <a:lstStyle/>
           <a:p>
-            <a:endParaRPr lang="en-US"/>
-          </a:p>
-        </p:txBody>
-      </p:sp>
-      <p:sp>
-        <p:nvSpPr>
-          <p:cNvPr id="7" name="Slide Number Placeholder 6">
-            <a:extLst>
-              <a:ext uri="{FF2B5EF4-FFF2-40B4-BE49-F238E27FC236}">
-                <a16:creationId xmlns:a16="http://schemas.microsoft.com/office/drawing/2014/main" id="{C0E61E62-9434-48DA-B7C5-CA8403760521}"/>
-              </a:ext>
-            </a:extLst>
-          </p:cNvPr>
-          <p:cNvSpPr>
-            <a:spLocks noGrp="1"/>
-          </p:cNvSpPr>
-          <p:nvPr>
-            <p:ph type="sldNum" sz="quarter" idx="12"/>
-          </p:nvPr>
-        </p:nvSpPr>
-        <p:spPr/>
-        <p:txBody>
-          <a:bodyPr/>
-          <a:lstStyle/>
-          <a:p>
-            <a:fld id="{982A7450-C9B7-48AD-BEA2-175AC75E73D8}" type="slidenum">
-              <a:rPr lang="en-US" smtClean="0"/>
-              <a:t>‹#›</a:t>
-            </a:fld>
             <a:endParaRPr lang="en-US"/>
           </a:p>
         </p:txBody>
@@ -6449,7 +6309,7 @@
         </p:nvSpPr>
         <p:spPr>
           <a:xfrm>
-            <a:off x="838200" y="365125"/>
+            <a:off x="838200" y="708025"/>
             <a:ext cx="10515600" cy="1325563"/>
           </a:xfrm>
           <a:prstGeom prst="rect">
@@ -6487,7 +6347,7 @@
         </p:nvSpPr>
         <p:spPr>
           <a:xfrm>
-            <a:off x="838200" y="1825625"/>
+            <a:off x="838200" y="2168525"/>
             <a:ext cx="10515600" cy="4351338"/>
           </a:xfrm>
           <a:prstGeom prst="rect">
@@ -6554,7 +6414,7 @@
         </p:nvSpPr>
         <p:spPr>
           <a:xfrm>
-            <a:off x="838200" y="6356350"/>
+            <a:off x="838200" y="6699250"/>
             <a:ext cx="2743200" cy="365125"/>
           </a:xfrm>
           <a:prstGeom prst="rect">
@@ -6565,7 +6425,7 @@
           <a:bodyPr vert="horz" lIns="91440" tIns="45720" rIns="91440" bIns="45720" rtlCol="0" anchor="ctr"/>
           <a:lstStyle>
             <a:lvl1pPr algn="l">
-              <a:defRPr sz="1200">
+              <a:defRPr sz="960">
                 <a:solidFill>
                   <a:schemeClr val="tx1">
                     <a:tint val="75000"/>
@@ -6601,7 +6461,7 @@
         </p:nvSpPr>
         <p:spPr>
           <a:xfrm>
-            <a:off x="4038600" y="6356350"/>
+            <a:off x="4038600" y="6699250"/>
             <a:ext cx="4114800" cy="365125"/>
           </a:xfrm>
           <a:prstGeom prst="rect">
@@ -6612,7 +6472,7 @@
           <a:bodyPr vert="horz" lIns="91440" tIns="45720" rIns="91440" bIns="45720" rtlCol="0" anchor="ctr"/>
           <a:lstStyle>
             <a:lvl1pPr algn="ctr">
-              <a:defRPr sz="1200">
+              <a:defRPr sz="960">
                 <a:solidFill>
                   <a:schemeClr val="tx1">
                     <a:tint val="75000"/>
@@ -6622,53 +6482,6 @@
             </a:lvl1pPr>
           </a:lstStyle>
           <a:p>
-            <a:endParaRPr lang="en-US"/>
-          </a:p>
-        </p:txBody>
-      </p:sp>
-      <p:sp>
-        <p:nvSpPr>
-          <p:cNvPr id="6" name="Slide Number Placeholder 5">
-            <a:extLst>
-              <a:ext uri="{FF2B5EF4-FFF2-40B4-BE49-F238E27FC236}">
-                <a16:creationId xmlns:a16="http://schemas.microsoft.com/office/drawing/2014/main" id="{6389E197-9310-4CAA-81A7-C8534A51720C}"/>
-              </a:ext>
-            </a:extLst>
-          </p:cNvPr>
-          <p:cNvSpPr>
-            <a:spLocks noGrp="1"/>
-          </p:cNvSpPr>
-          <p:nvPr>
-            <p:ph type="sldNum" sz="quarter" idx="4"/>
-          </p:nvPr>
-        </p:nvSpPr>
-        <p:spPr>
-          <a:xfrm>
-            <a:off x="8610600" y="6356350"/>
-            <a:ext cx="2743200" cy="365125"/>
-          </a:xfrm>
-          <a:prstGeom prst="rect">
-            <a:avLst/>
-          </a:prstGeom>
-        </p:spPr>
-        <p:txBody>
-          <a:bodyPr vert="horz" lIns="91440" tIns="45720" rIns="91440" bIns="45720" rtlCol="0" anchor="ctr"/>
-          <a:lstStyle>
-            <a:lvl1pPr algn="r">
-              <a:defRPr sz="1200">
-                <a:solidFill>
-                  <a:schemeClr val="tx1">
-                    <a:tint val="75000"/>
-                  </a:schemeClr>
-                </a:solidFill>
-              </a:defRPr>
-            </a:lvl1pPr>
-          </a:lstStyle>
-          <a:p>
-            <a:fld id="{982A7450-C9B7-48AD-BEA2-175AC75E73D8}" type="slidenum">
-              <a:rPr lang="en-US" smtClean="0"/>
-              <a:t>‹#›</a:t>
-            </a:fld>
             <a:endParaRPr lang="en-US"/>
           </a:p>
         </p:txBody>
@@ -6705,11 +6518,11 @@
           <a:spcPct val="0"/>
         </a:spcBef>
         <a:buNone/>
-        <a:defRPr sz="4400" kern="1200">
+        <a:defRPr sz="3520" kern="1200">
           <a:solidFill>
             <a:schemeClr val="tx1"/>
           </a:solidFill>
-          <a:latin typeface="+mj-lt"/>
+          <a:latin typeface="Arial"/>
           <a:ea typeface="+mj-ea"/>
           <a:cs typeface="+mj-cs"/>
         </a:defRPr>
@@ -6725,11 +6538,11 @@
         </a:spcBef>
         <a:buFont typeface="Arial" panose="020B0604020202020204" pitchFamily="34" charset="0"/>
         <a:buChar char="•"/>
-        <a:defRPr sz="2800" kern="1200">
+        <a:defRPr sz="2240" kern="1200">
           <a:solidFill>
             <a:schemeClr val="tx1"/>
           </a:solidFill>
-          <a:latin typeface="+mn-lt"/>
+          <a:latin typeface="Arial"/>
           <a:ea typeface="+mn-ea"/>
           <a:cs typeface="+mn-cs"/>
         </a:defRPr>
@@ -6743,11 +6556,11 @@
         </a:spcBef>
         <a:buFont typeface="Arial" panose="020B0604020202020204" pitchFamily="34" charset="0"/>
         <a:buChar char="•"/>
-        <a:defRPr sz="2400" kern="1200">
+        <a:defRPr sz="1920" kern="1200">
           <a:solidFill>
             <a:schemeClr val="tx1"/>
           </a:solidFill>
-          <a:latin typeface="+mn-lt"/>
+          <a:latin typeface="Arial"/>
           <a:ea typeface="+mn-ea"/>
           <a:cs typeface="+mn-cs"/>
         </a:defRPr>
@@ -6761,11 +6574,11 @@
         </a:spcBef>
         <a:buFont typeface="Arial" panose="020B0604020202020204" pitchFamily="34" charset="0"/>
         <a:buChar char="•"/>
-        <a:defRPr sz="2000" kern="1200">
+        <a:defRPr sz="1600" kern="1200">
           <a:solidFill>
             <a:schemeClr val="tx1"/>
           </a:solidFill>
-          <a:latin typeface="+mn-lt"/>
+          <a:latin typeface="Arial"/>
           <a:ea typeface="+mn-ea"/>
           <a:cs typeface="+mn-cs"/>
         </a:defRPr>
@@ -6779,11 +6592,11 @@
         </a:spcBef>
         <a:buFont typeface="Arial" panose="020B0604020202020204" pitchFamily="34" charset="0"/>
         <a:buChar char="•"/>
-        <a:defRPr sz="1800" kern="1200">
+        <a:defRPr sz="1440" kern="1200">
           <a:solidFill>
             <a:schemeClr val="tx1"/>
           </a:solidFill>
-          <a:latin typeface="+mn-lt"/>
+          <a:latin typeface="Arial"/>
           <a:ea typeface="+mn-ea"/>
           <a:cs typeface="+mn-cs"/>
         </a:defRPr>
@@ -6797,11 +6610,11 @@
         </a:spcBef>
         <a:buFont typeface="Arial" panose="020B0604020202020204" pitchFamily="34" charset="0"/>
         <a:buChar char="•"/>
-        <a:defRPr sz="1800" kern="1200">
+        <a:defRPr sz="1440" kern="1200">
           <a:solidFill>
             <a:schemeClr val="tx1"/>
           </a:solidFill>
-          <a:latin typeface="+mn-lt"/>
+          <a:latin typeface="Arial"/>
           <a:ea typeface="+mn-ea"/>
           <a:cs typeface="+mn-cs"/>
         </a:defRPr>
@@ -6815,11 +6628,11 @@
         </a:spcBef>
         <a:buFont typeface="Arial" panose="020B0604020202020204" pitchFamily="34" charset="0"/>
         <a:buChar char="•"/>
-        <a:defRPr sz="1800" kern="1200">
+        <a:defRPr sz="1440" kern="1200">
           <a:solidFill>
             <a:schemeClr val="tx1"/>
           </a:solidFill>
-          <a:latin typeface="+mn-lt"/>
+          <a:latin typeface="Arial"/>
           <a:ea typeface="+mn-ea"/>
           <a:cs typeface="+mn-cs"/>
         </a:defRPr>
@@ -6833,11 +6646,11 @@
         </a:spcBef>
         <a:buFont typeface="Arial" panose="020B0604020202020204" pitchFamily="34" charset="0"/>
         <a:buChar char="•"/>
-        <a:defRPr sz="1800" kern="1200">
+        <a:defRPr sz="1440" kern="1200">
           <a:solidFill>
             <a:schemeClr val="tx1"/>
           </a:solidFill>
-          <a:latin typeface="+mn-lt"/>
+          <a:latin typeface="Arial"/>
           <a:ea typeface="+mn-ea"/>
           <a:cs typeface="+mn-cs"/>
         </a:defRPr>
@@ -6851,11 +6664,11 @@
         </a:spcBef>
         <a:buFont typeface="Arial" panose="020B0604020202020204" pitchFamily="34" charset="0"/>
         <a:buChar char="•"/>
-        <a:defRPr sz="1800" kern="1200">
+        <a:defRPr sz="1440" kern="1200">
           <a:solidFill>
             <a:schemeClr val="tx1"/>
           </a:solidFill>
-          <a:latin typeface="+mn-lt"/>
+          <a:latin typeface="Arial"/>
           <a:ea typeface="+mn-ea"/>
           <a:cs typeface="+mn-cs"/>
         </a:defRPr>
@@ -6869,11 +6682,11 @@
         </a:spcBef>
         <a:buFont typeface="Arial" panose="020B0604020202020204" pitchFamily="34" charset="0"/>
         <a:buChar char="•"/>
-        <a:defRPr sz="1800" kern="1200">
+        <a:defRPr sz="1440" kern="1200">
           <a:solidFill>
             <a:schemeClr val="tx1"/>
           </a:solidFill>
-          <a:latin typeface="+mn-lt"/>
+          <a:latin typeface="Arial"/>
           <a:ea typeface="+mn-ea"/>
           <a:cs typeface="+mn-cs"/>
         </a:defRPr>
@@ -6884,91 +6697,91 @@
         <a:defRPr lang="en-US"/>
       </a:defPPr>
       <a:lvl1pPr marL="0" algn="l" defTabSz="914400" rtl="0" eaLnBrk="1" latinLnBrk="0" hangingPunct="1">
-        <a:defRPr sz="1800" kern="1200">
+        <a:defRPr sz="1440" kern="1200">
           <a:solidFill>
             <a:schemeClr val="tx1"/>
           </a:solidFill>
-          <a:latin typeface="+mn-lt"/>
+          <a:latin typeface="Arial"/>
           <a:ea typeface="+mn-ea"/>
           <a:cs typeface="+mn-cs"/>
         </a:defRPr>
       </a:lvl1pPr>
       <a:lvl2pPr marL="457200" algn="l" defTabSz="914400" rtl="0" eaLnBrk="1" latinLnBrk="0" hangingPunct="1">
-        <a:defRPr sz="1800" kern="1200">
+        <a:defRPr sz="1440" kern="1200">
           <a:solidFill>
             <a:schemeClr val="tx1"/>
           </a:solidFill>
-          <a:latin typeface="+mn-lt"/>
+          <a:latin typeface="Arial"/>
           <a:ea typeface="+mn-ea"/>
           <a:cs typeface="+mn-cs"/>
         </a:defRPr>
       </a:lvl2pPr>
       <a:lvl3pPr marL="914400" algn="l" defTabSz="914400" rtl="0" eaLnBrk="1" latinLnBrk="0" hangingPunct="1">
-        <a:defRPr sz="1800" kern="1200">
+        <a:defRPr sz="1440" kern="1200">
           <a:solidFill>
             <a:schemeClr val="tx1"/>
           </a:solidFill>
-          <a:latin typeface="+mn-lt"/>
+          <a:latin typeface="Arial"/>
           <a:ea typeface="+mn-ea"/>
           <a:cs typeface="+mn-cs"/>
         </a:defRPr>
       </a:lvl3pPr>
       <a:lvl4pPr marL="1371600" algn="l" defTabSz="914400" rtl="0" eaLnBrk="1" latinLnBrk="0" hangingPunct="1">
-        <a:defRPr sz="1800" kern="1200">
+        <a:defRPr sz="1440" kern="1200">
           <a:solidFill>
             <a:schemeClr val="tx1"/>
           </a:solidFill>
-          <a:latin typeface="+mn-lt"/>
+          <a:latin typeface="Arial"/>
           <a:ea typeface="+mn-ea"/>
           <a:cs typeface="+mn-cs"/>
         </a:defRPr>
       </a:lvl4pPr>
       <a:lvl5pPr marL="1828800" algn="l" defTabSz="914400" rtl="0" eaLnBrk="1" latinLnBrk="0" hangingPunct="1">
-        <a:defRPr sz="1800" kern="1200">
+        <a:defRPr sz="1440" kern="1200">
           <a:solidFill>
             <a:schemeClr val="tx1"/>
           </a:solidFill>
-          <a:latin typeface="+mn-lt"/>
+          <a:latin typeface="Arial"/>
           <a:ea typeface="+mn-ea"/>
           <a:cs typeface="+mn-cs"/>
         </a:defRPr>
       </a:lvl5pPr>
       <a:lvl6pPr marL="2286000" algn="l" defTabSz="914400" rtl="0" eaLnBrk="1" latinLnBrk="0" hangingPunct="1">
-        <a:defRPr sz="1800" kern="1200">
+        <a:defRPr sz="1440" kern="1200">
           <a:solidFill>
             <a:schemeClr val="tx1"/>
           </a:solidFill>
-          <a:latin typeface="+mn-lt"/>
+          <a:latin typeface="Arial"/>
           <a:ea typeface="+mn-ea"/>
           <a:cs typeface="+mn-cs"/>
         </a:defRPr>
       </a:lvl6pPr>
       <a:lvl7pPr marL="2743200" algn="l" defTabSz="914400" rtl="0" eaLnBrk="1" latinLnBrk="0" hangingPunct="1">
-        <a:defRPr sz="1800" kern="1200">
+        <a:defRPr sz="1440" kern="1200">
           <a:solidFill>
             <a:schemeClr val="tx1"/>
           </a:solidFill>
-          <a:latin typeface="+mn-lt"/>
+          <a:latin typeface="Arial"/>
           <a:ea typeface="+mn-ea"/>
           <a:cs typeface="+mn-cs"/>
         </a:defRPr>
       </a:lvl7pPr>
       <a:lvl8pPr marL="3200400" algn="l" defTabSz="914400" rtl="0" eaLnBrk="1" latinLnBrk="0" hangingPunct="1">
-        <a:defRPr sz="1800" kern="1200">
+        <a:defRPr sz="1440" kern="1200">
           <a:solidFill>
             <a:schemeClr val="tx1"/>
           </a:solidFill>
-          <a:latin typeface="+mn-lt"/>
+          <a:latin typeface="Arial"/>
           <a:ea typeface="+mn-ea"/>
           <a:cs typeface="+mn-cs"/>
         </a:defRPr>
       </a:lvl8pPr>
       <a:lvl9pPr marL="3657600" algn="l" defTabSz="914400" rtl="0" eaLnBrk="1" latinLnBrk="0" hangingPunct="1">
-        <a:defRPr sz="1800" kern="1200">
+        <a:defRPr sz="1440" kern="1200">
           <a:solidFill>
             <a:schemeClr val="tx1"/>
           </a:solidFill>
-          <a:latin typeface="+mn-lt"/>
+          <a:latin typeface="Arial"/>
           <a:ea typeface="+mn-ea"/>
           <a:cs typeface="+mn-cs"/>
         </a:defRPr>
@@ -7034,7 +6847,7 @@
         </p:blipFill>
         <p:spPr>
           <a:xfrm>
-            <a:off x="838201" y="2743201"/>
+            <a:off x="838201" y="3086101"/>
             <a:ext cx="1371600" cy="1371600"/>
           </a:xfrm>
           <a:prstGeom prst="rect">
@@ -7083,7 +6896,7 @@
         </p:blipFill>
         <p:spPr>
           <a:xfrm>
-            <a:off x="6641431" y="816337"/>
+            <a:off x="6641431" y="1159237"/>
             <a:ext cx="5225327" cy="5225327"/>
           </a:xfrm>
           <a:prstGeom prst="rect">
@@ -7109,7 +6922,7 @@
         </p:nvSpPr>
         <p:spPr>
           <a:xfrm>
-            <a:off x="2370667" y="2187743"/>
+            <a:off x="2370667" y="2530643"/>
             <a:ext cx="5293449" cy="2482515"/>
           </a:xfrm>
         </p:spPr>
@@ -7121,7 +6934,7 @@
           <a:p>
             <a:pPr algn="l"/>
             <a:r>
-              <a:rPr lang="en-US" sz="4700"/>
+              <a:rPr lang="en-US" sz="3760"/>
               <a:t>Signal Processing for Radio Astronomy Applications </a:t>
             </a:r>
           </a:p>
@@ -7129,30 +6942,202 @@
       </p:sp>
       <p:sp>
         <p:nvSpPr>
-          <p:cNvPr id="3" name="Slide Number Placeholder 2">
-            <a:extLst>
-              <a:ext uri="{FF2B5EF4-FFF2-40B4-BE49-F238E27FC236}">
-                <a16:creationId xmlns:a16="http://schemas.microsoft.com/office/drawing/2014/main" id="{3C3CC838-DFBA-4DB6-8E71-E5BEF83CAFCD}"/>
-              </a:ext>
-            </a:extLst>
-          </p:cNvPr>
+          <p:cNvPr id="9" name="DSPIRA 1"/>
           <p:cNvSpPr>
             <a:spLocks noGrp="1"/>
           </p:cNvSpPr>
-          <p:nvPr>
-            <p:ph type="sldNum" sz="quarter" idx="12"/>
-          </p:nvPr>
-        </p:nvSpPr>
-        <p:spPr/>
+          <p:nvPr/>
+        </p:nvSpPr>
+        <p:spPr>
+          <a:xfrm>
+            <a:off x="0" y="0"/>
+            <a:ext cx="12192000" cy="342900"/>
+          </a:xfrm>
+          <a:prstGeom prst="rect">
+            <a:avLst/>
+          </a:prstGeom>
+          <a:solidFill>
+            <a:srgbClr val="FFFFFF"/>
+          </a:solidFill>
+          <a:ln w="0">
+            <a:noFill/>
+          </a:ln>
+        </p:spPr>
+      </p:sp>
+      <p:sp>
+        <p:nvSpPr>
+          <p:cNvPr id="10" name="DSPIRA 2"/>
+          <p:cNvSpPr>
+            <a:spLocks noGrp="1"/>
+          </p:cNvSpPr>
+          <p:nvPr/>
+        </p:nvSpPr>
+        <p:spPr>
+          <a:xfrm>
+            <a:off x="0" y="7200900"/>
+            <a:ext cx="12192000" cy="342900"/>
+          </a:xfrm>
+          <a:prstGeom prst="rect">
+            <a:avLst/>
+          </a:prstGeom>
+          <a:solidFill>
+            <a:srgbClr val="FFFFFF"/>
+          </a:solidFill>
+          <a:ln w="0">
+            <a:noFill/>
+          </a:ln>
+        </p:spPr>
+      </p:sp>
+      <p:sp>
+        <p:nvSpPr>
+          <p:cNvPr id="11" name="DSPIRA 3"/>
+          <p:cNvSpPr>
+            <a:spLocks noGrp="1"/>
+          </p:cNvSpPr>
+          <p:nvPr/>
+        </p:nvSpPr>
+        <p:spPr>
+          <a:xfrm>
+            <a:off x="228600" y="76200"/>
+            <a:ext cx="4762500" cy="228600"/>
+          </a:xfrm>
+          <a:prstGeom prst="rect">
+            <a:avLst/>
+          </a:prstGeom>
+          <a:noFill/>
+          <a:ln w="0">
+            <a:noFill/>
+          </a:ln>
+        </p:spPr>
         <p:txBody>
-          <a:bodyPr/>
+          <a:bodyPr>
+            <a:noAutofit/>
+          </a:bodyPr>
           <a:lstStyle/>
           <a:p>
-            <a:fld id="{982A7450-C9B7-48AD-BEA2-175AC75E73D8}" type="slidenum">
-              <a:rPr lang="en-US" smtClean="0"/>
-              <a:t>1</a:t>
-            </a:fld>
-            <a:endParaRPr lang="en-US"/>
+            <a:pPr>
+              <a:defRPr sz="1200" b="1">
+                <a:solidFill>
+                  <a:srgbClr val="002855"/>
+                </a:solidFill>
+                <a:latin typeface="Arial"/>
+                <a:ea typeface="Arial"/>
+                <a:cs typeface="Arial"/>
+              </a:defRPr>
+            </a:pPr>
+            <a:r>
+              <a:rPr sz="1200" b="1">
+                <a:solidFill>
+                  <a:srgbClr val="002855"/>
+                </a:solidFill>
+                <a:latin typeface="Arial"/>
+                <a:ea typeface="Arial"/>
+                <a:cs typeface="Arial"/>
+              </a:rPr>
+              <a:t>WVU DSPIRA</a:t>
+            </a:r>
+          </a:p>
+        </p:txBody>
+      </p:sp>
+      <p:sp>
+        <p:nvSpPr>
+          <p:cNvPr id="12" name="DSPIRA 4"/>
+          <p:cNvSpPr>
+            <a:spLocks noGrp="1"/>
+          </p:cNvSpPr>
+          <p:nvPr/>
+        </p:nvSpPr>
+        <p:spPr>
+          <a:xfrm>
+            <a:off x="228600" y="7277100"/>
+            <a:ext cx="6667500" cy="228600"/>
+          </a:xfrm>
+          <a:prstGeom prst="rect">
+            <a:avLst/>
+          </a:prstGeom>
+          <a:noFill/>
+          <a:ln w="0">
+            <a:noFill/>
+          </a:ln>
+        </p:spPr>
+        <p:txBody>
+          <a:bodyPr>
+            <a:noAutofit/>
+          </a:bodyPr>
+          <a:lstStyle/>
+          <a:p>
+            <a:pPr>
+              <a:defRPr sz="900" b="0">
+                <a:solidFill>
+                  <a:srgbClr val="002855"/>
+                </a:solidFill>
+                <a:latin typeface="Arial"/>
+                <a:ea typeface="Arial"/>
+                <a:cs typeface="Arial"/>
+              </a:defRPr>
+            </a:pPr>
+            <a:r>
+              <a:rPr sz="900" b="0">
+                <a:solidFill>
+                  <a:srgbClr val="002855"/>
+                </a:solidFill>
+                <a:latin typeface="Arial"/>
+                <a:ea typeface="Arial"/>
+                <a:cs typeface="Arial"/>
+              </a:rPr>
+              <a:t>wvurail.org/dspira</a:t>
+            </a:r>
+          </a:p>
+        </p:txBody>
+      </p:sp>
+      <p:sp>
+        <p:nvSpPr>
+          <p:cNvPr id="13" name="DSPIRA 5"/>
+          <p:cNvSpPr>
+            <a:spLocks noGrp="1"/>
+          </p:cNvSpPr>
+          <p:nvPr/>
+        </p:nvSpPr>
+        <p:spPr>
+          <a:xfrm>
+            <a:off x="11191875" y="7277100"/>
+            <a:ext cx="762000" cy="228600"/>
+          </a:xfrm>
+          <a:prstGeom prst="rect">
+            <a:avLst/>
+          </a:prstGeom>
+          <a:noFill/>
+          <a:ln w="0">
+            <a:noFill/>
+          </a:ln>
+        </p:spPr>
+        <p:txBody>
+          <a:bodyPr>
+            <a:noAutofit/>
+          </a:bodyPr>
+          <a:lstStyle/>
+          <a:p>
+            <a:pPr>
+              <a:defRPr sz="900" b="0">
+                <a:solidFill>
+                  <a:srgbClr val="002855"/>
+                </a:solidFill>
+                <a:latin typeface="Arial"/>
+                <a:ea typeface="Arial"/>
+                <a:cs typeface="Arial"/>
+              </a:defRPr>
+            </a:pPr>
+            <a:r>
+              <a:rPr sz="900" b="0">
+                <a:solidFill>
+                  <a:srgbClr val="002855"/>
+                </a:solidFill>
+                <a:latin typeface="Arial"/>
+                <a:ea typeface="Arial"/>
+                <a:cs typeface="Arial"/>
+              </a:rPr>
+              <a:t>1 of 12</a:t>
+            </a:r>
           </a:p>
         </p:txBody>
       </p:sp>
@@ -7222,7 +7207,7 @@
         </p:blipFill>
         <p:spPr>
           <a:xfrm>
-            <a:off x="643466" y="700985"/>
+            <a:off x="643466" y="1043885"/>
             <a:ext cx="6569451" cy="5452643"/>
           </a:xfrm>
           <a:prstGeom prst="rect">
@@ -7255,7 +7240,7 @@
         </p:nvSpPr>
         <p:spPr>
           <a:xfrm>
-            <a:off x="7534656" y="0"/>
+            <a:off x="7534656" y="342900"/>
             <a:ext cx="4657344" cy="6858000"/>
           </a:xfrm>
           <a:prstGeom prst="rect">
@@ -7308,7 +7293,7 @@
         </p:nvSpPr>
         <p:spPr>
           <a:xfrm>
-            <a:off x="8153399" y="640081"/>
+            <a:off x="8153399" y="982981"/>
             <a:ext cx="3395133" cy="5574452"/>
           </a:xfrm>
         </p:spPr>
@@ -7331,60 +7316,202 @@
       </p:sp>
       <p:sp>
         <p:nvSpPr>
-          <p:cNvPr id="3" name="Slide Number Placeholder 2">
-            <a:extLst>
-              <a:ext uri="{FF2B5EF4-FFF2-40B4-BE49-F238E27FC236}">
-                <a16:creationId xmlns:a16="http://schemas.microsoft.com/office/drawing/2014/main" id="{900237B0-76D5-4C7E-AC1B-6641D3386C45}"/>
-              </a:ext>
-            </a:extLst>
-          </p:cNvPr>
+          <p:cNvPr id="11" name="DSPIRA 1"/>
           <p:cNvSpPr>
             <a:spLocks noGrp="1"/>
           </p:cNvSpPr>
-          <p:nvPr>
-            <p:ph type="sldNum" sz="quarter" idx="12"/>
-          </p:nvPr>
+          <p:nvPr/>
         </p:nvSpPr>
         <p:spPr>
           <a:xfrm>
-            <a:off x="10680970" y="6356350"/>
-            <a:ext cx="672830" cy="365125"/>
+            <a:off x="0" y="0"/>
+            <a:ext cx="12192000" cy="342900"/>
           </a:xfrm>
+          <a:prstGeom prst="rect">
+            <a:avLst/>
+          </a:prstGeom>
+          <a:solidFill>
+            <a:srgbClr val="FFFFFF"/>
+          </a:solidFill>
+          <a:ln w="0">
+            <a:noFill/>
+          </a:ln>
+        </p:spPr>
+      </p:sp>
+      <p:sp>
+        <p:nvSpPr>
+          <p:cNvPr id="12" name="DSPIRA 2"/>
+          <p:cNvSpPr>
+            <a:spLocks noGrp="1"/>
+          </p:cNvSpPr>
+          <p:nvPr/>
+        </p:nvSpPr>
+        <p:spPr>
+          <a:xfrm>
+            <a:off x="0" y="7200900"/>
+            <a:ext cx="12192000" cy="342900"/>
+          </a:xfrm>
+          <a:prstGeom prst="rect">
+            <a:avLst/>
+          </a:prstGeom>
+          <a:solidFill>
+            <a:srgbClr val="FFFFFF"/>
+          </a:solidFill>
+          <a:ln w="0">
+            <a:noFill/>
+          </a:ln>
+        </p:spPr>
+      </p:sp>
+      <p:sp>
+        <p:nvSpPr>
+          <p:cNvPr id="13" name="DSPIRA 3"/>
+          <p:cNvSpPr>
+            <a:spLocks noGrp="1"/>
+          </p:cNvSpPr>
+          <p:nvPr/>
+        </p:nvSpPr>
+        <p:spPr>
+          <a:xfrm>
+            <a:off x="228600" y="76200"/>
+            <a:ext cx="4762500" cy="228600"/>
+          </a:xfrm>
+          <a:prstGeom prst="rect">
+            <a:avLst/>
+          </a:prstGeom>
           <a:noFill/>
+          <a:ln w="0">
+            <a:noFill/>
+          </a:ln>
         </p:spPr>
         <p:txBody>
           <a:bodyPr>
-            <a:normAutofit/>
+            <a:noAutofit/>
           </a:bodyPr>
           <a:lstStyle/>
           <a:p>
             <a:pPr>
-              <a:spcAft>
-                <a:spcPts val="600"/>
-              </a:spcAft>
+              <a:defRPr sz="1200" b="1">
+                <a:solidFill>
+                  <a:srgbClr val="002855"/>
+                </a:solidFill>
+                <a:latin typeface="Arial"/>
+                <a:ea typeface="Arial"/>
+                <a:cs typeface="Arial"/>
+              </a:defRPr>
             </a:pPr>
-            <a:fld id="{982A7450-C9B7-48AD-BEA2-175AC75E73D8}" type="slidenum">
-              <a:rPr lang="en-US">
+            <a:r>
+              <a:rPr sz="1200" b="1">
                 <a:solidFill>
-                  <a:srgbClr val="FFFFFF">
-                    <a:alpha val="70000"/>
-                  </a:srgbClr>
+                  <a:srgbClr val="002855"/>
                 </a:solidFill>
+                <a:latin typeface="Arial"/>
+                <a:ea typeface="Arial"/>
+                <a:cs typeface="Arial"/>
               </a:rPr>
-              <a:pPr>
-                <a:spcAft>
-                  <a:spcPts val="600"/>
-                </a:spcAft>
-              </a:pPr>
-              <a:t>10</a:t>
-            </a:fld>
-            <a:endParaRPr lang="en-US">
-              <a:solidFill>
-                <a:srgbClr val="FFFFFF">
-                  <a:alpha val="70000"/>
-                </a:srgbClr>
-              </a:solidFill>
-            </a:endParaRPr>
+              <a:t>WVU DSPIRA</a:t>
+            </a:r>
+          </a:p>
+        </p:txBody>
+      </p:sp>
+      <p:sp>
+        <p:nvSpPr>
+          <p:cNvPr id="14" name="DSPIRA 4"/>
+          <p:cNvSpPr>
+            <a:spLocks noGrp="1"/>
+          </p:cNvSpPr>
+          <p:nvPr/>
+        </p:nvSpPr>
+        <p:spPr>
+          <a:xfrm>
+            <a:off x="228600" y="7277100"/>
+            <a:ext cx="6667500" cy="228600"/>
+          </a:xfrm>
+          <a:prstGeom prst="rect">
+            <a:avLst/>
+          </a:prstGeom>
+          <a:noFill/>
+          <a:ln w="0">
+            <a:noFill/>
+          </a:ln>
+        </p:spPr>
+        <p:txBody>
+          <a:bodyPr>
+            <a:noAutofit/>
+          </a:bodyPr>
+          <a:lstStyle/>
+          <a:p>
+            <a:pPr>
+              <a:defRPr sz="900" b="0">
+                <a:solidFill>
+                  <a:srgbClr val="002855"/>
+                </a:solidFill>
+                <a:latin typeface="Arial"/>
+                <a:ea typeface="Arial"/>
+                <a:cs typeface="Arial"/>
+              </a:defRPr>
+            </a:pPr>
+            <a:r>
+              <a:rPr sz="900" b="0">
+                <a:solidFill>
+                  <a:srgbClr val="002855"/>
+                </a:solidFill>
+                <a:latin typeface="Arial"/>
+                <a:ea typeface="Arial"/>
+                <a:cs typeface="Arial"/>
+              </a:rPr>
+              <a:t>wvurail.org/dspira</a:t>
+            </a:r>
+          </a:p>
+        </p:txBody>
+      </p:sp>
+      <p:sp>
+        <p:nvSpPr>
+          <p:cNvPr id="15" name="DSPIRA 5"/>
+          <p:cNvSpPr>
+            <a:spLocks noGrp="1"/>
+          </p:cNvSpPr>
+          <p:nvPr/>
+        </p:nvSpPr>
+        <p:spPr>
+          <a:xfrm>
+            <a:off x="11191875" y="7277100"/>
+            <a:ext cx="762000" cy="228600"/>
+          </a:xfrm>
+          <a:prstGeom prst="rect">
+            <a:avLst/>
+          </a:prstGeom>
+          <a:noFill/>
+          <a:ln w="0">
+            <a:noFill/>
+          </a:ln>
+        </p:spPr>
+        <p:txBody>
+          <a:bodyPr>
+            <a:noAutofit/>
+          </a:bodyPr>
+          <a:lstStyle/>
+          <a:p>
+            <a:pPr>
+              <a:defRPr sz="900" b="0">
+                <a:solidFill>
+                  <a:srgbClr val="002855"/>
+                </a:solidFill>
+                <a:latin typeface="Arial"/>
+                <a:ea typeface="Arial"/>
+                <a:cs typeface="Arial"/>
+              </a:defRPr>
+            </a:pPr>
+            <a:r>
+              <a:rPr sz="900" b="0">
+                <a:solidFill>
+                  <a:srgbClr val="002855"/>
+                </a:solidFill>
+                <a:latin typeface="Arial"/>
+                <a:ea typeface="Arial"/>
+                <a:cs typeface="Arial"/>
+              </a:rPr>
+              <a:t>10 of 12</a:t>
+            </a:r>
           </a:p>
         </p:txBody>
       </p:sp>
@@ -7454,7 +7581,7 @@
         </p:blipFill>
         <p:spPr>
           <a:xfrm>
-            <a:off x="643466" y="700985"/>
+            <a:off x="643466" y="1043885"/>
             <a:ext cx="6569451" cy="5452643"/>
           </a:xfrm>
           <a:prstGeom prst="rect">
@@ -7487,7 +7614,7 @@
         </p:nvSpPr>
         <p:spPr>
           <a:xfrm>
-            <a:off x="7534656" y="0"/>
+            <a:off x="7534656" y="342900"/>
             <a:ext cx="4657344" cy="6858000"/>
           </a:xfrm>
           <a:prstGeom prst="rect">
@@ -7540,7 +7667,7 @@
         </p:nvSpPr>
         <p:spPr>
           <a:xfrm>
-            <a:off x="8153399" y="640081"/>
+            <a:off x="8153399" y="982981"/>
             <a:ext cx="3395133" cy="5574452"/>
           </a:xfrm>
         </p:spPr>
@@ -7563,60 +7690,202 @@
       </p:sp>
       <p:sp>
         <p:nvSpPr>
-          <p:cNvPr id="3" name="Slide Number Placeholder 2">
-            <a:extLst>
-              <a:ext uri="{FF2B5EF4-FFF2-40B4-BE49-F238E27FC236}">
-                <a16:creationId xmlns:a16="http://schemas.microsoft.com/office/drawing/2014/main" id="{04D489AF-E5FE-4385-8F77-2EBBBBDEAD65}"/>
-              </a:ext>
-            </a:extLst>
-          </p:cNvPr>
+          <p:cNvPr id="11" name="DSPIRA 1"/>
           <p:cNvSpPr>
             <a:spLocks noGrp="1"/>
           </p:cNvSpPr>
-          <p:nvPr>
-            <p:ph type="sldNum" sz="quarter" idx="12"/>
-          </p:nvPr>
+          <p:nvPr/>
         </p:nvSpPr>
         <p:spPr>
           <a:xfrm>
-            <a:off x="10680970" y="6356350"/>
-            <a:ext cx="672830" cy="365125"/>
+            <a:off x="0" y="0"/>
+            <a:ext cx="12192000" cy="342900"/>
           </a:xfrm>
+          <a:prstGeom prst="rect">
+            <a:avLst/>
+          </a:prstGeom>
+          <a:solidFill>
+            <a:srgbClr val="FFFFFF"/>
+          </a:solidFill>
+          <a:ln w="0">
+            <a:noFill/>
+          </a:ln>
+        </p:spPr>
+      </p:sp>
+      <p:sp>
+        <p:nvSpPr>
+          <p:cNvPr id="12" name="DSPIRA 2"/>
+          <p:cNvSpPr>
+            <a:spLocks noGrp="1"/>
+          </p:cNvSpPr>
+          <p:nvPr/>
+        </p:nvSpPr>
+        <p:spPr>
+          <a:xfrm>
+            <a:off x="0" y="7200900"/>
+            <a:ext cx="12192000" cy="342900"/>
+          </a:xfrm>
+          <a:prstGeom prst="rect">
+            <a:avLst/>
+          </a:prstGeom>
+          <a:solidFill>
+            <a:srgbClr val="FFFFFF"/>
+          </a:solidFill>
+          <a:ln w="0">
+            <a:noFill/>
+          </a:ln>
+        </p:spPr>
+      </p:sp>
+      <p:sp>
+        <p:nvSpPr>
+          <p:cNvPr id="13" name="DSPIRA 3"/>
+          <p:cNvSpPr>
+            <a:spLocks noGrp="1"/>
+          </p:cNvSpPr>
+          <p:nvPr/>
+        </p:nvSpPr>
+        <p:spPr>
+          <a:xfrm>
+            <a:off x="228600" y="76200"/>
+            <a:ext cx="4762500" cy="228600"/>
+          </a:xfrm>
+          <a:prstGeom prst="rect">
+            <a:avLst/>
+          </a:prstGeom>
           <a:noFill/>
+          <a:ln w="0">
+            <a:noFill/>
+          </a:ln>
         </p:spPr>
         <p:txBody>
           <a:bodyPr>
-            <a:normAutofit/>
+            <a:noAutofit/>
           </a:bodyPr>
           <a:lstStyle/>
           <a:p>
             <a:pPr>
-              <a:spcAft>
-                <a:spcPts val="600"/>
-              </a:spcAft>
+              <a:defRPr sz="1200" b="1">
+                <a:solidFill>
+                  <a:srgbClr val="002855"/>
+                </a:solidFill>
+                <a:latin typeface="Arial"/>
+                <a:ea typeface="Arial"/>
+                <a:cs typeface="Arial"/>
+              </a:defRPr>
             </a:pPr>
-            <a:fld id="{982A7450-C9B7-48AD-BEA2-175AC75E73D8}" type="slidenum">
-              <a:rPr lang="en-US">
+            <a:r>
+              <a:rPr sz="1200" b="1">
                 <a:solidFill>
-                  <a:srgbClr val="FFFFFF">
-                    <a:alpha val="70000"/>
-                  </a:srgbClr>
+                  <a:srgbClr val="002855"/>
                 </a:solidFill>
+                <a:latin typeface="Arial"/>
+                <a:ea typeface="Arial"/>
+                <a:cs typeface="Arial"/>
               </a:rPr>
-              <a:pPr>
-                <a:spcAft>
-                  <a:spcPts val="600"/>
-                </a:spcAft>
-              </a:pPr>
-              <a:t>11</a:t>
-            </a:fld>
-            <a:endParaRPr lang="en-US">
-              <a:solidFill>
-                <a:srgbClr val="FFFFFF">
-                  <a:alpha val="70000"/>
-                </a:srgbClr>
-              </a:solidFill>
-            </a:endParaRPr>
+              <a:t>WVU DSPIRA</a:t>
+            </a:r>
+          </a:p>
+        </p:txBody>
+      </p:sp>
+      <p:sp>
+        <p:nvSpPr>
+          <p:cNvPr id="14" name="DSPIRA 4"/>
+          <p:cNvSpPr>
+            <a:spLocks noGrp="1"/>
+          </p:cNvSpPr>
+          <p:nvPr/>
+        </p:nvSpPr>
+        <p:spPr>
+          <a:xfrm>
+            <a:off x="228600" y="7277100"/>
+            <a:ext cx="6667500" cy="228600"/>
+          </a:xfrm>
+          <a:prstGeom prst="rect">
+            <a:avLst/>
+          </a:prstGeom>
+          <a:noFill/>
+          <a:ln w="0">
+            <a:noFill/>
+          </a:ln>
+        </p:spPr>
+        <p:txBody>
+          <a:bodyPr>
+            <a:noAutofit/>
+          </a:bodyPr>
+          <a:lstStyle/>
+          <a:p>
+            <a:pPr>
+              <a:defRPr sz="900" b="0">
+                <a:solidFill>
+                  <a:srgbClr val="002855"/>
+                </a:solidFill>
+                <a:latin typeface="Arial"/>
+                <a:ea typeface="Arial"/>
+                <a:cs typeface="Arial"/>
+              </a:defRPr>
+            </a:pPr>
+            <a:r>
+              <a:rPr sz="900" b="0">
+                <a:solidFill>
+                  <a:srgbClr val="002855"/>
+                </a:solidFill>
+                <a:latin typeface="Arial"/>
+                <a:ea typeface="Arial"/>
+                <a:cs typeface="Arial"/>
+              </a:rPr>
+              <a:t>wvurail.org/dspira</a:t>
+            </a:r>
+          </a:p>
+        </p:txBody>
+      </p:sp>
+      <p:sp>
+        <p:nvSpPr>
+          <p:cNvPr id="15" name="DSPIRA 5"/>
+          <p:cNvSpPr>
+            <a:spLocks noGrp="1"/>
+          </p:cNvSpPr>
+          <p:nvPr/>
+        </p:nvSpPr>
+        <p:spPr>
+          <a:xfrm>
+            <a:off x="11191875" y="7277100"/>
+            <a:ext cx="762000" cy="228600"/>
+          </a:xfrm>
+          <a:prstGeom prst="rect">
+            <a:avLst/>
+          </a:prstGeom>
+          <a:noFill/>
+          <a:ln w="0">
+            <a:noFill/>
+          </a:ln>
+        </p:spPr>
+        <p:txBody>
+          <a:bodyPr>
+            <a:noAutofit/>
+          </a:bodyPr>
+          <a:lstStyle/>
+          <a:p>
+            <a:pPr>
+              <a:defRPr sz="900" b="0">
+                <a:solidFill>
+                  <a:srgbClr val="002855"/>
+                </a:solidFill>
+                <a:latin typeface="Arial"/>
+                <a:ea typeface="Arial"/>
+                <a:cs typeface="Arial"/>
+              </a:defRPr>
+            </a:pPr>
+            <a:r>
+              <a:rPr sz="900" b="0">
+                <a:solidFill>
+                  <a:srgbClr val="002855"/>
+                </a:solidFill>
+                <a:latin typeface="Arial"/>
+                <a:ea typeface="Arial"/>
+                <a:cs typeface="Arial"/>
+              </a:rPr>
+              <a:t>11 of 12</a:t>
+            </a:r>
           </a:p>
         </p:txBody>
       </p:sp>
@@ -7678,35 +7947,6 @@
           </a:p>
         </p:txBody>
       </p:sp>
-      <p:sp>
-        <p:nvSpPr>
-          <p:cNvPr id="3" name="Slide Number Placeholder 2">
-            <a:extLst>
-              <a:ext uri="{FF2B5EF4-FFF2-40B4-BE49-F238E27FC236}">
-                <a16:creationId xmlns:a16="http://schemas.microsoft.com/office/drawing/2014/main" id="{8043463F-FC42-4DC1-A892-16263F86D441}"/>
-              </a:ext>
-            </a:extLst>
-          </p:cNvPr>
-          <p:cNvSpPr>
-            <a:spLocks noGrp="1"/>
-          </p:cNvSpPr>
-          <p:nvPr>
-            <p:ph type="sldNum" sz="quarter" idx="12"/>
-          </p:nvPr>
-        </p:nvSpPr>
-        <p:spPr/>
-        <p:txBody>
-          <a:bodyPr/>
-          <a:lstStyle/>
-          <a:p>
-            <a:fld id="{982A7450-C9B7-48AD-BEA2-175AC75E73D8}" type="slidenum">
-              <a:rPr lang="en-US" smtClean="0"/>
-              <a:t>12</a:t>
-            </a:fld>
-            <a:endParaRPr lang="en-US"/>
-          </a:p>
-        </p:txBody>
-      </p:sp>
       <p:pic>
         <p:nvPicPr>
           <p:cNvPr id="14" name="Picture 13" descr="A picture containing screenshot&#10;&#10;Description generated with very high confidence">
@@ -7735,7 +7975,7 @@
         </p:blipFill>
         <p:spPr>
           <a:xfrm>
-            <a:off x="6018445" y="1173752"/>
+            <a:off x="6018445" y="1516652"/>
             <a:ext cx="5574835" cy="4953574"/>
           </a:xfrm>
           <a:prstGeom prst="rect">
@@ -7771,7 +8011,7 @@
         </p:blipFill>
         <p:spPr>
           <a:xfrm>
-            <a:off x="710046" y="1289910"/>
+            <a:off x="710046" y="1632810"/>
             <a:ext cx="5547878" cy="4604206"/>
           </a:xfrm>
           <a:prstGeom prst="rect">
@@ -7800,7 +8040,7 @@
           </p:nvPr>
         </p:nvGraphicFramePr>
         <p:xfrm>
-          <a:off x="1990725" y="4643966"/>
+          <a:off x="1990725" y="4986866"/>
           <a:ext cx="2952750" cy="1483360"/>
         </p:xfrm>
         <a:graphic>
@@ -7978,6 +8218,207 @@
           </a:graphicData>
         </a:graphic>
       </p:graphicFrame>
+      <p:sp>
+        <p:nvSpPr>
+          <p:cNvPr id="18" name="DSPIRA 1"/>
+          <p:cNvSpPr>
+            <a:spLocks noGrp="1"/>
+          </p:cNvSpPr>
+          <p:nvPr/>
+        </p:nvSpPr>
+        <p:spPr>
+          <a:xfrm>
+            <a:off x="0" y="0"/>
+            <a:ext cx="12192000" cy="342900"/>
+          </a:xfrm>
+          <a:prstGeom prst="rect">
+            <a:avLst/>
+          </a:prstGeom>
+          <a:solidFill>
+            <a:srgbClr val="FFFFFF"/>
+          </a:solidFill>
+          <a:ln w="0">
+            <a:noFill/>
+          </a:ln>
+        </p:spPr>
+      </p:sp>
+      <p:sp>
+        <p:nvSpPr>
+          <p:cNvPr id="19" name="DSPIRA 2"/>
+          <p:cNvSpPr>
+            <a:spLocks noGrp="1"/>
+          </p:cNvSpPr>
+          <p:nvPr/>
+        </p:nvSpPr>
+        <p:spPr>
+          <a:xfrm>
+            <a:off x="0" y="7200900"/>
+            <a:ext cx="12192000" cy="342900"/>
+          </a:xfrm>
+          <a:prstGeom prst="rect">
+            <a:avLst/>
+          </a:prstGeom>
+          <a:solidFill>
+            <a:srgbClr val="FFFFFF"/>
+          </a:solidFill>
+          <a:ln w="0">
+            <a:noFill/>
+          </a:ln>
+        </p:spPr>
+      </p:sp>
+      <p:sp>
+        <p:nvSpPr>
+          <p:cNvPr id="20" name="DSPIRA 3"/>
+          <p:cNvSpPr>
+            <a:spLocks noGrp="1"/>
+          </p:cNvSpPr>
+          <p:nvPr/>
+        </p:nvSpPr>
+        <p:spPr>
+          <a:xfrm>
+            <a:off x="228600" y="76200"/>
+            <a:ext cx="4762500" cy="228600"/>
+          </a:xfrm>
+          <a:prstGeom prst="rect">
+            <a:avLst/>
+          </a:prstGeom>
+          <a:noFill/>
+          <a:ln w="0">
+            <a:noFill/>
+          </a:ln>
+        </p:spPr>
+        <p:txBody>
+          <a:bodyPr>
+            <a:noAutofit/>
+          </a:bodyPr>
+          <a:lstStyle/>
+          <a:p>
+            <a:pPr>
+              <a:defRPr sz="1200" b="1">
+                <a:solidFill>
+                  <a:srgbClr val="002855"/>
+                </a:solidFill>
+                <a:latin typeface="Arial"/>
+                <a:ea typeface="Arial"/>
+                <a:cs typeface="Arial"/>
+              </a:defRPr>
+            </a:pPr>
+            <a:r>
+              <a:rPr sz="1200" b="1">
+                <a:solidFill>
+                  <a:srgbClr val="002855"/>
+                </a:solidFill>
+                <a:latin typeface="Arial"/>
+                <a:ea typeface="Arial"/>
+                <a:cs typeface="Arial"/>
+              </a:rPr>
+              <a:t>WVU DSPIRA</a:t>
+            </a:r>
+          </a:p>
+        </p:txBody>
+      </p:sp>
+      <p:sp>
+        <p:nvSpPr>
+          <p:cNvPr id="21" name="DSPIRA 4"/>
+          <p:cNvSpPr>
+            <a:spLocks noGrp="1"/>
+          </p:cNvSpPr>
+          <p:nvPr/>
+        </p:nvSpPr>
+        <p:spPr>
+          <a:xfrm>
+            <a:off x="228600" y="7277100"/>
+            <a:ext cx="6667500" cy="228600"/>
+          </a:xfrm>
+          <a:prstGeom prst="rect">
+            <a:avLst/>
+          </a:prstGeom>
+          <a:noFill/>
+          <a:ln w="0">
+            <a:noFill/>
+          </a:ln>
+        </p:spPr>
+        <p:txBody>
+          <a:bodyPr>
+            <a:noAutofit/>
+          </a:bodyPr>
+          <a:lstStyle/>
+          <a:p>
+            <a:pPr>
+              <a:defRPr sz="900" b="0">
+                <a:solidFill>
+                  <a:srgbClr val="002855"/>
+                </a:solidFill>
+                <a:latin typeface="Arial"/>
+                <a:ea typeface="Arial"/>
+                <a:cs typeface="Arial"/>
+              </a:defRPr>
+            </a:pPr>
+            <a:r>
+              <a:rPr sz="900" b="0">
+                <a:solidFill>
+                  <a:srgbClr val="002855"/>
+                </a:solidFill>
+                <a:latin typeface="Arial"/>
+                <a:ea typeface="Arial"/>
+                <a:cs typeface="Arial"/>
+              </a:rPr>
+              <a:t>wvurail.org/dspira</a:t>
+            </a:r>
+          </a:p>
+        </p:txBody>
+      </p:sp>
+      <p:sp>
+        <p:nvSpPr>
+          <p:cNvPr id="22" name="DSPIRA 5"/>
+          <p:cNvSpPr>
+            <a:spLocks noGrp="1"/>
+          </p:cNvSpPr>
+          <p:nvPr/>
+        </p:nvSpPr>
+        <p:spPr>
+          <a:xfrm>
+            <a:off x="11191875" y="7277100"/>
+            <a:ext cx="762000" cy="228600"/>
+          </a:xfrm>
+          <a:prstGeom prst="rect">
+            <a:avLst/>
+          </a:prstGeom>
+          <a:noFill/>
+          <a:ln w="0">
+            <a:noFill/>
+          </a:ln>
+        </p:spPr>
+        <p:txBody>
+          <a:bodyPr>
+            <a:noAutofit/>
+          </a:bodyPr>
+          <a:lstStyle/>
+          <a:p>
+            <a:pPr>
+              <a:defRPr sz="900" b="0">
+                <a:solidFill>
+                  <a:srgbClr val="002855"/>
+                </a:solidFill>
+                <a:latin typeface="Arial"/>
+                <a:ea typeface="Arial"/>
+                <a:cs typeface="Arial"/>
+              </a:defRPr>
+            </a:pPr>
+            <a:r>
+              <a:rPr sz="900" b="0">
+                <a:solidFill>
+                  <a:srgbClr val="002855"/>
+                </a:solidFill>
+                <a:latin typeface="Arial"/>
+                <a:ea typeface="Arial"/>
+                <a:cs typeface="Arial"/>
+              </a:rPr>
+              <a:t>12 of 12</a:t>
+            </a:r>
+          </a:p>
+        </p:txBody>
+      </p:sp>
     </p:spTree>
     <p:extLst>
       <p:ext uri="{BB962C8B-B14F-4D97-AF65-F5344CB8AC3E}">
@@ -8041,7 +8482,7 @@
         </p:nvSpPr>
         <p:spPr bwMode="ltGray">
           <a:xfrm>
-            <a:off x="336883" y="321176"/>
+            <a:off x="336883" y="664076"/>
             <a:ext cx="7174247" cy="5896743"/>
           </a:xfrm>
           <a:prstGeom prst="rect">
@@ -8112,7 +8553,7 @@
         </p:blipFill>
         <p:spPr>
           <a:xfrm>
-            <a:off x="7829551" y="306909"/>
+            <a:off x="7829551" y="649809"/>
             <a:ext cx="4042409" cy="2286000"/>
           </a:xfrm>
           <a:prstGeom prst="rect">
@@ -8138,7 +8579,7 @@
         </p:nvSpPr>
         <p:spPr>
           <a:xfrm>
-            <a:off x="821516" y="640263"/>
+            <a:off x="821516" y="983163"/>
             <a:ext cx="6204984" cy="1344975"/>
           </a:xfrm>
         </p:spPr>
@@ -8149,7 +8590,7 @@
           <a:lstStyle/>
           <a:p>
             <a:r>
-              <a:rPr lang="en-US" sz="4000"/>
+              <a:rPr lang="en-US" sz="3200"/>
               <a:t>Signals</a:t>
             </a:r>
           </a:p>
@@ -8173,7 +8614,7 @@
         </p:nvSpPr>
         <p:spPr>
           <a:xfrm>
-            <a:off x="821515" y="2121762"/>
+            <a:off x="821515" y="2464662"/>
             <a:ext cx="6204984" cy="3626917"/>
           </a:xfrm>
         </p:spPr>
@@ -8184,19 +8625,19 @@
           <a:lstStyle/>
           <a:p>
             <a:r>
-              <a:rPr lang="en-US" sz="2400" dirty="0"/>
+              <a:rPr lang="en-US" sz="1920" dirty="0"/>
               <a:t>Signals = functions in 1D, 2D, 3D, etc. </a:t>
             </a:r>
           </a:p>
           <a:p>
             <a:r>
-              <a:rPr lang="en-US" sz="2400" dirty="0"/>
+              <a:rPr lang="en-US" sz="1920" dirty="0"/>
               <a:t>Examples: audio signal, images, video signal </a:t>
             </a:r>
           </a:p>
           <a:p>
             <a:r>
-              <a:rPr lang="en-US" sz="2400" dirty="0"/>
+              <a:rPr lang="en-US" sz="1920" dirty="0"/>
               <a:t>Dependence on time and frequency (or space and spatial frequencies)</a:t>
             </a:r>
           </a:p>
@@ -8230,7 +8671,7 @@
         </p:blipFill>
         <p:spPr>
           <a:xfrm>
-            <a:off x="7890366" y="3125756"/>
+            <a:off x="7890366" y="3468656"/>
             <a:ext cx="4301634" cy="2995127"/>
           </a:xfrm>
           <a:prstGeom prst="rect">
@@ -8240,30 +8681,202 @@
       </p:pic>
       <p:sp>
         <p:nvSpPr>
-          <p:cNvPr id="8" name="Slide Number Placeholder 7">
-            <a:extLst>
-              <a:ext uri="{FF2B5EF4-FFF2-40B4-BE49-F238E27FC236}">
-                <a16:creationId xmlns:a16="http://schemas.microsoft.com/office/drawing/2014/main" id="{60149F8E-8A0B-4F6A-AC31-273E493BB351}"/>
-              </a:ext>
-            </a:extLst>
-          </p:cNvPr>
+          <p:cNvPr id="35" name="DSPIRA 1"/>
           <p:cNvSpPr>
             <a:spLocks noGrp="1"/>
           </p:cNvSpPr>
-          <p:nvPr>
-            <p:ph type="sldNum" sz="quarter" idx="12"/>
-          </p:nvPr>
-        </p:nvSpPr>
-        <p:spPr/>
+          <p:nvPr/>
+        </p:nvSpPr>
+        <p:spPr>
+          <a:xfrm>
+            <a:off x="0" y="0"/>
+            <a:ext cx="12192000" cy="342900"/>
+          </a:xfrm>
+          <a:prstGeom prst="rect">
+            <a:avLst/>
+          </a:prstGeom>
+          <a:solidFill>
+            <a:srgbClr val="FFFFFF"/>
+          </a:solidFill>
+          <a:ln w="0">
+            <a:noFill/>
+          </a:ln>
+        </p:spPr>
+      </p:sp>
+      <p:sp>
+        <p:nvSpPr>
+          <p:cNvPr id="36" name="DSPIRA 2"/>
+          <p:cNvSpPr>
+            <a:spLocks noGrp="1"/>
+          </p:cNvSpPr>
+          <p:nvPr/>
+        </p:nvSpPr>
+        <p:spPr>
+          <a:xfrm>
+            <a:off x="0" y="7200900"/>
+            <a:ext cx="12192000" cy="342900"/>
+          </a:xfrm>
+          <a:prstGeom prst="rect">
+            <a:avLst/>
+          </a:prstGeom>
+          <a:solidFill>
+            <a:srgbClr val="FFFFFF"/>
+          </a:solidFill>
+          <a:ln w="0">
+            <a:noFill/>
+          </a:ln>
+        </p:spPr>
+      </p:sp>
+      <p:sp>
+        <p:nvSpPr>
+          <p:cNvPr id="37" name="DSPIRA 3"/>
+          <p:cNvSpPr>
+            <a:spLocks noGrp="1"/>
+          </p:cNvSpPr>
+          <p:nvPr/>
+        </p:nvSpPr>
+        <p:spPr>
+          <a:xfrm>
+            <a:off x="228600" y="76200"/>
+            <a:ext cx="4762500" cy="228600"/>
+          </a:xfrm>
+          <a:prstGeom prst="rect">
+            <a:avLst/>
+          </a:prstGeom>
+          <a:noFill/>
+          <a:ln w="0">
+            <a:noFill/>
+          </a:ln>
+        </p:spPr>
         <p:txBody>
-          <a:bodyPr/>
+          <a:bodyPr>
+            <a:noAutofit/>
+          </a:bodyPr>
           <a:lstStyle/>
           <a:p>
-            <a:fld id="{982A7450-C9B7-48AD-BEA2-175AC75E73D8}" type="slidenum">
-              <a:rPr lang="en-US" smtClean="0"/>
-              <a:t>2</a:t>
-            </a:fld>
-            <a:endParaRPr lang="en-US"/>
+            <a:pPr>
+              <a:defRPr sz="1200" b="1">
+                <a:solidFill>
+                  <a:srgbClr val="002855"/>
+                </a:solidFill>
+                <a:latin typeface="Arial"/>
+                <a:ea typeface="Arial"/>
+                <a:cs typeface="Arial"/>
+              </a:defRPr>
+            </a:pPr>
+            <a:r>
+              <a:rPr sz="1200" b="1">
+                <a:solidFill>
+                  <a:srgbClr val="002855"/>
+                </a:solidFill>
+                <a:latin typeface="Arial"/>
+                <a:ea typeface="Arial"/>
+                <a:cs typeface="Arial"/>
+              </a:rPr>
+              <a:t>WVU DSPIRA</a:t>
+            </a:r>
+          </a:p>
+        </p:txBody>
+      </p:sp>
+      <p:sp>
+        <p:nvSpPr>
+          <p:cNvPr id="38" name="DSPIRA 4"/>
+          <p:cNvSpPr>
+            <a:spLocks noGrp="1"/>
+          </p:cNvSpPr>
+          <p:nvPr/>
+        </p:nvSpPr>
+        <p:spPr>
+          <a:xfrm>
+            <a:off x="228600" y="7277100"/>
+            <a:ext cx="6667500" cy="228600"/>
+          </a:xfrm>
+          <a:prstGeom prst="rect">
+            <a:avLst/>
+          </a:prstGeom>
+          <a:noFill/>
+          <a:ln w="0">
+            <a:noFill/>
+          </a:ln>
+        </p:spPr>
+        <p:txBody>
+          <a:bodyPr>
+            <a:noAutofit/>
+          </a:bodyPr>
+          <a:lstStyle/>
+          <a:p>
+            <a:pPr>
+              <a:defRPr sz="900" b="0">
+                <a:solidFill>
+                  <a:srgbClr val="002855"/>
+                </a:solidFill>
+                <a:latin typeface="Arial"/>
+                <a:ea typeface="Arial"/>
+                <a:cs typeface="Arial"/>
+              </a:defRPr>
+            </a:pPr>
+            <a:r>
+              <a:rPr sz="900" b="0">
+                <a:solidFill>
+                  <a:srgbClr val="002855"/>
+                </a:solidFill>
+                <a:latin typeface="Arial"/>
+                <a:ea typeface="Arial"/>
+                <a:cs typeface="Arial"/>
+              </a:rPr>
+              <a:t>wvurail.org/dspira</a:t>
+            </a:r>
+          </a:p>
+        </p:txBody>
+      </p:sp>
+      <p:sp>
+        <p:nvSpPr>
+          <p:cNvPr id="39" name="DSPIRA 5"/>
+          <p:cNvSpPr>
+            <a:spLocks noGrp="1"/>
+          </p:cNvSpPr>
+          <p:nvPr/>
+        </p:nvSpPr>
+        <p:spPr>
+          <a:xfrm>
+            <a:off x="11191875" y="7277100"/>
+            <a:ext cx="762000" cy="228600"/>
+          </a:xfrm>
+          <a:prstGeom prst="rect">
+            <a:avLst/>
+          </a:prstGeom>
+          <a:noFill/>
+          <a:ln w="0">
+            <a:noFill/>
+          </a:ln>
+        </p:spPr>
+        <p:txBody>
+          <a:bodyPr>
+            <a:noAutofit/>
+          </a:bodyPr>
+          <a:lstStyle/>
+          <a:p>
+            <a:pPr>
+              <a:defRPr sz="900" b="0">
+                <a:solidFill>
+                  <a:srgbClr val="002855"/>
+                </a:solidFill>
+                <a:latin typeface="Arial"/>
+                <a:ea typeface="Arial"/>
+                <a:cs typeface="Arial"/>
+              </a:defRPr>
+            </a:pPr>
+            <a:r>
+              <a:rPr sz="900" b="0">
+                <a:solidFill>
+                  <a:srgbClr val="002855"/>
+                </a:solidFill>
+                <a:latin typeface="Arial"/>
+                <a:ea typeface="Arial"/>
+                <a:cs typeface="Arial"/>
+              </a:rPr>
+              <a:t>2 of 12</a:t>
+            </a:r>
           </a:p>
         </p:txBody>
       </p:sp>
@@ -8330,7 +8943,7 @@
         </p:nvSpPr>
         <p:spPr>
           <a:xfrm>
-            <a:off x="0" y="0"/>
+            <a:off x="0" y="342900"/>
             <a:ext cx="12192000" cy="6858000"/>
           </a:xfrm>
           <a:prstGeom prst="rect">
@@ -8395,7 +9008,7 @@
         </p:blipFill>
         <p:spPr>
           <a:xfrm>
-            <a:off x="6587330" y="1690689"/>
+            <a:off x="6587330" y="2033589"/>
             <a:ext cx="5604670" cy="2501837"/>
           </a:xfrm>
           <a:custGeom>
@@ -8473,7 +9086,7 @@
         </p:blipFill>
         <p:spPr>
           <a:xfrm>
-            <a:off x="4791075" y="4357117"/>
+            <a:off x="4791075" y="4700017"/>
             <a:ext cx="7400925" cy="2500884"/>
           </a:xfrm>
           <a:custGeom>
@@ -8573,7 +9186,7 @@
         </p:nvSpPr>
         <p:spPr>
           <a:xfrm flipV="1">
-            <a:off x="0" y="1691641"/>
+            <a:off x="0" y="2034541"/>
             <a:ext cx="7571262" cy="5166360"/>
           </a:xfrm>
           <a:custGeom>
@@ -8701,7 +9314,7 @@
         </p:nvSpPr>
         <p:spPr>
           <a:xfrm>
-            <a:off x="838200" y="365125"/>
+            <a:off x="838200" y="708025"/>
             <a:ext cx="10515600" cy="1325563"/>
           </a:xfrm>
         </p:spPr>
@@ -8740,7 +9353,7 @@
         </p:nvSpPr>
         <p:spPr>
           <a:xfrm>
-            <a:off x="838200" y="2015406"/>
+            <a:off x="838200" y="2358306"/>
             <a:ext cx="5097779" cy="4065986"/>
           </a:xfrm>
         </p:spPr>
@@ -8751,47 +9364,47 @@
           <a:lstStyle/>
           <a:p>
             <a:r>
-              <a:rPr lang="en-US" sz="2400" dirty="0"/>
+              <a:rPr lang="en-US" sz="1920" dirty="0"/>
               <a:t>Cellular antenna </a:t>
             </a:r>
           </a:p>
           <a:p>
             <a:r>
-              <a:rPr lang="en-US" sz="2400" dirty="0"/>
+              <a:rPr lang="en-US" sz="1920" dirty="0"/>
               <a:t>Camera </a:t>
             </a:r>
           </a:p>
           <a:p>
             <a:r>
-              <a:rPr lang="en-US" sz="2400" dirty="0" err="1"/>
+              <a:rPr lang="en-US" sz="1920" dirty="0" err="1"/>
               <a:t>Tomographer</a:t>
             </a:r>
             <a:r>
-              <a:rPr lang="en-US" sz="2400" dirty="0"/>
+              <a:rPr lang="en-US" sz="1920" dirty="0"/>
               <a:t> (CT, MRI, etc.) </a:t>
             </a:r>
           </a:p>
           <a:p>
             <a:r>
-              <a:rPr lang="en-US" sz="2400" dirty="0"/>
+              <a:rPr lang="en-US" sz="1920" dirty="0"/>
               <a:t>Optical telescope </a:t>
             </a:r>
           </a:p>
           <a:p>
             <a:r>
-              <a:rPr lang="en-US" sz="2400" dirty="0"/>
+              <a:rPr lang="en-US" sz="1920" dirty="0"/>
               <a:t>Radio telescope </a:t>
             </a:r>
           </a:p>
           <a:p>
             <a:r>
-              <a:rPr lang="en-US" sz="2400" dirty="0"/>
+              <a:rPr lang="en-US" sz="1920" dirty="0"/>
               <a:t>Radar </a:t>
             </a:r>
           </a:p>
           <a:p>
             <a:r>
-              <a:rPr lang="en-US" sz="2400" dirty="0"/>
+              <a:rPr lang="en-US" sz="1920" dirty="0"/>
               <a:t>Any other receiver or antenna</a:t>
             </a:r>
           </a:p>
@@ -8799,30 +9412,202 @@
       </p:sp>
       <p:sp>
         <p:nvSpPr>
-          <p:cNvPr id="4" name="Slide Number Placeholder 3">
-            <a:extLst>
-              <a:ext uri="{FF2B5EF4-FFF2-40B4-BE49-F238E27FC236}">
-                <a16:creationId xmlns:a16="http://schemas.microsoft.com/office/drawing/2014/main" id="{FE8F9CF7-C6A3-4BA0-973F-22B3EBB7801B}"/>
-              </a:ext>
-            </a:extLst>
-          </p:cNvPr>
+          <p:cNvPr id="15" name="DSPIRA 1"/>
           <p:cNvSpPr>
             <a:spLocks noGrp="1"/>
           </p:cNvSpPr>
-          <p:nvPr>
-            <p:ph type="sldNum" sz="quarter" idx="12"/>
-          </p:nvPr>
-        </p:nvSpPr>
-        <p:spPr/>
+          <p:nvPr/>
+        </p:nvSpPr>
+        <p:spPr>
+          <a:xfrm>
+            <a:off x="0" y="0"/>
+            <a:ext cx="12192000" cy="342900"/>
+          </a:xfrm>
+          <a:prstGeom prst="rect">
+            <a:avLst/>
+          </a:prstGeom>
+          <a:solidFill>
+            <a:srgbClr val="FFFFFF"/>
+          </a:solidFill>
+          <a:ln w="0">
+            <a:noFill/>
+          </a:ln>
+        </p:spPr>
+      </p:sp>
+      <p:sp>
+        <p:nvSpPr>
+          <p:cNvPr id="16" name="DSPIRA 2"/>
+          <p:cNvSpPr>
+            <a:spLocks noGrp="1"/>
+          </p:cNvSpPr>
+          <p:nvPr/>
+        </p:nvSpPr>
+        <p:spPr>
+          <a:xfrm>
+            <a:off x="0" y="7200900"/>
+            <a:ext cx="12192000" cy="342900"/>
+          </a:xfrm>
+          <a:prstGeom prst="rect">
+            <a:avLst/>
+          </a:prstGeom>
+          <a:solidFill>
+            <a:srgbClr val="FFFFFF"/>
+          </a:solidFill>
+          <a:ln w="0">
+            <a:noFill/>
+          </a:ln>
+        </p:spPr>
+      </p:sp>
+      <p:sp>
+        <p:nvSpPr>
+          <p:cNvPr id="17" name="DSPIRA 3"/>
+          <p:cNvSpPr>
+            <a:spLocks noGrp="1"/>
+          </p:cNvSpPr>
+          <p:nvPr/>
+        </p:nvSpPr>
+        <p:spPr>
+          <a:xfrm>
+            <a:off x="228600" y="76200"/>
+            <a:ext cx="4762500" cy="228600"/>
+          </a:xfrm>
+          <a:prstGeom prst="rect">
+            <a:avLst/>
+          </a:prstGeom>
+          <a:noFill/>
+          <a:ln w="0">
+            <a:noFill/>
+          </a:ln>
+        </p:spPr>
         <p:txBody>
-          <a:bodyPr/>
+          <a:bodyPr>
+            <a:noAutofit/>
+          </a:bodyPr>
           <a:lstStyle/>
           <a:p>
-            <a:fld id="{982A7450-C9B7-48AD-BEA2-175AC75E73D8}" type="slidenum">
-              <a:rPr lang="en-US" smtClean="0"/>
-              <a:t>3</a:t>
-            </a:fld>
-            <a:endParaRPr lang="en-US"/>
+            <a:pPr>
+              <a:defRPr sz="1200" b="1">
+                <a:solidFill>
+                  <a:srgbClr val="002855"/>
+                </a:solidFill>
+                <a:latin typeface="Arial"/>
+                <a:ea typeface="Arial"/>
+                <a:cs typeface="Arial"/>
+              </a:defRPr>
+            </a:pPr>
+            <a:r>
+              <a:rPr sz="1200" b="1">
+                <a:solidFill>
+                  <a:srgbClr val="002855"/>
+                </a:solidFill>
+                <a:latin typeface="Arial"/>
+                <a:ea typeface="Arial"/>
+                <a:cs typeface="Arial"/>
+              </a:rPr>
+              <a:t>WVU DSPIRA</a:t>
+            </a:r>
+          </a:p>
+        </p:txBody>
+      </p:sp>
+      <p:sp>
+        <p:nvSpPr>
+          <p:cNvPr id="18" name="DSPIRA 4"/>
+          <p:cNvSpPr>
+            <a:spLocks noGrp="1"/>
+          </p:cNvSpPr>
+          <p:nvPr/>
+        </p:nvSpPr>
+        <p:spPr>
+          <a:xfrm>
+            <a:off x="228600" y="7277100"/>
+            <a:ext cx="6667500" cy="228600"/>
+          </a:xfrm>
+          <a:prstGeom prst="rect">
+            <a:avLst/>
+          </a:prstGeom>
+          <a:noFill/>
+          <a:ln w="0">
+            <a:noFill/>
+          </a:ln>
+        </p:spPr>
+        <p:txBody>
+          <a:bodyPr>
+            <a:noAutofit/>
+          </a:bodyPr>
+          <a:lstStyle/>
+          <a:p>
+            <a:pPr>
+              <a:defRPr sz="900" b="0">
+                <a:solidFill>
+                  <a:srgbClr val="002855"/>
+                </a:solidFill>
+                <a:latin typeface="Arial"/>
+                <a:ea typeface="Arial"/>
+                <a:cs typeface="Arial"/>
+              </a:defRPr>
+            </a:pPr>
+            <a:r>
+              <a:rPr sz="900" b="0">
+                <a:solidFill>
+                  <a:srgbClr val="002855"/>
+                </a:solidFill>
+                <a:latin typeface="Arial"/>
+                <a:ea typeface="Arial"/>
+                <a:cs typeface="Arial"/>
+              </a:rPr>
+              <a:t>wvurail.org/dspira</a:t>
+            </a:r>
+          </a:p>
+        </p:txBody>
+      </p:sp>
+      <p:sp>
+        <p:nvSpPr>
+          <p:cNvPr id="19" name="DSPIRA 5"/>
+          <p:cNvSpPr>
+            <a:spLocks noGrp="1"/>
+          </p:cNvSpPr>
+          <p:nvPr/>
+        </p:nvSpPr>
+        <p:spPr>
+          <a:xfrm>
+            <a:off x="11191875" y="7277100"/>
+            <a:ext cx="762000" cy="228600"/>
+          </a:xfrm>
+          <a:prstGeom prst="rect">
+            <a:avLst/>
+          </a:prstGeom>
+          <a:noFill/>
+          <a:ln w="0">
+            <a:noFill/>
+          </a:ln>
+        </p:spPr>
+        <p:txBody>
+          <a:bodyPr>
+            <a:noAutofit/>
+          </a:bodyPr>
+          <a:lstStyle/>
+          <a:p>
+            <a:pPr>
+              <a:defRPr sz="900" b="0">
+                <a:solidFill>
+                  <a:srgbClr val="002855"/>
+                </a:solidFill>
+                <a:latin typeface="Arial"/>
+                <a:ea typeface="Arial"/>
+                <a:cs typeface="Arial"/>
+              </a:defRPr>
+            </a:pPr>
+            <a:r>
+              <a:rPr sz="900" b="0">
+                <a:solidFill>
+                  <a:srgbClr val="002855"/>
+                </a:solidFill>
+                <a:latin typeface="Arial"/>
+                <a:ea typeface="Arial"/>
+                <a:cs typeface="Arial"/>
+              </a:rPr>
+              <a:t>3 of 12</a:t>
+            </a:r>
           </a:p>
         </p:txBody>
       </p:sp>
@@ -8889,7 +9674,7 @@
         </p:nvSpPr>
         <p:spPr>
           <a:xfrm>
-            <a:off x="0" y="0"/>
+            <a:off x="0" y="342900"/>
             <a:ext cx="4636008" cy="6858000"/>
           </a:xfrm>
           <a:prstGeom prst="rect">
@@ -8949,7 +9734,7 @@
         </p:nvCxnSpPr>
         <p:spPr>
           <a:xfrm flipV="1">
-            <a:off x="762000" y="2971800"/>
+            <a:off x="762000" y="3314700"/>
             <a:ext cx="0" cy="914400"/>
           </a:xfrm>
           <a:prstGeom prst="line">
@@ -8996,7 +9781,7 @@
         </p:nvSpPr>
         <p:spPr>
           <a:xfrm>
-            <a:off x="943277" y="712269"/>
+            <a:off x="943277" y="1055169"/>
             <a:ext cx="3370998" cy="5502264"/>
           </a:xfrm>
         </p:spPr>
@@ -9039,7 +9824,7 @@
           </p:nvPr>
         </p:nvGraphicFramePr>
         <p:xfrm>
-          <a:off x="5280025" y="642938"/>
+          <a:off x="5280025" y="985838"/>
           <a:ext cx="6269038" cy="5572125"/>
         </p:xfrm>
         <a:graphic>
@@ -9050,30 +9835,202 @@
       </p:graphicFrame>
       <p:sp>
         <p:nvSpPr>
-          <p:cNvPr id="4" name="Slide Number Placeholder 3">
-            <a:extLst>
-              <a:ext uri="{FF2B5EF4-FFF2-40B4-BE49-F238E27FC236}">
-                <a16:creationId xmlns:a16="http://schemas.microsoft.com/office/drawing/2014/main" id="{95C1A053-16C3-445F-83B4-B7F60C29C9D8}"/>
-              </a:ext>
-            </a:extLst>
-          </p:cNvPr>
+          <p:cNvPr id="31" name="DSPIRA 1"/>
           <p:cNvSpPr>
             <a:spLocks noGrp="1"/>
           </p:cNvSpPr>
-          <p:nvPr>
-            <p:ph type="sldNum" sz="quarter" idx="12"/>
-          </p:nvPr>
-        </p:nvSpPr>
-        <p:spPr/>
+          <p:nvPr/>
+        </p:nvSpPr>
+        <p:spPr>
+          <a:xfrm>
+            <a:off x="0" y="0"/>
+            <a:ext cx="12192000" cy="342900"/>
+          </a:xfrm>
+          <a:prstGeom prst="rect">
+            <a:avLst/>
+          </a:prstGeom>
+          <a:solidFill>
+            <a:srgbClr val="FFFFFF"/>
+          </a:solidFill>
+          <a:ln w="0">
+            <a:noFill/>
+          </a:ln>
+        </p:spPr>
+      </p:sp>
+      <p:sp>
+        <p:nvSpPr>
+          <p:cNvPr id="32" name="DSPIRA 2"/>
+          <p:cNvSpPr>
+            <a:spLocks noGrp="1"/>
+          </p:cNvSpPr>
+          <p:nvPr/>
+        </p:nvSpPr>
+        <p:spPr>
+          <a:xfrm>
+            <a:off x="0" y="7200900"/>
+            <a:ext cx="12192000" cy="342900"/>
+          </a:xfrm>
+          <a:prstGeom prst="rect">
+            <a:avLst/>
+          </a:prstGeom>
+          <a:solidFill>
+            <a:srgbClr val="FFFFFF"/>
+          </a:solidFill>
+          <a:ln w="0">
+            <a:noFill/>
+          </a:ln>
+        </p:spPr>
+      </p:sp>
+      <p:sp>
+        <p:nvSpPr>
+          <p:cNvPr id="33" name="DSPIRA 3"/>
+          <p:cNvSpPr>
+            <a:spLocks noGrp="1"/>
+          </p:cNvSpPr>
+          <p:nvPr/>
+        </p:nvSpPr>
+        <p:spPr>
+          <a:xfrm>
+            <a:off x="228600" y="76200"/>
+            <a:ext cx="4762500" cy="228600"/>
+          </a:xfrm>
+          <a:prstGeom prst="rect">
+            <a:avLst/>
+          </a:prstGeom>
+          <a:noFill/>
+          <a:ln w="0">
+            <a:noFill/>
+          </a:ln>
+        </p:spPr>
         <p:txBody>
-          <a:bodyPr/>
+          <a:bodyPr>
+            <a:noAutofit/>
+          </a:bodyPr>
           <a:lstStyle/>
           <a:p>
-            <a:fld id="{982A7450-C9B7-48AD-BEA2-175AC75E73D8}" type="slidenum">
-              <a:rPr lang="en-US" smtClean="0"/>
-              <a:t>4</a:t>
-            </a:fld>
-            <a:endParaRPr lang="en-US"/>
+            <a:pPr>
+              <a:defRPr sz="1200" b="1">
+                <a:solidFill>
+                  <a:srgbClr val="002855"/>
+                </a:solidFill>
+                <a:latin typeface="Arial"/>
+                <a:ea typeface="Arial"/>
+                <a:cs typeface="Arial"/>
+              </a:defRPr>
+            </a:pPr>
+            <a:r>
+              <a:rPr sz="1200" b="1">
+                <a:solidFill>
+                  <a:srgbClr val="002855"/>
+                </a:solidFill>
+                <a:latin typeface="Arial"/>
+                <a:ea typeface="Arial"/>
+                <a:cs typeface="Arial"/>
+              </a:rPr>
+              <a:t>WVU DSPIRA</a:t>
+            </a:r>
+          </a:p>
+        </p:txBody>
+      </p:sp>
+      <p:sp>
+        <p:nvSpPr>
+          <p:cNvPr id="34" name="DSPIRA 4"/>
+          <p:cNvSpPr>
+            <a:spLocks noGrp="1"/>
+          </p:cNvSpPr>
+          <p:nvPr/>
+        </p:nvSpPr>
+        <p:spPr>
+          <a:xfrm>
+            <a:off x="228600" y="7277100"/>
+            <a:ext cx="6667500" cy="228600"/>
+          </a:xfrm>
+          <a:prstGeom prst="rect">
+            <a:avLst/>
+          </a:prstGeom>
+          <a:noFill/>
+          <a:ln w="0">
+            <a:noFill/>
+          </a:ln>
+        </p:spPr>
+        <p:txBody>
+          <a:bodyPr>
+            <a:noAutofit/>
+          </a:bodyPr>
+          <a:lstStyle/>
+          <a:p>
+            <a:pPr>
+              <a:defRPr sz="900" b="0">
+                <a:solidFill>
+                  <a:srgbClr val="002855"/>
+                </a:solidFill>
+                <a:latin typeface="Arial"/>
+                <a:ea typeface="Arial"/>
+                <a:cs typeface="Arial"/>
+              </a:defRPr>
+            </a:pPr>
+            <a:r>
+              <a:rPr sz="900" b="0">
+                <a:solidFill>
+                  <a:srgbClr val="002855"/>
+                </a:solidFill>
+                <a:latin typeface="Arial"/>
+                <a:ea typeface="Arial"/>
+                <a:cs typeface="Arial"/>
+              </a:rPr>
+              <a:t>wvurail.org/dspira</a:t>
+            </a:r>
+          </a:p>
+        </p:txBody>
+      </p:sp>
+      <p:sp>
+        <p:nvSpPr>
+          <p:cNvPr id="35" name="DSPIRA 5"/>
+          <p:cNvSpPr>
+            <a:spLocks noGrp="1"/>
+          </p:cNvSpPr>
+          <p:nvPr/>
+        </p:nvSpPr>
+        <p:spPr>
+          <a:xfrm>
+            <a:off x="11191875" y="7277100"/>
+            <a:ext cx="762000" cy="228600"/>
+          </a:xfrm>
+          <a:prstGeom prst="rect">
+            <a:avLst/>
+          </a:prstGeom>
+          <a:noFill/>
+          <a:ln w="0">
+            <a:noFill/>
+          </a:ln>
+        </p:spPr>
+        <p:txBody>
+          <a:bodyPr>
+            <a:noAutofit/>
+          </a:bodyPr>
+          <a:lstStyle/>
+          <a:p>
+            <a:pPr>
+              <a:defRPr sz="900" b="0">
+                <a:solidFill>
+                  <a:srgbClr val="002855"/>
+                </a:solidFill>
+                <a:latin typeface="Arial"/>
+                <a:ea typeface="Arial"/>
+                <a:cs typeface="Arial"/>
+              </a:defRPr>
+            </a:pPr>
+            <a:r>
+              <a:rPr sz="900" b="0">
+                <a:solidFill>
+                  <a:srgbClr val="002855"/>
+                </a:solidFill>
+                <a:latin typeface="Arial"/>
+                <a:ea typeface="Arial"/>
+                <a:cs typeface="Arial"/>
+              </a:rPr>
+              <a:t>4 of 12</a:t>
+            </a:r>
           </a:p>
         </p:txBody>
       </p:sp>
@@ -9140,7 +10097,7 @@
         </p:nvSpPr>
         <p:spPr>
           <a:xfrm>
-            <a:off x="0" y="0"/>
+            <a:off x="0" y="342900"/>
             <a:ext cx="12192000" cy="4572000"/>
           </a:xfrm>
           <a:prstGeom prst="rect">
@@ -9203,7 +10160,7 @@
         </p:nvSpPr>
         <p:spPr>
           <a:xfrm>
-            <a:off x="321564" y="320843"/>
+            <a:off x="321564" y="663743"/>
             <a:ext cx="5613569" cy="3930315"/>
           </a:xfrm>
           <a:prstGeom prst="roundRect">
@@ -9280,7 +10237,7 @@
         </p:blipFill>
         <p:spPr>
           <a:xfrm>
-            <a:off x="935295" y="640080"/>
+            <a:off x="935295" y="982980"/>
             <a:ext cx="4386105" cy="3291840"/>
           </a:xfrm>
           <a:prstGeom prst="rect">
@@ -9313,7 +10270,7 @@
         </p:nvSpPr>
         <p:spPr>
           <a:xfrm>
-            <a:off x="6254749" y="320843"/>
+            <a:off x="6254749" y="663743"/>
             <a:ext cx="5613569" cy="3930315"/>
           </a:xfrm>
           <a:prstGeom prst="roundRect">
@@ -9390,7 +10347,7 @@
         </p:blipFill>
         <p:spPr>
           <a:xfrm>
-            <a:off x="6868480" y="640080"/>
+            <a:off x="6868480" y="982980"/>
             <a:ext cx="4386105" cy="3291840"/>
           </a:xfrm>
           <a:prstGeom prst="rect">
@@ -9416,7 +10373,7 @@
         </p:nvSpPr>
         <p:spPr>
           <a:xfrm>
-            <a:off x="1524000" y="4642583"/>
+            <a:off x="1524000" y="4985483"/>
             <a:ext cx="9144000" cy="1099845"/>
           </a:xfrm>
         </p:spPr>
@@ -9428,7 +10385,7 @@
           <a:p>
             <a:pPr algn="ctr"/>
             <a:r>
-              <a:rPr lang="en-US" sz="5100"/>
+              <a:rPr lang="en-US" sz="4080"/>
               <a:t>Adding / Subtracting / Multiplying</a:t>
             </a:r>
           </a:p>
@@ -9436,30 +10393,202 @@
       </p:sp>
       <p:sp>
         <p:nvSpPr>
-          <p:cNvPr id="3" name="Slide Number Placeholder 2">
-            <a:extLst>
-              <a:ext uri="{FF2B5EF4-FFF2-40B4-BE49-F238E27FC236}">
-                <a16:creationId xmlns:a16="http://schemas.microsoft.com/office/drawing/2014/main" id="{BE3EC09A-03C8-4F1B-B060-38E81AC74911}"/>
-              </a:ext>
-            </a:extLst>
-          </p:cNvPr>
+          <p:cNvPr id="32" name="DSPIRA 1"/>
           <p:cNvSpPr>
             <a:spLocks noGrp="1"/>
           </p:cNvSpPr>
-          <p:nvPr>
-            <p:ph type="sldNum" sz="quarter" idx="12"/>
-          </p:nvPr>
-        </p:nvSpPr>
-        <p:spPr/>
+          <p:nvPr/>
+        </p:nvSpPr>
+        <p:spPr>
+          <a:xfrm>
+            <a:off x="0" y="0"/>
+            <a:ext cx="12192000" cy="342900"/>
+          </a:xfrm>
+          <a:prstGeom prst="rect">
+            <a:avLst/>
+          </a:prstGeom>
+          <a:solidFill>
+            <a:srgbClr val="FFFFFF"/>
+          </a:solidFill>
+          <a:ln w="0">
+            <a:noFill/>
+          </a:ln>
+        </p:spPr>
+      </p:sp>
+      <p:sp>
+        <p:nvSpPr>
+          <p:cNvPr id="33" name="DSPIRA 2"/>
+          <p:cNvSpPr>
+            <a:spLocks noGrp="1"/>
+          </p:cNvSpPr>
+          <p:nvPr/>
+        </p:nvSpPr>
+        <p:spPr>
+          <a:xfrm>
+            <a:off x="0" y="7200900"/>
+            <a:ext cx="12192000" cy="342900"/>
+          </a:xfrm>
+          <a:prstGeom prst="rect">
+            <a:avLst/>
+          </a:prstGeom>
+          <a:solidFill>
+            <a:srgbClr val="FFFFFF"/>
+          </a:solidFill>
+          <a:ln w="0">
+            <a:noFill/>
+          </a:ln>
+        </p:spPr>
+      </p:sp>
+      <p:sp>
+        <p:nvSpPr>
+          <p:cNvPr id="34" name="DSPIRA 3"/>
+          <p:cNvSpPr>
+            <a:spLocks noGrp="1"/>
+          </p:cNvSpPr>
+          <p:nvPr/>
+        </p:nvSpPr>
+        <p:spPr>
+          <a:xfrm>
+            <a:off x="228600" y="76200"/>
+            <a:ext cx="4762500" cy="228600"/>
+          </a:xfrm>
+          <a:prstGeom prst="rect">
+            <a:avLst/>
+          </a:prstGeom>
+          <a:noFill/>
+          <a:ln w="0">
+            <a:noFill/>
+          </a:ln>
+        </p:spPr>
         <p:txBody>
-          <a:bodyPr/>
+          <a:bodyPr>
+            <a:noAutofit/>
+          </a:bodyPr>
           <a:lstStyle/>
           <a:p>
-            <a:fld id="{982A7450-C9B7-48AD-BEA2-175AC75E73D8}" type="slidenum">
-              <a:rPr lang="en-US" smtClean="0"/>
-              <a:t>5</a:t>
-            </a:fld>
-            <a:endParaRPr lang="en-US"/>
+            <a:pPr>
+              <a:defRPr sz="1200" b="1">
+                <a:solidFill>
+                  <a:srgbClr val="002855"/>
+                </a:solidFill>
+                <a:latin typeface="Arial"/>
+                <a:ea typeface="Arial"/>
+                <a:cs typeface="Arial"/>
+              </a:defRPr>
+            </a:pPr>
+            <a:r>
+              <a:rPr sz="1200" b="1">
+                <a:solidFill>
+                  <a:srgbClr val="002855"/>
+                </a:solidFill>
+                <a:latin typeface="Arial"/>
+                <a:ea typeface="Arial"/>
+                <a:cs typeface="Arial"/>
+              </a:rPr>
+              <a:t>WVU DSPIRA</a:t>
+            </a:r>
+          </a:p>
+        </p:txBody>
+      </p:sp>
+      <p:sp>
+        <p:nvSpPr>
+          <p:cNvPr id="35" name="DSPIRA 4"/>
+          <p:cNvSpPr>
+            <a:spLocks noGrp="1"/>
+          </p:cNvSpPr>
+          <p:nvPr/>
+        </p:nvSpPr>
+        <p:spPr>
+          <a:xfrm>
+            <a:off x="228600" y="7277100"/>
+            <a:ext cx="6667500" cy="228600"/>
+          </a:xfrm>
+          <a:prstGeom prst="rect">
+            <a:avLst/>
+          </a:prstGeom>
+          <a:noFill/>
+          <a:ln w="0">
+            <a:noFill/>
+          </a:ln>
+        </p:spPr>
+        <p:txBody>
+          <a:bodyPr>
+            <a:noAutofit/>
+          </a:bodyPr>
+          <a:lstStyle/>
+          <a:p>
+            <a:pPr>
+              <a:defRPr sz="900" b="0">
+                <a:solidFill>
+                  <a:srgbClr val="002855"/>
+                </a:solidFill>
+                <a:latin typeface="Arial"/>
+                <a:ea typeface="Arial"/>
+                <a:cs typeface="Arial"/>
+              </a:defRPr>
+            </a:pPr>
+            <a:r>
+              <a:rPr sz="900" b="0">
+                <a:solidFill>
+                  <a:srgbClr val="002855"/>
+                </a:solidFill>
+                <a:latin typeface="Arial"/>
+                <a:ea typeface="Arial"/>
+                <a:cs typeface="Arial"/>
+              </a:rPr>
+              <a:t>wvurail.org/dspira</a:t>
+            </a:r>
+          </a:p>
+        </p:txBody>
+      </p:sp>
+      <p:sp>
+        <p:nvSpPr>
+          <p:cNvPr id="36" name="DSPIRA 5"/>
+          <p:cNvSpPr>
+            <a:spLocks noGrp="1"/>
+          </p:cNvSpPr>
+          <p:nvPr/>
+        </p:nvSpPr>
+        <p:spPr>
+          <a:xfrm>
+            <a:off x="11191875" y="7277100"/>
+            <a:ext cx="762000" cy="228600"/>
+          </a:xfrm>
+          <a:prstGeom prst="rect">
+            <a:avLst/>
+          </a:prstGeom>
+          <a:noFill/>
+          <a:ln w="0">
+            <a:noFill/>
+          </a:ln>
+        </p:spPr>
+        <p:txBody>
+          <a:bodyPr>
+            <a:noAutofit/>
+          </a:bodyPr>
+          <a:lstStyle/>
+          <a:p>
+            <a:pPr>
+              <a:defRPr sz="900" b="0">
+                <a:solidFill>
+                  <a:srgbClr val="002855"/>
+                </a:solidFill>
+                <a:latin typeface="Arial"/>
+                <a:ea typeface="Arial"/>
+                <a:cs typeface="Arial"/>
+              </a:defRPr>
+            </a:pPr>
+            <a:r>
+              <a:rPr sz="900" b="0">
+                <a:solidFill>
+                  <a:srgbClr val="002855"/>
+                </a:solidFill>
+                <a:latin typeface="Arial"/>
+                <a:ea typeface="Arial"/>
+                <a:cs typeface="Arial"/>
+              </a:rPr>
+              <a:t>5 of 12</a:t>
+            </a:r>
           </a:p>
         </p:txBody>
       </p:sp>
@@ -9529,7 +10658,7 @@
         </p:blipFill>
         <p:spPr>
           <a:xfrm>
-            <a:off x="643466" y="700985"/>
+            <a:off x="643466" y="1043885"/>
             <a:ext cx="6569451" cy="5452643"/>
           </a:xfrm>
           <a:prstGeom prst="rect">
@@ -9562,7 +10691,7 @@
         </p:nvSpPr>
         <p:spPr>
           <a:xfrm>
-            <a:off x="7534656" y="0"/>
+            <a:off x="7534656" y="342900"/>
             <a:ext cx="4657344" cy="6858000"/>
           </a:xfrm>
           <a:prstGeom prst="rect">
@@ -9618,7 +10747,7 @@
         </p:nvSpPr>
         <p:spPr>
           <a:xfrm>
-            <a:off x="8014996" y="640081"/>
+            <a:off x="8014996" y="982981"/>
             <a:ext cx="3946849" cy="5574452"/>
           </a:xfrm>
         </p:spPr>
@@ -9715,30 +10844,202 @@
       </p:sp>
       <p:sp>
         <p:nvSpPr>
-          <p:cNvPr id="5" name="Slide Number Placeholder 4">
-            <a:extLst>
-              <a:ext uri="{FF2B5EF4-FFF2-40B4-BE49-F238E27FC236}">
-                <a16:creationId xmlns:a16="http://schemas.microsoft.com/office/drawing/2014/main" id="{1BEF5970-B97A-4F4D-B7A5-41A51B8A12CE}"/>
-              </a:ext>
-            </a:extLst>
-          </p:cNvPr>
+          <p:cNvPr id="10" name="DSPIRA 1"/>
           <p:cNvSpPr>
             <a:spLocks noGrp="1"/>
           </p:cNvSpPr>
-          <p:nvPr>
-            <p:ph type="sldNum" sz="quarter" idx="12"/>
-          </p:nvPr>
-        </p:nvSpPr>
-        <p:spPr/>
+          <p:nvPr/>
+        </p:nvSpPr>
+        <p:spPr>
+          <a:xfrm>
+            <a:off x="0" y="0"/>
+            <a:ext cx="12192000" cy="342900"/>
+          </a:xfrm>
+          <a:prstGeom prst="rect">
+            <a:avLst/>
+          </a:prstGeom>
+          <a:solidFill>
+            <a:srgbClr val="FFFFFF"/>
+          </a:solidFill>
+          <a:ln w="0">
+            <a:noFill/>
+          </a:ln>
+        </p:spPr>
+      </p:sp>
+      <p:sp>
+        <p:nvSpPr>
+          <p:cNvPr id="11" name="DSPIRA 2"/>
+          <p:cNvSpPr>
+            <a:spLocks noGrp="1"/>
+          </p:cNvSpPr>
+          <p:nvPr/>
+        </p:nvSpPr>
+        <p:spPr>
+          <a:xfrm>
+            <a:off x="0" y="7200900"/>
+            <a:ext cx="12192000" cy="342900"/>
+          </a:xfrm>
+          <a:prstGeom prst="rect">
+            <a:avLst/>
+          </a:prstGeom>
+          <a:solidFill>
+            <a:srgbClr val="FFFFFF"/>
+          </a:solidFill>
+          <a:ln w="0">
+            <a:noFill/>
+          </a:ln>
+        </p:spPr>
+      </p:sp>
+      <p:sp>
+        <p:nvSpPr>
+          <p:cNvPr id="12" name="DSPIRA 3"/>
+          <p:cNvSpPr>
+            <a:spLocks noGrp="1"/>
+          </p:cNvSpPr>
+          <p:nvPr/>
+        </p:nvSpPr>
+        <p:spPr>
+          <a:xfrm>
+            <a:off x="228600" y="76200"/>
+            <a:ext cx="4762500" cy="228600"/>
+          </a:xfrm>
+          <a:prstGeom prst="rect">
+            <a:avLst/>
+          </a:prstGeom>
+          <a:noFill/>
+          <a:ln w="0">
+            <a:noFill/>
+          </a:ln>
+        </p:spPr>
         <p:txBody>
-          <a:bodyPr/>
+          <a:bodyPr>
+            <a:noAutofit/>
+          </a:bodyPr>
           <a:lstStyle/>
           <a:p>
-            <a:fld id="{982A7450-C9B7-48AD-BEA2-175AC75E73D8}" type="slidenum">
-              <a:rPr lang="en-US" smtClean="0"/>
-              <a:t>6</a:t>
-            </a:fld>
-            <a:endParaRPr lang="en-US"/>
+            <a:pPr>
+              <a:defRPr sz="1200" b="1">
+                <a:solidFill>
+                  <a:srgbClr val="002855"/>
+                </a:solidFill>
+                <a:latin typeface="Arial"/>
+                <a:ea typeface="Arial"/>
+                <a:cs typeface="Arial"/>
+              </a:defRPr>
+            </a:pPr>
+            <a:r>
+              <a:rPr sz="1200" b="1">
+                <a:solidFill>
+                  <a:srgbClr val="002855"/>
+                </a:solidFill>
+                <a:latin typeface="Arial"/>
+                <a:ea typeface="Arial"/>
+                <a:cs typeface="Arial"/>
+              </a:rPr>
+              <a:t>WVU DSPIRA</a:t>
+            </a:r>
+          </a:p>
+        </p:txBody>
+      </p:sp>
+      <p:sp>
+        <p:nvSpPr>
+          <p:cNvPr id="13" name="DSPIRA 4"/>
+          <p:cNvSpPr>
+            <a:spLocks noGrp="1"/>
+          </p:cNvSpPr>
+          <p:nvPr/>
+        </p:nvSpPr>
+        <p:spPr>
+          <a:xfrm>
+            <a:off x="228600" y="7277100"/>
+            <a:ext cx="6667500" cy="228600"/>
+          </a:xfrm>
+          <a:prstGeom prst="rect">
+            <a:avLst/>
+          </a:prstGeom>
+          <a:noFill/>
+          <a:ln w="0">
+            <a:noFill/>
+          </a:ln>
+        </p:spPr>
+        <p:txBody>
+          <a:bodyPr>
+            <a:noAutofit/>
+          </a:bodyPr>
+          <a:lstStyle/>
+          <a:p>
+            <a:pPr>
+              <a:defRPr sz="900" b="0">
+                <a:solidFill>
+                  <a:srgbClr val="002855"/>
+                </a:solidFill>
+                <a:latin typeface="Arial"/>
+                <a:ea typeface="Arial"/>
+                <a:cs typeface="Arial"/>
+              </a:defRPr>
+            </a:pPr>
+            <a:r>
+              <a:rPr sz="900" b="0">
+                <a:solidFill>
+                  <a:srgbClr val="002855"/>
+                </a:solidFill>
+                <a:latin typeface="Arial"/>
+                <a:ea typeface="Arial"/>
+                <a:cs typeface="Arial"/>
+              </a:rPr>
+              <a:t>wvurail.org/dspira</a:t>
+            </a:r>
+          </a:p>
+        </p:txBody>
+      </p:sp>
+      <p:sp>
+        <p:nvSpPr>
+          <p:cNvPr id="14" name="DSPIRA 5"/>
+          <p:cNvSpPr>
+            <a:spLocks noGrp="1"/>
+          </p:cNvSpPr>
+          <p:nvPr/>
+        </p:nvSpPr>
+        <p:spPr>
+          <a:xfrm>
+            <a:off x="11191875" y="7277100"/>
+            <a:ext cx="762000" cy="228600"/>
+          </a:xfrm>
+          <a:prstGeom prst="rect">
+            <a:avLst/>
+          </a:prstGeom>
+          <a:noFill/>
+          <a:ln w="0">
+            <a:noFill/>
+          </a:ln>
+        </p:spPr>
+        <p:txBody>
+          <a:bodyPr>
+            <a:noAutofit/>
+          </a:bodyPr>
+          <a:lstStyle/>
+          <a:p>
+            <a:pPr>
+              <a:defRPr sz="900" b="0">
+                <a:solidFill>
+                  <a:srgbClr val="002855"/>
+                </a:solidFill>
+                <a:latin typeface="Arial"/>
+                <a:ea typeface="Arial"/>
+                <a:cs typeface="Arial"/>
+              </a:defRPr>
+            </a:pPr>
+            <a:r>
+              <a:rPr sz="900" b="0">
+                <a:solidFill>
+                  <a:srgbClr val="002855"/>
+                </a:solidFill>
+                <a:latin typeface="Arial"/>
+                <a:ea typeface="Arial"/>
+                <a:cs typeface="Arial"/>
+              </a:rPr>
+              <a:t>6 of 12</a:t>
+            </a:r>
           </a:p>
         </p:txBody>
       </p:sp>
@@ -9805,7 +11106,7 @@
         </p:nvSpPr>
         <p:spPr>
           <a:xfrm>
-            <a:off x="0" y="651752"/>
+            <a:off x="0" y="994652"/>
             <a:ext cx="12192000" cy="736551"/>
           </a:xfrm>
           <a:prstGeom prst="rect">
@@ -9865,7 +11166,7 @@
         </p:blipFill>
         <p:spPr>
           <a:xfrm>
-            <a:off x="1941221" y="667729"/>
+            <a:off x="1941221" y="1010629"/>
             <a:ext cx="8794511" cy="5538519"/>
           </a:xfrm>
           <a:prstGeom prst="rect">
@@ -9891,7 +11192,7 @@
         </p:nvSpPr>
         <p:spPr>
           <a:xfrm>
-            <a:off x="556532" y="643467"/>
+            <a:off x="556532" y="986367"/>
             <a:ext cx="11210925" cy="744836"/>
           </a:xfrm>
           <a:prstGeom prst="ellipse">
@@ -9906,11 +11207,11 @@
           <a:p>
             <a:pPr algn="ctr"/>
             <a:r>
-              <a:rPr lang="en-US" sz="3000" kern="1200">
+              <a:rPr lang="en-US" sz="2400" kern="1200">
                 <a:solidFill>
                   <a:schemeClr val="bg1"/>
                 </a:solidFill>
-                <a:latin typeface="+mj-lt"/>
+                <a:latin typeface="Arial"/>
                 <a:ea typeface="+mj-ea"/>
                 <a:cs typeface="+mj-cs"/>
               </a:rPr>
@@ -9921,30 +11222,202 @@
       </p:sp>
       <p:sp>
         <p:nvSpPr>
-          <p:cNvPr id="40" name="Slide Number Placeholder 39">
-            <a:extLst>
-              <a:ext uri="{FF2B5EF4-FFF2-40B4-BE49-F238E27FC236}">
-                <a16:creationId xmlns:a16="http://schemas.microsoft.com/office/drawing/2014/main" id="{CC66E6F9-78FB-4084-8E25-489F33C40994}"/>
-              </a:ext>
-            </a:extLst>
-          </p:cNvPr>
+          <p:cNvPr id="55" name="DSPIRA 1"/>
           <p:cNvSpPr>
             <a:spLocks noGrp="1"/>
           </p:cNvSpPr>
-          <p:nvPr>
-            <p:ph type="sldNum" sz="quarter" idx="12"/>
-          </p:nvPr>
-        </p:nvSpPr>
-        <p:spPr/>
+          <p:nvPr/>
+        </p:nvSpPr>
+        <p:spPr>
+          <a:xfrm>
+            <a:off x="0" y="0"/>
+            <a:ext cx="12192000" cy="342900"/>
+          </a:xfrm>
+          <a:prstGeom prst="rect">
+            <a:avLst/>
+          </a:prstGeom>
+          <a:solidFill>
+            <a:srgbClr val="FFFFFF"/>
+          </a:solidFill>
+          <a:ln w="0">
+            <a:noFill/>
+          </a:ln>
+        </p:spPr>
+      </p:sp>
+      <p:sp>
+        <p:nvSpPr>
+          <p:cNvPr id="56" name="DSPIRA 2"/>
+          <p:cNvSpPr>
+            <a:spLocks noGrp="1"/>
+          </p:cNvSpPr>
+          <p:nvPr/>
+        </p:nvSpPr>
+        <p:spPr>
+          <a:xfrm>
+            <a:off x="0" y="7200900"/>
+            <a:ext cx="12192000" cy="342900"/>
+          </a:xfrm>
+          <a:prstGeom prst="rect">
+            <a:avLst/>
+          </a:prstGeom>
+          <a:solidFill>
+            <a:srgbClr val="FFFFFF"/>
+          </a:solidFill>
+          <a:ln w="0">
+            <a:noFill/>
+          </a:ln>
+        </p:spPr>
+      </p:sp>
+      <p:sp>
+        <p:nvSpPr>
+          <p:cNvPr id="57" name="DSPIRA 3"/>
+          <p:cNvSpPr>
+            <a:spLocks noGrp="1"/>
+          </p:cNvSpPr>
+          <p:nvPr/>
+        </p:nvSpPr>
+        <p:spPr>
+          <a:xfrm>
+            <a:off x="228600" y="76200"/>
+            <a:ext cx="4762500" cy="228600"/>
+          </a:xfrm>
+          <a:prstGeom prst="rect">
+            <a:avLst/>
+          </a:prstGeom>
+          <a:noFill/>
+          <a:ln w="0">
+            <a:noFill/>
+          </a:ln>
+        </p:spPr>
         <p:txBody>
-          <a:bodyPr/>
+          <a:bodyPr>
+            <a:noAutofit/>
+          </a:bodyPr>
           <a:lstStyle/>
           <a:p>
-            <a:fld id="{982A7450-C9B7-48AD-BEA2-175AC75E73D8}" type="slidenum">
-              <a:rPr lang="en-US" smtClean="0"/>
-              <a:t>7</a:t>
-            </a:fld>
-            <a:endParaRPr lang="en-US"/>
+            <a:pPr>
+              <a:defRPr sz="1200" b="1">
+                <a:solidFill>
+                  <a:srgbClr val="002855"/>
+                </a:solidFill>
+                <a:latin typeface="Arial"/>
+                <a:ea typeface="Arial"/>
+                <a:cs typeface="Arial"/>
+              </a:defRPr>
+            </a:pPr>
+            <a:r>
+              <a:rPr sz="1200" b="1">
+                <a:solidFill>
+                  <a:srgbClr val="002855"/>
+                </a:solidFill>
+                <a:latin typeface="Arial"/>
+                <a:ea typeface="Arial"/>
+                <a:cs typeface="Arial"/>
+              </a:rPr>
+              <a:t>WVU DSPIRA</a:t>
+            </a:r>
+          </a:p>
+        </p:txBody>
+      </p:sp>
+      <p:sp>
+        <p:nvSpPr>
+          <p:cNvPr id="58" name="DSPIRA 4"/>
+          <p:cNvSpPr>
+            <a:spLocks noGrp="1"/>
+          </p:cNvSpPr>
+          <p:nvPr/>
+        </p:nvSpPr>
+        <p:spPr>
+          <a:xfrm>
+            <a:off x="228600" y="7277100"/>
+            <a:ext cx="6667500" cy="228600"/>
+          </a:xfrm>
+          <a:prstGeom prst="rect">
+            <a:avLst/>
+          </a:prstGeom>
+          <a:noFill/>
+          <a:ln w="0">
+            <a:noFill/>
+          </a:ln>
+        </p:spPr>
+        <p:txBody>
+          <a:bodyPr>
+            <a:noAutofit/>
+          </a:bodyPr>
+          <a:lstStyle/>
+          <a:p>
+            <a:pPr>
+              <a:defRPr sz="900" b="0">
+                <a:solidFill>
+                  <a:srgbClr val="002855"/>
+                </a:solidFill>
+                <a:latin typeface="Arial"/>
+                <a:ea typeface="Arial"/>
+                <a:cs typeface="Arial"/>
+              </a:defRPr>
+            </a:pPr>
+            <a:r>
+              <a:rPr sz="900" b="0">
+                <a:solidFill>
+                  <a:srgbClr val="002855"/>
+                </a:solidFill>
+                <a:latin typeface="Arial"/>
+                <a:ea typeface="Arial"/>
+                <a:cs typeface="Arial"/>
+              </a:rPr>
+              <a:t>wvurail.org/dspira</a:t>
+            </a:r>
+          </a:p>
+        </p:txBody>
+      </p:sp>
+      <p:sp>
+        <p:nvSpPr>
+          <p:cNvPr id="59" name="DSPIRA 5"/>
+          <p:cNvSpPr>
+            <a:spLocks noGrp="1"/>
+          </p:cNvSpPr>
+          <p:nvPr/>
+        </p:nvSpPr>
+        <p:spPr>
+          <a:xfrm>
+            <a:off x="11191875" y="7277100"/>
+            <a:ext cx="762000" cy="228600"/>
+          </a:xfrm>
+          <a:prstGeom prst="rect">
+            <a:avLst/>
+          </a:prstGeom>
+          <a:noFill/>
+          <a:ln w="0">
+            <a:noFill/>
+          </a:ln>
+        </p:spPr>
+        <p:txBody>
+          <a:bodyPr>
+            <a:noAutofit/>
+          </a:bodyPr>
+          <a:lstStyle/>
+          <a:p>
+            <a:pPr>
+              <a:defRPr sz="900" b="0">
+                <a:solidFill>
+                  <a:srgbClr val="002855"/>
+                </a:solidFill>
+                <a:latin typeface="Arial"/>
+                <a:ea typeface="Arial"/>
+                <a:cs typeface="Arial"/>
+              </a:defRPr>
+            </a:pPr>
+            <a:r>
+              <a:rPr sz="900" b="0">
+                <a:solidFill>
+                  <a:srgbClr val="002855"/>
+                </a:solidFill>
+                <a:latin typeface="Arial"/>
+                <a:ea typeface="Arial"/>
+                <a:cs typeface="Arial"/>
+              </a:rPr>
+              <a:t>7 of 12</a:t>
+            </a:r>
           </a:p>
         </p:txBody>
       </p:sp>
@@ -10598,7 +12071,7 @@
         </p:blipFill>
         <p:spPr>
           <a:xfrm>
-            <a:off x="6432937" y="3015946"/>
+            <a:off x="6432937" y="3358846"/>
             <a:ext cx="4920863" cy="1509600"/>
           </a:xfrm>
           <a:prstGeom prst="rect">
@@ -10608,30 +12081,202 @@
       </p:pic>
       <p:sp>
         <p:nvSpPr>
-          <p:cNvPr id="7" name="Slide Number Placeholder 6">
-            <a:extLst>
-              <a:ext uri="{FF2B5EF4-FFF2-40B4-BE49-F238E27FC236}">
-                <a16:creationId xmlns:a16="http://schemas.microsoft.com/office/drawing/2014/main" id="{5A6233E7-5372-4F48-935C-FB6DC34B5A6A}"/>
-              </a:ext>
-            </a:extLst>
-          </p:cNvPr>
+          <p:cNvPr id="7" name="DSPIRA 1"/>
           <p:cNvSpPr>
             <a:spLocks noGrp="1"/>
           </p:cNvSpPr>
-          <p:nvPr>
-            <p:ph type="sldNum" sz="quarter" idx="12"/>
-          </p:nvPr>
-        </p:nvSpPr>
-        <p:spPr/>
+          <p:nvPr/>
+        </p:nvSpPr>
+        <p:spPr>
+          <a:xfrm>
+            <a:off x="0" y="0"/>
+            <a:ext cx="12192000" cy="342900"/>
+          </a:xfrm>
+          <a:prstGeom prst="rect">
+            <a:avLst/>
+          </a:prstGeom>
+          <a:solidFill>
+            <a:srgbClr val="FFFFFF"/>
+          </a:solidFill>
+          <a:ln w="0">
+            <a:noFill/>
+          </a:ln>
+        </p:spPr>
+      </p:sp>
+      <p:sp>
+        <p:nvSpPr>
+          <p:cNvPr id="8" name="DSPIRA 2"/>
+          <p:cNvSpPr>
+            <a:spLocks noGrp="1"/>
+          </p:cNvSpPr>
+          <p:nvPr/>
+        </p:nvSpPr>
+        <p:spPr>
+          <a:xfrm>
+            <a:off x="0" y="7200900"/>
+            <a:ext cx="12192000" cy="342900"/>
+          </a:xfrm>
+          <a:prstGeom prst="rect">
+            <a:avLst/>
+          </a:prstGeom>
+          <a:solidFill>
+            <a:srgbClr val="FFFFFF"/>
+          </a:solidFill>
+          <a:ln w="0">
+            <a:noFill/>
+          </a:ln>
+        </p:spPr>
+      </p:sp>
+      <p:sp>
+        <p:nvSpPr>
+          <p:cNvPr id="9" name="DSPIRA 3"/>
+          <p:cNvSpPr>
+            <a:spLocks noGrp="1"/>
+          </p:cNvSpPr>
+          <p:nvPr/>
+        </p:nvSpPr>
+        <p:spPr>
+          <a:xfrm>
+            <a:off x="228600" y="76200"/>
+            <a:ext cx="4762500" cy="228600"/>
+          </a:xfrm>
+          <a:prstGeom prst="rect">
+            <a:avLst/>
+          </a:prstGeom>
+          <a:noFill/>
+          <a:ln w="0">
+            <a:noFill/>
+          </a:ln>
+        </p:spPr>
         <p:txBody>
-          <a:bodyPr/>
+          <a:bodyPr>
+            <a:noAutofit/>
+          </a:bodyPr>
           <a:lstStyle/>
           <a:p>
-            <a:fld id="{982A7450-C9B7-48AD-BEA2-175AC75E73D8}" type="slidenum">
-              <a:rPr lang="en-US" smtClean="0"/>
-              <a:t>8</a:t>
-            </a:fld>
-            <a:endParaRPr lang="en-US"/>
+            <a:pPr>
+              <a:defRPr sz="1200" b="1">
+                <a:solidFill>
+                  <a:srgbClr val="002855"/>
+                </a:solidFill>
+                <a:latin typeface="Arial"/>
+                <a:ea typeface="Arial"/>
+                <a:cs typeface="Arial"/>
+              </a:defRPr>
+            </a:pPr>
+            <a:r>
+              <a:rPr sz="1200" b="1">
+                <a:solidFill>
+                  <a:srgbClr val="002855"/>
+                </a:solidFill>
+                <a:latin typeface="Arial"/>
+                <a:ea typeface="Arial"/>
+                <a:cs typeface="Arial"/>
+              </a:rPr>
+              <a:t>WVU DSPIRA</a:t>
+            </a:r>
+          </a:p>
+        </p:txBody>
+      </p:sp>
+      <p:sp>
+        <p:nvSpPr>
+          <p:cNvPr id="10" name="DSPIRA 4"/>
+          <p:cNvSpPr>
+            <a:spLocks noGrp="1"/>
+          </p:cNvSpPr>
+          <p:nvPr/>
+        </p:nvSpPr>
+        <p:spPr>
+          <a:xfrm>
+            <a:off x="228600" y="7277100"/>
+            <a:ext cx="6667500" cy="228600"/>
+          </a:xfrm>
+          <a:prstGeom prst="rect">
+            <a:avLst/>
+          </a:prstGeom>
+          <a:noFill/>
+          <a:ln w="0">
+            <a:noFill/>
+          </a:ln>
+        </p:spPr>
+        <p:txBody>
+          <a:bodyPr>
+            <a:noAutofit/>
+          </a:bodyPr>
+          <a:lstStyle/>
+          <a:p>
+            <a:pPr>
+              <a:defRPr sz="900" b="0">
+                <a:solidFill>
+                  <a:srgbClr val="002855"/>
+                </a:solidFill>
+                <a:latin typeface="Arial"/>
+                <a:ea typeface="Arial"/>
+                <a:cs typeface="Arial"/>
+              </a:defRPr>
+            </a:pPr>
+            <a:r>
+              <a:rPr sz="900" b="0">
+                <a:solidFill>
+                  <a:srgbClr val="002855"/>
+                </a:solidFill>
+                <a:latin typeface="Arial"/>
+                <a:ea typeface="Arial"/>
+                <a:cs typeface="Arial"/>
+              </a:rPr>
+              <a:t>wvurail.org/dspira</a:t>
+            </a:r>
+          </a:p>
+        </p:txBody>
+      </p:sp>
+      <p:sp>
+        <p:nvSpPr>
+          <p:cNvPr id="11" name="DSPIRA 5"/>
+          <p:cNvSpPr>
+            <a:spLocks noGrp="1"/>
+          </p:cNvSpPr>
+          <p:nvPr/>
+        </p:nvSpPr>
+        <p:spPr>
+          <a:xfrm>
+            <a:off x="11191875" y="7277100"/>
+            <a:ext cx="762000" cy="228600"/>
+          </a:xfrm>
+          <a:prstGeom prst="rect">
+            <a:avLst/>
+          </a:prstGeom>
+          <a:noFill/>
+          <a:ln w="0">
+            <a:noFill/>
+          </a:ln>
+        </p:spPr>
+        <p:txBody>
+          <a:bodyPr>
+            <a:noAutofit/>
+          </a:bodyPr>
+          <a:lstStyle/>
+          <a:p>
+            <a:pPr>
+              <a:defRPr sz="900" b="0">
+                <a:solidFill>
+                  <a:srgbClr val="002855"/>
+                </a:solidFill>
+                <a:latin typeface="Arial"/>
+                <a:ea typeface="Arial"/>
+                <a:cs typeface="Arial"/>
+              </a:defRPr>
+            </a:pPr>
+            <a:r>
+              <a:rPr sz="900" b="0">
+                <a:solidFill>
+                  <a:srgbClr val="002855"/>
+                </a:solidFill>
+                <a:latin typeface="Arial"/>
+                <a:ea typeface="Arial"/>
+                <a:cs typeface="Arial"/>
+              </a:rPr>
+              <a:t>8 of 12</a:t>
+            </a:r>
           </a:p>
         </p:txBody>
       </p:sp>
@@ -10711,8 +12356,8 @@
         </p:nvSpPr>
         <p:spPr>
           <a:xfrm>
-            <a:off x="838200" y="1825625"/>
-            <a:ext cx="4953000" cy="4351338"/>
+            <a:off x="838200" y="2168525"/>
+            <a:ext cx="4100000" cy="4351338"/>
           </a:xfrm>
         </p:spPr>
         <p:txBody>
@@ -10741,35 +12386,6 @@
               <a:rPr lang="en-US" dirty="0"/>
               <a:t>The same idea is used to search for signals. </a:t>
             </a:r>
-          </a:p>
-        </p:txBody>
-      </p:sp>
-      <p:sp>
-        <p:nvSpPr>
-          <p:cNvPr id="4" name="Slide Number Placeholder 3">
-            <a:extLst>
-              <a:ext uri="{FF2B5EF4-FFF2-40B4-BE49-F238E27FC236}">
-                <a16:creationId xmlns:a16="http://schemas.microsoft.com/office/drawing/2014/main" id="{D1635CA3-9AA3-43C0-A2CC-C21EC9916B0F}"/>
-              </a:ext>
-            </a:extLst>
-          </p:cNvPr>
-          <p:cNvSpPr>
-            <a:spLocks noGrp="1"/>
-          </p:cNvSpPr>
-          <p:nvPr>
-            <p:ph type="sldNum" sz="quarter" idx="12"/>
-          </p:nvPr>
-        </p:nvSpPr>
-        <p:spPr/>
-        <p:txBody>
-          <a:bodyPr/>
-          <a:lstStyle/>
-          <a:p>
-            <a:fld id="{982A7450-C9B7-48AD-BEA2-175AC75E73D8}" type="slidenum">
-              <a:rPr lang="en-US" smtClean="0"/>
-              <a:t>9</a:t>
-            </a:fld>
-            <a:endParaRPr lang="en-US"/>
           </a:p>
         </p:txBody>
       </p:sp>
@@ -10795,7 +12411,7 @@
         </p:blipFill>
         <p:spPr>
           <a:xfrm>
-            <a:off x="5402993" y="1550987"/>
+            <a:off x="5402993" y="1893887"/>
             <a:ext cx="5658153" cy="4043363"/>
           </a:xfrm>
           <a:prstGeom prst="rect">
@@ -10817,7 +12433,7 @@
         </p:nvSpPr>
         <p:spPr>
           <a:xfrm>
-            <a:off x="11439525" y="2171700"/>
+            <a:off x="11439525" y="2514600"/>
             <a:ext cx="442750" cy="369332"/>
           </a:xfrm>
           <a:prstGeom prst="rect">
@@ -10852,7 +12468,7 @@
         </p:nvSpPr>
         <p:spPr>
           <a:xfrm>
-            <a:off x="11449050" y="2790825"/>
+            <a:off x="11449050" y="3133725"/>
             <a:ext cx="442750" cy="369332"/>
           </a:xfrm>
           <a:prstGeom prst="rect">
@@ -10887,7 +12503,7 @@
         </p:nvSpPr>
         <p:spPr>
           <a:xfrm>
-            <a:off x="11458575" y="3362325"/>
+            <a:off x="11458575" y="3705225"/>
             <a:ext cx="442750" cy="369332"/>
           </a:xfrm>
           <a:prstGeom prst="rect">
@@ -10922,7 +12538,7 @@
         </p:nvSpPr>
         <p:spPr>
           <a:xfrm>
-            <a:off x="11458575" y="3990975"/>
+            <a:off x="11458575" y="4333875"/>
             <a:ext cx="442750" cy="369332"/>
           </a:xfrm>
           <a:prstGeom prst="rect">
@@ -10957,7 +12573,7 @@
         </p:nvSpPr>
         <p:spPr>
           <a:xfrm>
-            <a:off x="11468100" y="4581525"/>
+            <a:off x="11468100" y="4924425"/>
             <a:ext cx="442750" cy="369332"/>
           </a:xfrm>
           <a:prstGeom prst="rect">
@@ -10992,7 +12608,7 @@
         </p:nvSpPr>
         <p:spPr>
           <a:xfrm>
-            <a:off x="11477625" y="5191125"/>
+            <a:off x="11477625" y="5534025"/>
             <a:ext cx="442750" cy="369332"/>
           </a:xfrm>
           <a:prstGeom prst="rect">
@@ -11009,6 +12625,207 @@
             <a:r>
               <a:rPr lang="en-US" dirty="0"/>
               <a:t>(6)</a:t>
+            </a:r>
+          </a:p>
+        </p:txBody>
+      </p:sp>
+      <p:sp>
+        <p:nvSpPr>
+          <p:cNvPr id="12" name="DSPIRA 1"/>
+          <p:cNvSpPr>
+            <a:spLocks noGrp="1"/>
+          </p:cNvSpPr>
+          <p:nvPr/>
+        </p:nvSpPr>
+        <p:spPr>
+          <a:xfrm>
+            <a:off x="0" y="0"/>
+            <a:ext cx="12192000" cy="342900"/>
+          </a:xfrm>
+          <a:prstGeom prst="rect">
+            <a:avLst/>
+          </a:prstGeom>
+          <a:solidFill>
+            <a:srgbClr val="FFFFFF"/>
+          </a:solidFill>
+          <a:ln w="0">
+            <a:noFill/>
+          </a:ln>
+        </p:spPr>
+      </p:sp>
+      <p:sp>
+        <p:nvSpPr>
+          <p:cNvPr id="13" name="DSPIRA 2"/>
+          <p:cNvSpPr>
+            <a:spLocks noGrp="1"/>
+          </p:cNvSpPr>
+          <p:nvPr/>
+        </p:nvSpPr>
+        <p:spPr>
+          <a:xfrm>
+            <a:off x="0" y="7200900"/>
+            <a:ext cx="12192000" cy="342900"/>
+          </a:xfrm>
+          <a:prstGeom prst="rect">
+            <a:avLst/>
+          </a:prstGeom>
+          <a:solidFill>
+            <a:srgbClr val="FFFFFF"/>
+          </a:solidFill>
+          <a:ln w="0">
+            <a:noFill/>
+          </a:ln>
+        </p:spPr>
+      </p:sp>
+      <p:sp>
+        <p:nvSpPr>
+          <p:cNvPr id="14" name="DSPIRA 3"/>
+          <p:cNvSpPr>
+            <a:spLocks noGrp="1"/>
+          </p:cNvSpPr>
+          <p:nvPr/>
+        </p:nvSpPr>
+        <p:spPr>
+          <a:xfrm>
+            <a:off x="228600" y="76200"/>
+            <a:ext cx="4762500" cy="228600"/>
+          </a:xfrm>
+          <a:prstGeom prst="rect">
+            <a:avLst/>
+          </a:prstGeom>
+          <a:noFill/>
+          <a:ln w="0">
+            <a:noFill/>
+          </a:ln>
+        </p:spPr>
+        <p:txBody>
+          <a:bodyPr>
+            <a:noAutofit/>
+          </a:bodyPr>
+          <a:lstStyle/>
+          <a:p>
+            <a:pPr>
+              <a:defRPr sz="1200" b="1">
+                <a:solidFill>
+                  <a:srgbClr val="002855"/>
+                </a:solidFill>
+                <a:latin typeface="Arial"/>
+                <a:ea typeface="Arial"/>
+                <a:cs typeface="Arial"/>
+              </a:defRPr>
+            </a:pPr>
+            <a:r>
+              <a:rPr sz="1200" b="1">
+                <a:solidFill>
+                  <a:srgbClr val="002855"/>
+                </a:solidFill>
+                <a:latin typeface="Arial"/>
+                <a:ea typeface="Arial"/>
+                <a:cs typeface="Arial"/>
+              </a:rPr>
+              <a:t>WVU DSPIRA</a:t>
+            </a:r>
+          </a:p>
+        </p:txBody>
+      </p:sp>
+      <p:sp>
+        <p:nvSpPr>
+          <p:cNvPr id="15" name="DSPIRA 4"/>
+          <p:cNvSpPr>
+            <a:spLocks noGrp="1"/>
+          </p:cNvSpPr>
+          <p:nvPr/>
+        </p:nvSpPr>
+        <p:spPr>
+          <a:xfrm>
+            <a:off x="228600" y="7277100"/>
+            <a:ext cx="6667500" cy="228600"/>
+          </a:xfrm>
+          <a:prstGeom prst="rect">
+            <a:avLst/>
+          </a:prstGeom>
+          <a:noFill/>
+          <a:ln w="0">
+            <a:noFill/>
+          </a:ln>
+        </p:spPr>
+        <p:txBody>
+          <a:bodyPr>
+            <a:noAutofit/>
+          </a:bodyPr>
+          <a:lstStyle/>
+          <a:p>
+            <a:pPr>
+              <a:defRPr sz="900" b="0">
+                <a:solidFill>
+                  <a:srgbClr val="002855"/>
+                </a:solidFill>
+                <a:latin typeface="Arial"/>
+                <a:ea typeface="Arial"/>
+                <a:cs typeface="Arial"/>
+              </a:defRPr>
+            </a:pPr>
+            <a:r>
+              <a:rPr sz="900" b="0">
+                <a:solidFill>
+                  <a:srgbClr val="002855"/>
+                </a:solidFill>
+                <a:latin typeface="Arial"/>
+                <a:ea typeface="Arial"/>
+                <a:cs typeface="Arial"/>
+              </a:rPr>
+              <a:t>wvurail.org/dspira</a:t>
+            </a:r>
+          </a:p>
+        </p:txBody>
+      </p:sp>
+      <p:sp>
+        <p:nvSpPr>
+          <p:cNvPr id="16" name="DSPIRA 5"/>
+          <p:cNvSpPr>
+            <a:spLocks noGrp="1"/>
+          </p:cNvSpPr>
+          <p:nvPr/>
+        </p:nvSpPr>
+        <p:spPr>
+          <a:xfrm>
+            <a:off x="11191875" y="7277100"/>
+            <a:ext cx="762000" cy="228600"/>
+          </a:xfrm>
+          <a:prstGeom prst="rect">
+            <a:avLst/>
+          </a:prstGeom>
+          <a:noFill/>
+          <a:ln w="0">
+            <a:noFill/>
+          </a:ln>
+        </p:spPr>
+        <p:txBody>
+          <a:bodyPr>
+            <a:noAutofit/>
+          </a:bodyPr>
+          <a:lstStyle/>
+          <a:p>
+            <a:pPr>
+              <a:defRPr sz="900" b="0">
+                <a:solidFill>
+                  <a:srgbClr val="002855"/>
+                </a:solidFill>
+                <a:latin typeface="Arial"/>
+                <a:ea typeface="Arial"/>
+                <a:cs typeface="Arial"/>
+              </a:defRPr>
+            </a:pPr>
+            <a:r>
+              <a:rPr sz="900" b="0">
+                <a:solidFill>
+                  <a:srgbClr val="002855"/>
+                </a:solidFill>
+                <a:latin typeface="Arial"/>
+                <a:ea typeface="Arial"/>
+                <a:cs typeface="Arial"/>
+              </a:rPr>
+              <a:t>9 of 12</a:t>
             </a:r>
           </a:p>
         </p:txBody>
@@ -11069,7 +12886,7 @@
     </a:clrScheme>
     <a:fontScheme name="Office">
       <a:majorFont>
-        <a:latin typeface="Calibri Light" panose="020F0302020204030204"/>
+        <a:latin typeface="Arial" panose="020F0302020204030204"/>
         <a:ea typeface=""/>
         <a:cs typeface=""/>
         <a:font script="Jpan" typeface="游ゴシック Light"/>
@@ -11121,7 +12938,7 @@
         <a:font script="Tfng" typeface="Ebrima"/>
       </a:majorFont>
       <a:minorFont>
-        <a:latin typeface="Calibri" panose="020F0502020204030204"/>
+        <a:latin typeface="Arial" panose="020F0502020204030204"/>
         <a:ea typeface=""/>
         <a:cs typeface=""/>
         <a:font script="Jpan" typeface="游ゴシック"/>
@@ -11364,7 +13181,7 @@
     </a:clrScheme>
     <a:fontScheme name="Office">
       <a:majorFont>
-        <a:latin typeface="Calibri Light" panose="020F0302020204030204"/>
+        <a:latin typeface="Arial" panose="020F0302020204030204"/>
         <a:ea typeface=""/>
         <a:cs typeface=""/>
         <a:font script="Jpan" typeface="游ゴシック Light"/>
@@ -11416,7 +13233,7 @@
         <a:font script="Tfng" typeface="Ebrima"/>
       </a:majorFont>
       <a:minorFont>
-        <a:latin typeface="Calibri" panose="020F0502020204030204"/>
+        <a:latin typeface="Arial" panose="020F0502020204030204"/>
         <a:ea typeface=""/>
         <a:cs typeface=""/>
         <a:font script="Jpan" typeface="游ゴシック"/>
@@ -11614,183 +13431,4 @@
     </a:ext>
   </a:extLst>
 </a:theme>
-</file>
-
-<file path=customXml/item1.xml><?xml version="1.0" encoding="utf-8"?>
-<ct:contentTypeSchema xmlns:ct="http://schemas.microsoft.com/office/2006/metadata/contentType" xmlns:ma="http://schemas.microsoft.com/office/2006/metadata/properties/metaAttributes" ct:_="" ma:_="" ma:contentTypeName="Document" ma:contentTypeID="0x01010016C36F108F9F92488C988DDF36346911" ma:contentTypeVersion="5" ma:contentTypeDescription="Create a new document." ma:contentTypeScope="" ma:versionID="c417924321fef32731141cd966ef6f94">
-  <xsd:schema xmlns:xsd="http://www.w3.org/2001/XMLSchema" xmlns:xs="http://www.w3.org/2001/XMLSchema" xmlns:p="http://schemas.microsoft.com/office/2006/metadata/properties" xmlns:ns2="1bb24863-89de-455f-aabf-4424925aa312" targetNamespace="http://schemas.microsoft.com/office/2006/metadata/properties" ma:root="true" ma:fieldsID="a7d3b2212d350eb904df17fc79fef4f4" ns2:_="">
-    <xsd:import namespace="1bb24863-89de-455f-aabf-4424925aa312"/>
-    <xsd:element name="properties">
-      <xsd:complexType>
-        <xsd:sequence>
-          <xsd:element name="documentManagement">
-            <xsd:complexType>
-              <xsd:all>
-                <xsd:element ref="ns2:MediaServiceMetadata" minOccurs="0"/>
-                <xsd:element ref="ns2:MediaServiceFastMetadata" minOccurs="0"/>
-                <xsd:element ref="ns2:MediaServiceAutoTags" minOccurs="0"/>
-                <xsd:element ref="ns2:MediaServiceOCR" minOccurs="0"/>
-                <xsd:element ref="ns2:MediaServiceDateTaken" minOccurs="0"/>
-              </xsd:all>
-            </xsd:complexType>
-          </xsd:element>
-        </xsd:sequence>
-      </xsd:complexType>
-    </xsd:element>
-  </xsd:schema>
-  <xsd:schema xmlns:xsd="http://www.w3.org/2001/XMLSchema" xmlns:xs="http://www.w3.org/2001/XMLSchema" xmlns:dms="http://schemas.microsoft.com/office/2006/documentManagement/types" xmlns:pc="http://schemas.microsoft.com/office/infopath/2007/PartnerControls" targetNamespace="1bb24863-89de-455f-aabf-4424925aa312" elementFormDefault="qualified">
-    <xsd:import namespace="http://schemas.microsoft.com/office/2006/documentManagement/types"/>
-    <xsd:import namespace="http://schemas.microsoft.com/office/infopath/2007/PartnerControls"/>
-    <xsd:element name="MediaServiceMetadata" ma:index="8" nillable="true" ma:displayName="MediaServiceMetadata" ma:hidden="true" ma:internalName="MediaServiceMetadata" ma:readOnly="true">
-      <xsd:simpleType>
-        <xsd:restriction base="dms:Note"/>
-      </xsd:simpleType>
-    </xsd:element>
-    <xsd:element name="MediaServiceFastMetadata" ma:index="9" nillable="true" ma:displayName="MediaServiceFastMetadata" ma:hidden="true" ma:internalName="MediaServiceFastMetadata" ma:readOnly="true">
-      <xsd:simpleType>
-        <xsd:restriction base="dms:Note"/>
-      </xsd:simpleType>
-    </xsd:element>
-    <xsd:element name="MediaServiceAutoTags" ma:index="10" nillable="true" ma:displayName="MediaServiceAutoTags" ma:internalName="MediaServiceAutoTags" ma:readOnly="true">
-      <xsd:simpleType>
-        <xsd:restriction base="dms:Text"/>
-      </xsd:simpleType>
-    </xsd:element>
-    <xsd:element name="MediaServiceOCR" ma:index="11" nillable="true" ma:displayName="MediaServiceOCR" ma:internalName="MediaServiceOCR" ma:readOnly="true">
-      <xsd:simpleType>
-        <xsd:restriction base="dms:Note">
-          <xsd:maxLength value="255"/>
-        </xsd:restriction>
-      </xsd:simpleType>
-    </xsd:element>
-    <xsd:element name="MediaServiceDateTaken" ma:index="12" nillable="true" ma:displayName="MediaServiceDateTaken" ma:hidden="true" ma:internalName="MediaServiceDateTaken" ma:readOnly="true">
-      <xsd:simpleType>
-        <xsd:restriction base="dms:Text"/>
-      </xsd:simpleType>
-    </xsd:element>
-  </xsd:schema>
-  <xsd:schema xmlns="http://schemas.openxmlformats.org/package/2006/metadata/core-properties" xmlns:xsd="http://www.w3.org/2001/XMLSchema" xmlns:xsi="http://www.w3.org/2001/XMLSchema-instance" xmlns:dc="http://purl.org/dc/elements/1.1/" xmlns:dcterms="http://purl.org/dc/terms/" xmlns:odoc="http://schemas.microsoft.com/internal/obd" targetNamespace="http://schemas.openxmlformats.org/package/2006/metadata/core-properties" elementFormDefault="qualified" attributeFormDefault="unqualified" blockDefault="#all">
-    <xsd:import namespace="http://purl.org/dc/elements/1.1/" schemaLocation="http://dublincore.org/schemas/xmls/qdc/2003/04/02/dc.xsd"/>
-    <xsd:import namespace="http://purl.org/dc/terms/" schemaLocation="http://dublincore.org/schemas/xmls/qdc/2003/04/02/dcterms.xsd"/>
-    <xsd:element name="coreProperties" type="CT_coreProperties"/>
-    <xsd:complexType name="CT_coreProperties">
-      <xsd:all>
-        <xsd:element ref="dc:creator" minOccurs="0" maxOccurs="1"/>
-        <xsd:element ref="dcterms:created" minOccurs="0" maxOccurs="1"/>
-        <xsd:element ref="dc:identifier" minOccurs="0" maxOccurs="1"/>
-        <xsd:element name="contentType" minOccurs="0" maxOccurs="1" type="xsd:string" ma:index="0" ma:displayName="Content Type"/>
-        <xsd:element ref="dc:title" minOccurs="0" maxOccurs="1" ma:index="4" ma:displayName="Title"/>
-        <xsd:element ref="dc:subject" minOccurs="0" maxOccurs="1"/>
-        <xsd:element ref="dc:description" minOccurs="0" maxOccurs="1"/>
-        <xsd:element name="keywords" minOccurs="0" maxOccurs="1" type="xsd:string"/>
-        <xsd:element ref="dc:language" minOccurs="0" maxOccurs="1"/>
-        <xsd:element name="category" minOccurs="0" maxOccurs="1" type="xsd:string"/>
-        <xsd:element name="version" minOccurs="0" maxOccurs="1" type="xsd:string"/>
-        <xsd:element name="revision" minOccurs="0" maxOccurs="1" type="xsd:string">
-          <xsd:annotation>
-            <xsd:documentation>
-                        This value indicates the number of saves or revisions. The application is responsible for updating this value after each revision.
-                    </xsd:documentation>
-          </xsd:annotation>
-        </xsd:element>
-        <xsd:element name="lastModifiedBy" minOccurs="0" maxOccurs="1" type="xsd:string"/>
-        <xsd:element ref="dcterms:modified" minOccurs="0" maxOccurs="1"/>
-        <xsd:element name="contentStatus" minOccurs="0" maxOccurs="1" type="xsd:string"/>
-      </xsd:all>
-    </xsd:complexType>
-  </xsd:schema>
-  <xs:schema xmlns:pc="http://schemas.microsoft.com/office/infopath/2007/PartnerControls" xmlns:xs="http://www.w3.org/2001/XMLSchema" targetNamespace="http://schemas.microsoft.com/office/infopath/2007/PartnerControls" elementFormDefault="qualified" attributeFormDefault="unqualified">
-    <xs:element name="Person">
-      <xs:complexType>
-        <xs:sequence>
-          <xs:element ref="pc:DisplayName" minOccurs="0"/>
-          <xs:element ref="pc:AccountId" minOccurs="0"/>
-          <xs:element ref="pc:AccountType" minOccurs="0"/>
-        </xs:sequence>
-      </xs:complexType>
-    </xs:element>
-    <xs:element name="DisplayName" type="xs:string"/>
-    <xs:element name="AccountId" type="xs:string"/>
-    <xs:element name="AccountType" type="xs:string"/>
-    <xs:element name="BDCAssociatedEntity">
-      <xs:complexType>
-        <xs:sequence>
-          <xs:element ref="pc:BDCEntity" minOccurs="0" maxOccurs="unbounded"/>
-        </xs:sequence>
-        <xs:attribute ref="pc:EntityNamespace"/>
-        <xs:attribute ref="pc:EntityName"/>
-        <xs:attribute ref="pc:SystemInstanceName"/>
-        <xs:attribute ref="pc:AssociationName"/>
-      </xs:complexType>
-    </xs:element>
-    <xs:attribute name="EntityNamespace" type="xs:string"/>
-    <xs:attribute name="EntityName" type="xs:string"/>
-    <xs:attribute name="SystemInstanceName" type="xs:string"/>
-    <xs:attribute name="AssociationName" type="xs:string"/>
-    <xs:element name="BDCEntity">
-      <xs:complexType>
-        <xs:sequence>
-          <xs:element ref="pc:EntityDisplayName" minOccurs="0"/>
-          <xs:element ref="pc:EntityInstanceReference" minOccurs="0"/>
-          <xs:element ref="pc:EntityId1" minOccurs="0"/>
-          <xs:element ref="pc:EntityId2" minOccurs="0"/>
-          <xs:element ref="pc:EntityId3" minOccurs="0"/>
-          <xs:element ref="pc:EntityId4" minOccurs="0"/>
-          <xs:element ref="pc:EntityId5" minOccurs="0"/>
-        </xs:sequence>
-      </xs:complexType>
-    </xs:element>
-    <xs:element name="EntityDisplayName" type="xs:string"/>
-    <xs:element name="EntityInstanceReference" type="xs:string"/>
-    <xs:element name="EntityId1" type="xs:string"/>
-    <xs:element name="EntityId2" type="xs:string"/>
-    <xs:element name="EntityId3" type="xs:string"/>
-    <xs:element name="EntityId4" type="xs:string"/>
-    <xs:element name="EntityId5" type="xs:string"/>
-    <xs:element name="Terms">
-      <xs:complexType>
-        <xs:sequence>
-          <xs:element ref="pc:TermInfo" minOccurs="0" maxOccurs="unbounded"/>
-        </xs:sequence>
-      </xs:complexType>
-    </xs:element>
-    <xs:element name="TermInfo">
-      <xs:complexType>
-        <xs:sequence>
-          <xs:element ref="pc:TermName" minOccurs="0"/>
-          <xs:element ref="pc:TermId" minOccurs="0"/>
-        </xs:sequence>
-      </xs:complexType>
-    </xs:element>
-    <xs:element name="TermName" type="xs:string"/>
-    <xs:element name="TermId" type="xs:string"/>
-  </xs:schema>
-</ct:contentTypeSchema>
-</file>
-
-<file path=customXml/item2.xml><?xml version="1.0" encoding="utf-8"?>
-<?mso-contentType ?>
-<FormTemplates xmlns="http://schemas.microsoft.com/sharepoint/v3/contenttype/forms">
-  <Display>DocumentLibraryForm</Display>
-  <Edit>DocumentLibraryForm</Edit>
-  <New>DocumentLibraryForm</New>
-</FormTemplates>
-</file>
-
-<file path=customXml/item3.xml><?xml version="1.0" encoding="utf-8"?>
-<p:properties xmlns:p="http://schemas.microsoft.com/office/2006/metadata/properties" xmlns:xsi="http://www.w3.org/2001/XMLSchema-instance" xmlns:pc="http://schemas.microsoft.com/office/infopath/2007/PartnerControls">
-  <documentManagement/>
-</p:properties>
-</file>
-
-<file path=customXml/itemProps1.xml><?xml version="1.0" encoding="utf-8"?>
-<ds:datastoreItem xmlns:ds="http://schemas.openxmlformats.org/officeDocument/2006/customXml" ds:itemID="{B45020C5-55C2-4AFA-AF2C-DAAC0E095DF7}"/>
-</file>
-
-<file path=customXml/itemProps2.xml><?xml version="1.0" encoding="utf-8"?>
-<ds:datastoreItem xmlns:ds="http://schemas.openxmlformats.org/officeDocument/2006/customXml" ds:itemID="{2A695F96-2F3D-474B-AB42-04C2AB694C3A}"/>
-</file>
-
-<file path=customXml/itemProps3.xml><?xml version="1.0" encoding="utf-8"?>
-<ds:datastoreItem xmlns:ds="http://schemas.openxmlformats.org/officeDocument/2006/customXml" ds:itemID="{78EE5182-D919-474D-A3B9-9992CFF23077}"/>
 </file>
--- a/assets/lessons/lectures/digital-signal-processing/signals-2018.pptx
+++ b/assets/lessons/lectures/digital-signal-processing/signals-2018.pptx
@@ -6942,7 +6942,7 @@
       </p:sp>
       <p:sp>
         <p:nvSpPr>
-          <p:cNvPr id="9" name="DSPIRA 1"/>
+          <p:cNvPr id="10" name="DSPIRA 2"/>
           <p:cNvSpPr>
             <a:spLocks noGrp="1"/>
           </p:cNvSpPr>
@@ -6950,7 +6950,7 @@
         </p:nvSpPr>
         <p:spPr>
           <a:xfrm>
-            <a:off x="0" y="0"/>
+            <a:off x="0" y="7200900"/>
             <a:ext cx="12192000" cy="342900"/>
           </a:xfrm>
           <a:prstGeom prst="rect">
@@ -6963,81 +6963,6 @@
             <a:noFill/>
           </a:ln>
         </p:spPr>
-      </p:sp>
-      <p:sp>
-        <p:nvSpPr>
-          <p:cNvPr id="10" name="DSPIRA 2"/>
-          <p:cNvSpPr>
-            <a:spLocks noGrp="1"/>
-          </p:cNvSpPr>
-          <p:nvPr/>
-        </p:nvSpPr>
-        <p:spPr>
-          <a:xfrm>
-            <a:off x="0" y="7200900"/>
-            <a:ext cx="12192000" cy="342900"/>
-          </a:xfrm>
-          <a:prstGeom prst="rect">
-            <a:avLst/>
-          </a:prstGeom>
-          <a:solidFill>
-            <a:srgbClr val="FFFFFF"/>
-          </a:solidFill>
-          <a:ln w="0">
-            <a:noFill/>
-          </a:ln>
-        </p:spPr>
-      </p:sp>
-      <p:sp>
-        <p:nvSpPr>
-          <p:cNvPr id="11" name="DSPIRA 3"/>
-          <p:cNvSpPr>
-            <a:spLocks noGrp="1"/>
-          </p:cNvSpPr>
-          <p:nvPr/>
-        </p:nvSpPr>
-        <p:spPr>
-          <a:xfrm>
-            <a:off x="228600" y="76200"/>
-            <a:ext cx="4762500" cy="228600"/>
-          </a:xfrm>
-          <a:prstGeom prst="rect">
-            <a:avLst/>
-          </a:prstGeom>
-          <a:noFill/>
-          <a:ln w="0">
-            <a:noFill/>
-          </a:ln>
-        </p:spPr>
-        <p:txBody>
-          <a:bodyPr>
-            <a:noAutofit/>
-          </a:bodyPr>
-          <a:lstStyle/>
-          <a:p>
-            <a:pPr>
-              <a:defRPr sz="1200" b="1">
-                <a:solidFill>
-                  <a:srgbClr val="002855"/>
-                </a:solidFill>
-                <a:latin typeface="Arial"/>
-                <a:ea typeface="Arial"/>
-                <a:cs typeface="Arial"/>
-              </a:defRPr>
-            </a:pPr>
-            <a:r>
-              <a:rPr sz="1200" b="1">
-                <a:solidFill>
-                  <a:srgbClr val="002855"/>
-                </a:solidFill>
-                <a:latin typeface="Arial"/>
-                <a:ea typeface="Arial"/>
-                <a:cs typeface="Arial"/>
-              </a:rPr>
-              <a:t>WVU DSPIRA</a:t>
-            </a:r>
-          </a:p>
-        </p:txBody>
       </p:sp>
       <p:sp>
         <p:nvSpPr>
@@ -7137,6 +7062,156 @@
                 <a:cs typeface="Arial"/>
               </a:rPr>
               <a:t>1 of 12</a:t>
+            </a:r>
+          </a:p>
+        </p:txBody>
+      </p:sp>
+      <p:sp>
+        <p:nvSpPr>
+          <p:cNvPr id="14" name="WVU DSPIRA navy band"/>
+          <p:cNvSpPr>
+            <a:spLocks noGrp="1"/>
+          </p:cNvSpPr>
+          <p:nvPr/>
+        </p:nvSpPr>
+        <p:spPr>
+          <a:xfrm>
+            <a:off x="0" y="0"/>
+            <a:ext cx="12192000" cy="323850"/>
+          </a:xfrm>
+          <a:prstGeom prst="rect">
+            <a:avLst/>
+          </a:prstGeom>
+          <a:solidFill>
+            <a:srgbClr val="002855"/>
+          </a:solidFill>
+          <a:ln w="0">
+            <a:noFill/>
+          </a:ln>
+        </p:spPr>
+      </p:sp>
+      <p:sp>
+        <p:nvSpPr>
+          <p:cNvPr id="15" name="WVU DSPIRA gold rule"/>
+          <p:cNvSpPr>
+            <a:spLocks noGrp="1"/>
+          </p:cNvSpPr>
+          <p:nvPr/>
+        </p:nvSpPr>
+        <p:spPr>
+          <a:xfrm>
+            <a:off x="0" y="323850"/>
+            <a:ext cx="12192000" cy="19050"/>
+          </a:xfrm>
+          <a:prstGeom prst="rect">
+            <a:avLst/>
+          </a:prstGeom>
+          <a:solidFill>
+            <a:srgbClr val="EEAA00"/>
+          </a:solidFill>
+          <a:ln w="0">
+            <a:noFill/>
+          </a:ln>
+        </p:spPr>
+      </p:sp>
+      <p:sp>
+        <p:nvSpPr>
+          <p:cNvPr id="16" name="WVU DSPIRA name"/>
+          <p:cNvSpPr>
+            <a:spLocks noGrp="1"/>
+          </p:cNvSpPr>
+          <p:nvPr/>
+        </p:nvSpPr>
+        <p:spPr>
+          <a:xfrm>
+            <a:off x="228600" y="19050"/>
+            <a:ext cx="2857500" cy="257175"/>
+          </a:xfrm>
+          <a:prstGeom prst="rect">
+            <a:avLst/>
+          </a:prstGeom>
+          <a:noFill/>
+          <a:ln w="0">
+            <a:noFill/>
+          </a:ln>
+        </p:spPr>
+        <p:txBody>
+          <a:bodyPr>
+            <a:noAutofit/>
+          </a:bodyPr>
+          <a:lstStyle/>
+          <a:p>
+            <a:pPr>
+              <a:defRPr sz="1600" b="1">
+                <a:solidFill>
+                  <a:srgbClr val="FFFFFF"/>
+                </a:solidFill>
+                <a:latin typeface="Arial"/>
+                <a:ea typeface="Arial"/>
+                <a:cs typeface="Arial"/>
+              </a:defRPr>
+            </a:pPr>
+            <a:r>
+              <a:rPr sz="1600" b="1">
+                <a:solidFill>
+                  <a:srgbClr val="FFFFFF"/>
+                </a:solidFill>
+                <a:latin typeface="Arial"/>
+                <a:ea typeface="Arial"/>
+                <a:cs typeface="Arial"/>
+              </a:rPr>
+              <a:t>WVU DSPIRA</a:t>
+            </a:r>
+          </a:p>
+        </p:txBody>
+      </p:sp>
+      <p:sp>
+        <p:nvSpPr>
+          <p:cNvPr id="17" name="WVU DSPIRA university"/>
+          <p:cNvSpPr>
+            <a:spLocks noGrp="1"/>
+          </p:cNvSpPr>
+          <p:nvPr/>
+        </p:nvSpPr>
+        <p:spPr>
+          <a:xfrm>
+            <a:off x="9334500" y="114300"/>
+            <a:ext cx="2628900" cy="171450"/>
+          </a:xfrm>
+          <a:prstGeom prst="rect">
+            <a:avLst/>
+          </a:prstGeom>
+          <a:noFill/>
+          <a:ln w="0">
+            <a:noFill/>
+          </a:ln>
+        </p:spPr>
+        <p:txBody>
+          <a:bodyPr>
+            <a:noAutofit/>
+          </a:bodyPr>
+          <a:lstStyle/>
+          <a:p>
+            <a:pPr algn="r">
+              <a:defRPr sz="900">
+                <a:solidFill>
+                  <a:srgbClr val="FFFFFF"/>
+                </a:solidFill>
+                <a:latin typeface="Arial"/>
+                <a:ea typeface="Arial"/>
+                <a:cs typeface="Arial"/>
+              </a:defRPr>
+            </a:pPr>
+            <a:r>
+              <a:rPr sz="900">
+                <a:solidFill>
+                  <a:srgbClr val="FFFFFF"/>
+                </a:solidFill>
+                <a:latin typeface="Arial"/>
+                <a:ea typeface="Arial"/>
+                <a:cs typeface="Arial"/>
+              </a:rPr>
+              <a:t>WEST VIRGINIA UNIVERSITY</a:t>
             </a:r>
           </a:p>
         </p:txBody>
@@ -7316,7 +7391,7 @@
       </p:sp>
       <p:sp>
         <p:nvSpPr>
-          <p:cNvPr id="11" name="DSPIRA 1"/>
+          <p:cNvPr id="12" name="DSPIRA 2"/>
           <p:cNvSpPr>
             <a:spLocks noGrp="1"/>
           </p:cNvSpPr>
@@ -7324,7 +7399,7 @@
         </p:nvSpPr>
         <p:spPr>
           <a:xfrm>
-            <a:off x="0" y="0"/>
+            <a:off x="0" y="7200900"/>
             <a:ext cx="12192000" cy="342900"/>
           </a:xfrm>
           <a:prstGeom prst="rect">
@@ -7337,81 +7412,6 @@
             <a:noFill/>
           </a:ln>
         </p:spPr>
-      </p:sp>
-      <p:sp>
-        <p:nvSpPr>
-          <p:cNvPr id="12" name="DSPIRA 2"/>
-          <p:cNvSpPr>
-            <a:spLocks noGrp="1"/>
-          </p:cNvSpPr>
-          <p:nvPr/>
-        </p:nvSpPr>
-        <p:spPr>
-          <a:xfrm>
-            <a:off x="0" y="7200900"/>
-            <a:ext cx="12192000" cy="342900"/>
-          </a:xfrm>
-          <a:prstGeom prst="rect">
-            <a:avLst/>
-          </a:prstGeom>
-          <a:solidFill>
-            <a:srgbClr val="FFFFFF"/>
-          </a:solidFill>
-          <a:ln w="0">
-            <a:noFill/>
-          </a:ln>
-        </p:spPr>
-      </p:sp>
-      <p:sp>
-        <p:nvSpPr>
-          <p:cNvPr id="13" name="DSPIRA 3"/>
-          <p:cNvSpPr>
-            <a:spLocks noGrp="1"/>
-          </p:cNvSpPr>
-          <p:nvPr/>
-        </p:nvSpPr>
-        <p:spPr>
-          <a:xfrm>
-            <a:off x="228600" y="76200"/>
-            <a:ext cx="4762500" cy="228600"/>
-          </a:xfrm>
-          <a:prstGeom prst="rect">
-            <a:avLst/>
-          </a:prstGeom>
-          <a:noFill/>
-          <a:ln w="0">
-            <a:noFill/>
-          </a:ln>
-        </p:spPr>
-        <p:txBody>
-          <a:bodyPr>
-            <a:noAutofit/>
-          </a:bodyPr>
-          <a:lstStyle/>
-          <a:p>
-            <a:pPr>
-              <a:defRPr sz="1200" b="1">
-                <a:solidFill>
-                  <a:srgbClr val="002855"/>
-                </a:solidFill>
-                <a:latin typeface="Arial"/>
-                <a:ea typeface="Arial"/>
-                <a:cs typeface="Arial"/>
-              </a:defRPr>
-            </a:pPr>
-            <a:r>
-              <a:rPr sz="1200" b="1">
-                <a:solidFill>
-                  <a:srgbClr val="002855"/>
-                </a:solidFill>
-                <a:latin typeface="Arial"/>
-                <a:ea typeface="Arial"/>
-                <a:cs typeface="Arial"/>
-              </a:rPr>
-              <a:t>WVU DSPIRA</a:t>
-            </a:r>
-          </a:p>
-        </p:txBody>
       </p:sp>
       <p:sp>
         <p:nvSpPr>
@@ -7511,6 +7511,156 @@
                 <a:cs typeface="Arial"/>
               </a:rPr>
               <a:t>10 of 12</a:t>
+            </a:r>
+          </a:p>
+        </p:txBody>
+      </p:sp>
+      <p:sp>
+        <p:nvSpPr>
+          <p:cNvPr id="16" name="WVU DSPIRA navy band"/>
+          <p:cNvSpPr>
+            <a:spLocks noGrp="1"/>
+          </p:cNvSpPr>
+          <p:nvPr/>
+        </p:nvSpPr>
+        <p:spPr>
+          <a:xfrm>
+            <a:off x="0" y="0"/>
+            <a:ext cx="12192000" cy="323850"/>
+          </a:xfrm>
+          <a:prstGeom prst="rect">
+            <a:avLst/>
+          </a:prstGeom>
+          <a:solidFill>
+            <a:srgbClr val="002855"/>
+          </a:solidFill>
+          <a:ln w="0">
+            <a:noFill/>
+          </a:ln>
+        </p:spPr>
+      </p:sp>
+      <p:sp>
+        <p:nvSpPr>
+          <p:cNvPr id="17" name="WVU DSPIRA gold rule"/>
+          <p:cNvSpPr>
+            <a:spLocks noGrp="1"/>
+          </p:cNvSpPr>
+          <p:nvPr/>
+        </p:nvSpPr>
+        <p:spPr>
+          <a:xfrm>
+            <a:off x="0" y="323850"/>
+            <a:ext cx="12192000" cy="19050"/>
+          </a:xfrm>
+          <a:prstGeom prst="rect">
+            <a:avLst/>
+          </a:prstGeom>
+          <a:solidFill>
+            <a:srgbClr val="EEAA00"/>
+          </a:solidFill>
+          <a:ln w="0">
+            <a:noFill/>
+          </a:ln>
+        </p:spPr>
+      </p:sp>
+      <p:sp>
+        <p:nvSpPr>
+          <p:cNvPr id="18" name="WVU DSPIRA name"/>
+          <p:cNvSpPr>
+            <a:spLocks noGrp="1"/>
+          </p:cNvSpPr>
+          <p:nvPr/>
+        </p:nvSpPr>
+        <p:spPr>
+          <a:xfrm>
+            <a:off x="228600" y="19050"/>
+            <a:ext cx="2857500" cy="257175"/>
+          </a:xfrm>
+          <a:prstGeom prst="rect">
+            <a:avLst/>
+          </a:prstGeom>
+          <a:noFill/>
+          <a:ln w="0">
+            <a:noFill/>
+          </a:ln>
+        </p:spPr>
+        <p:txBody>
+          <a:bodyPr>
+            <a:noAutofit/>
+          </a:bodyPr>
+          <a:lstStyle/>
+          <a:p>
+            <a:pPr>
+              <a:defRPr sz="1600" b="1">
+                <a:solidFill>
+                  <a:srgbClr val="FFFFFF"/>
+                </a:solidFill>
+                <a:latin typeface="Arial"/>
+                <a:ea typeface="Arial"/>
+                <a:cs typeface="Arial"/>
+              </a:defRPr>
+            </a:pPr>
+            <a:r>
+              <a:rPr sz="1600" b="1">
+                <a:solidFill>
+                  <a:srgbClr val="FFFFFF"/>
+                </a:solidFill>
+                <a:latin typeface="Arial"/>
+                <a:ea typeface="Arial"/>
+                <a:cs typeface="Arial"/>
+              </a:rPr>
+              <a:t>WVU DSPIRA</a:t>
+            </a:r>
+          </a:p>
+        </p:txBody>
+      </p:sp>
+      <p:sp>
+        <p:nvSpPr>
+          <p:cNvPr id="19" name="WVU DSPIRA university"/>
+          <p:cNvSpPr>
+            <a:spLocks noGrp="1"/>
+          </p:cNvSpPr>
+          <p:nvPr/>
+        </p:nvSpPr>
+        <p:spPr>
+          <a:xfrm>
+            <a:off x="9334500" y="114300"/>
+            <a:ext cx="2628900" cy="171450"/>
+          </a:xfrm>
+          <a:prstGeom prst="rect">
+            <a:avLst/>
+          </a:prstGeom>
+          <a:noFill/>
+          <a:ln w="0">
+            <a:noFill/>
+          </a:ln>
+        </p:spPr>
+        <p:txBody>
+          <a:bodyPr>
+            <a:noAutofit/>
+          </a:bodyPr>
+          <a:lstStyle/>
+          <a:p>
+            <a:pPr algn="r">
+              <a:defRPr sz="900">
+                <a:solidFill>
+                  <a:srgbClr val="FFFFFF"/>
+                </a:solidFill>
+                <a:latin typeface="Arial"/>
+                <a:ea typeface="Arial"/>
+                <a:cs typeface="Arial"/>
+              </a:defRPr>
+            </a:pPr>
+            <a:r>
+              <a:rPr sz="900">
+                <a:solidFill>
+                  <a:srgbClr val="FFFFFF"/>
+                </a:solidFill>
+                <a:latin typeface="Arial"/>
+                <a:ea typeface="Arial"/>
+                <a:cs typeface="Arial"/>
+              </a:rPr>
+              <a:t>WEST VIRGINIA UNIVERSITY</a:t>
             </a:r>
           </a:p>
         </p:txBody>
@@ -7690,7 +7840,7 @@
       </p:sp>
       <p:sp>
         <p:nvSpPr>
-          <p:cNvPr id="11" name="DSPIRA 1"/>
+          <p:cNvPr id="12" name="DSPIRA 2"/>
           <p:cNvSpPr>
             <a:spLocks noGrp="1"/>
           </p:cNvSpPr>
@@ -7698,7 +7848,7 @@
         </p:nvSpPr>
         <p:spPr>
           <a:xfrm>
-            <a:off x="0" y="0"/>
+            <a:off x="0" y="7200900"/>
             <a:ext cx="12192000" cy="342900"/>
           </a:xfrm>
           <a:prstGeom prst="rect">
@@ -7711,81 +7861,6 @@
             <a:noFill/>
           </a:ln>
         </p:spPr>
-      </p:sp>
-      <p:sp>
-        <p:nvSpPr>
-          <p:cNvPr id="12" name="DSPIRA 2"/>
-          <p:cNvSpPr>
-            <a:spLocks noGrp="1"/>
-          </p:cNvSpPr>
-          <p:nvPr/>
-        </p:nvSpPr>
-        <p:spPr>
-          <a:xfrm>
-            <a:off x="0" y="7200900"/>
-            <a:ext cx="12192000" cy="342900"/>
-          </a:xfrm>
-          <a:prstGeom prst="rect">
-            <a:avLst/>
-          </a:prstGeom>
-          <a:solidFill>
-            <a:srgbClr val="FFFFFF"/>
-          </a:solidFill>
-          <a:ln w="0">
-            <a:noFill/>
-          </a:ln>
-        </p:spPr>
-      </p:sp>
-      <p:sp>
-        <p:nvSpPr>
-          <p:cNvPr id="13" name="DSPIRA 3"/>
-          <p:cNvSpPr>
-            <a:spLocks noGrp="1"/>
-          </p:cNvSpPr>
-          <p:nvPr/>
-        </p:nvSpPr>
-        <p:spPr>
-          <a:xfrm>
-            <a:off x="228600" y="76200"/>
-            <a:ext cx="4762500" cy="228600"/>
-          </a:xfrm>
-          <a:prstGeom prst="rect">
-            <a:avLst/>
-          </a:prstGeom>
-          <a:noFill/>
-          <a:ln w="0">
-            <a:noFill/>
-          </a:ln>
-        </p:spPr>
-        <p:txBody>
-          <a:bodyPr>
-            <a:noAutofit/>
-          </a:bodyPr>
-          <a:lstStyle/>
-          <a:p>
-            <a:pPr>
-              <a:defRPr sz="1200" b="1">
-                <a:solidFill>
-                  <a:srgbClr val="002855"/>
-                </a:solidFill>
-                <a:latin typeface="Arial"/>
-                <a:ea typeface="Arial"/>
-                <a:cs typeface="Arial"/>
-              </a:defRPr>
-            </a:pPr>
-            <a:r>
-              <a:rPr sz="1200" b="1">
-                <a:solidFill>
-                  <a:srgbClr val="002855"/>
-                </a:solidFill>
-                <a:latin typeface="Arial"/>
-                <a:ea typeface="Arial"/>
-                <a:cs typeface="Arial"/>
-              </a:rPr>
-              <a:t>WVU DSPIRA</a:t>
-            </a:r>
-          </a:p>
-        </p:txBody>
       </p:sp>
       <p:sp>
         <p:nvSpPr>
@@ -7885,6 +7960,156 @@
                 <a:cs typeface="Arial"/>
               </a:rPr>
               <a:t>11 of 12</a:t>
+            </a:r>
+          </a:p>
+        </p:txBody>
+      </p:sp>
+      <p:sp>
+        <p:nvSpPr>
+          <p:cNvPr id="16" name="WVU DSPIRA navy band"/>
+          <p:cNvSpPr>
+            <a:spLocks noGrp="1"/>
+          </p:cNvSpPr>
+          <p:nvPr/>
+        </p:nvSpPr>
+        <p:spPr>
+          <a:xfrm>
+            <a:off x="0" y="0"/>
+            <a:ext cx="12192000" cy="323850"/>
+          </a:xfrm>
+          <a:prstGeom prst="rect">
+            <a:avLst/>
+          </a:prstGeom>
+          <a:solidFill>
+            <a:srgbClr val="002855"/>
+          </a:solidFill>
+          <a:ln w="0">
+            <a:noFill/>
+          </a:ln>
+        </p:spPr>
+      </p:sp>
+      <p:sp>
+        <p:nvSpPr>
+          <p:cNvPr id="17" name="WVU DSPIRA gold rule"/>
+          <p:cNvSpPr>
+            <a:spLocks noGrp="1"/>
+          </p:cNvSpPr>
+          <p:nvPr/>
+        </p:nvSpPr>
+        <p:spPr>
+          <a:xfrm>
+            <a:off x="0" y="323850"/>
+            <a:ext cx="12192000" cy="19050"/>
+          </a:xfrm>
+          <a:prstGeom prst="rect">
+            <a:avLst/>
+          </a:prstGeom>
+          <a:solidFill>
+            <a:srgbClr val="EEAA00"/>
+          </a:solidFill>
+          <a:ln w="0">
+            <a:noFill/>
+          </a:ln>
+        </p:spPr>
+      </p:sp>
+      <p:sp>
+        <p:nvSpPr>
+          <p:cNvPr id="18" name="WVU DSPIRA name"/>
+          <p:cNvSpPr>
+            <a:spLocks noGrp="1"/>
+          </p:cNvSpPr>
+          <p:nvPr/>
+        </p:nvSpPr>
+        <p:spPr>
+          <a:xfrm>
+            <a:off x="228600" y="19050"/>
+            <a:ext cx="2857500" cy="257175"/>
+          </a:xfrm>
+          <a:prstGeom prst="rect">
+            <a:avLst/>
+          </a:prstGeom>
+          <a:noFill/>
+          <a:ln w="0">
+            <a:noFill/>
+          </a:ln>
+        </p:spPr>
+        <p:txBody>
+          <a:bodyPr>
+            <a:noAutofit/>
+          </a:bodyPr>
+          <a:lstStyle/>
+          <a:p>
+            <a:pPr>
+              <a:defRPr sz="1600" b="1">
+                <a:solidFill>
+                  <a:srgbClr val="FFFFFF"/>
+                </a:solidFill>
+                <a:latin typeface="Arial"/>
+                <a:ea typeface="Arial"/>
+                <a:cs typeface="Arial"/>
+              </a:defRPr>
+            </a:pPr>
+            <a:r>
+              <a:rPr sz="1600" b="1">
+                <a:solidFill>
+                  <a:srgbClr val="FFFFFF"/>
+                </a:solidFill>
+                <a:latin typeface="Arial"/>
+                <a:ea typeface="Arial"/>
+                <a:cs typeface="Arial"/>
+              </a:rPr>
+              <a:t>WVU DSPIRA</a:t>
+            </a:r>
+          </a:p>
+        </p:txBody>
+      </p:sp>
+      <p:sp>
+        <p:nvSpPr>
+          <p:cNvPr id="19" name="WVU DSPIRA university"/>
+          <p:cNvSpPr>
+            <a:spLocks noGrp="1"/>
+          </p:cNvSpPr>
+          <p:nvPr/>
+        </p:nvSpPr>
+        <p:spPr>
+          <a:xfrm>
+            <a:off x="9334500" y="114300"/>
+            <a:ext cx="2628900" cy="171450"/>
+          </a:xfrm>
+          <a:prstGeom prst="rect">
+            <a:avLst/>
+          </a:prstGeom>
+          <a:noFill/>
+          <a:ln w="0">
+            <a:noFill/>
+          </a:ln>
+        </p:spPr>
+        <p:txBody>
+          <a:bodyPr>
+            <a:noAutofit/>
+          </a:bodyPr>
+          <a:lstStyle/>
+          <a:p>
+            <a:pPr algn="r">
+              <a:defRPr sz="900">
+                <a:solidFill>
+                  <a:srgbClr val="FFFFFF"/>
+                </a:solidFill>
+                <a:latin typeface="Arial"/>
+                <a:ea typeface="Arial"/>
+                <a:cs typeface="Arial"/>
+              </a:defRPr>
+            </a:pPr>
+            <a:r>
+              <a:rPr sz="900">
+                <a:solidFill>
+                  <a:srgbClr val="FFFFFF"/>
+                </a:solidFill>
+                <a:latin typeface="Arial"/>
+                <a:ea typeface="Arial"/>
+                <a:cs typeface="Arial"/>
+              </a:rPr>
+              <a:t>WEST VIRGINIA UNIVERSITY</a:t>
             </a:r>
           </a:p>
         </p:txBody>
@@ -8220,7 +8445,7 @@
       </p:graphicFrame>
       <p:sp>
         <p:nvSpPr>
-          <p:cNvPr id="18" name="DSPIRA 1"/>
+          <p:cNvPr id="19" name="DSPIRA 2"/>
           <p:cNvSpPr>
             <a:spLocks noGrp="1"/>
           </p:cNvSpPr>
@@ -8228,7 +8453,7 @@
         </p:nvSpPr>
         <p:spPr>
           <a:xfrm>
-            <a:off x="0" y="0"/>
+            <a:off x="0" y="7200900"/>
             <a:ext cx="12192000" cy="342900"/>
           </a:xfrm>
           <a:prstGeom prst="rect">
@@ -8241,81 +8466,6 @@
             <a:noFill/>
           </a:ln>
         </p:spPr>
-      </p:sp>
-      <p:sp>
-        <p:nvSpPr>
-          <p:cNvPr id="19" name="DSPIRA 2"/>
-          <p:cNvSpPr>
-            <a:spLocks noGrp="1"/>
-          </p:cNvSpPr>
-          <p:nvPr/>
-        </p:nvSpPr>
-        <p:spPr>
-          <a:xfrm>
-            <a:off x="0" y="7200900"/>
-            <a:ext cx="12192000" cy="342900"/>
-          </a:xfrm>
-          <a:prstGeom prst="rect">
-            <a:avLst/>
-          </a:prstGeom>
-          <a:solidFill>
-            <a:srgbClr val="FFFFFF"/>
-          </a:solidFill>
-          <a:ln w="0">
-            <a:noFill/>
-          </a:ln>
-        </p:spPr>
-      </p:sp>
-      <p:sp>
-        <p:nvSpPr>
-          <p:cNvPr id="20" name="DSPIRA 3"/>
-          <p:cNvSpPr>
-            <a:spLocks noGrp="1"/>
-          </p:cNvSpPr>
-          <p:nvPr/>
-        </p:nvSpPr>
-        <p:spPr>
-          <a:xfrm>
-            <a:off x="228600" y="76200"/>
-            <a:ext cx="4762500" cy="228600"/>
-          </a:xfrm>
-          <a:prstGeom prst="rect">
-            <a:avLst/>
-          </a:prstGeom>
-          <a:noFill/>
-          <a:ln w="0">
-            <a:noFill/>
-          </a:ln>
-        </p:spPr>
-        <p:txBody>
-          <a:bodyPr>
-            <a:noAutofit/>
-          </a:bodyPr>
-          <a:lstStyle/>
-          <a:p>
-            <a:pPr>
-              <a:defRPr sz="1200" b="1">
-                <a:solidFill>
-                  <a:srgbClr val="002855"/>
-                </a:solidFill>
-                <a:latin typeface="Arial"/>
-                <a:ea typeface="Arial"/>
-                <a:cs typeface="Arial"/>
-              </a:defRPr>
-            </a:pPr>
-            <a:r>
-              <a:rPr sz="1200" b="1">
-                <a:solidFill>
-                  <a:srgbClr val="002855"/>
-                </a:solidFill>
-                <a:latin typeface="Arial"/>
-                <a:ea typeface="Arial"/>
-                <a:cs typeface="Arial"/>
-              </a:rPr>
-              <a:t>WVU DSPIRA</a:t>
-            </a:r>
-          </a:p>
-        </p:txBody>
       </p:sp>
       <p:sp>
         <p:nvSpPr>
@@ -8415,6 +8565,156 @@
                 <a:cs typeface="Arial"/>
               </a:rPr>
               <a:t>12 of 12</a:t>
+            </a:r>
+          </a:p>
+        </p:txBody>
+      </p:sp>
+      <p:sp>
+        <p:nvSpPr>
+          <p:cNvPr id="23" name="WVU DSPIRA navy band"/>
+          <p:cNvSpPr>
+            <a:spLocks noGrp="1"/>
+          </p:cNvSpPr>
+          <p:nvPr/>
+        </p:nvSpPr>
+        <p:spPr>
+          <a:xfrm>
+            <a:off x="0" y="0"/>
+            <a:ext cx="12192000" cy="323850"/>
+          </a:xfrm>
+          <a:prstGeom prst="rect">
+            <a:avLst/>
+          </a:prstGeom>
+          <a:solidFill>
+            <a:srgbClr val="002855"/>
+          </a:solidFill>
+          <a:ln w="0">
+            <a:noFill/>
+          </a:ln>
+        </p:spPr>
+      </p:sp>
+      <p:sp>
+        <p:nvSpPr>
+          <p:cNvPr id="24" name="WVU DSPIRA gold rule"/>
+          <p:cNvSpPr>
+            <a:spLocks noGrp="1"/>
+          </p:cNvSpPr>
+          <p:nvPr/>
+        </p:nvSpPr>
+        <p:spPr>
+          <a:xfrm>
+            <a:off x="0" y="323850"/>
+            <a:ext cx="12192000" cy="19050"/>
+          </a:xfrm>
+          <a:prstGeom prst="rect">
+            <a:avLst/>
+          </a:prstGeom>
+          <a:solidFill>
+            <a:srgbClr val="EEAA00"/>
+          </a:solidFill>
+          <a:ln w="0">
+            <a:noFill/>
+          </a:ln>
+        </p:spPr>
+      </p:sp>
+      <p:sp>
+        <p:nvSpPr>
+          <p:cNvPr id="25" name="WVU DSPIRA name"/>
+          <p:cNvSpPr>
+            <a:spLocks noGrp="1"/>
+          </p:cNvSpPr>
+          <p:nvPr/>
+        </p:nvSpPr>
+        <p:spPr>
+          <a:xfrm>
+            <a:off x="228600" y="19050"/>
+            <a:ext cx="2857500" cy="257175"/>
+          </a:xfrm>
+          <a:prstGeom prst="rect">
+            <a:avLst/>
+          </a:prstGeom>
+          <a:noFill/>
+          <a:ln w="0">
+            <a:noFill/>
+          </a:ln>
+        </p:spPr>
+        <p:txBody>
+          <a:bodyPr>
+            <a:noAutofit/>
+          </a:bodyPr>
+          <a:lstStyle/>
+          <a:p>
+            <a:pPr>
+              <a:defRPr sz="1600" b="1">
+                <a:solidFill>
+                  <a:srgbClr val="FFFFFF"/>
+                </a:solidFill>
+                <a:latin typeface="Arial"/>
+                <a:ea typeface="Arial"/>
+                <a:cs typeface="Arial"/>
+              </a:defRPr>
+            </a:pPr>
+            <a:r>
+              <a:rPr sz="1600" b="1">
+                <a:solidFill>
+                  <a:srgbClr val="FFFFFF"/>
+                </a:solidFill>
+                <a:latin typeface="Arial"/>
+                <a:ea typeface="Arial"/>
+                <a:cs typeface="Arial"/>
+              </a:rPr>
+              <a:t>WVU DSPIRA</a:t>
+            </a:r>
+          </a:p>
+        </p:txBody>
+      </p:sp>
+      <p:sp>
+        <p:nvSpPr>
+          <p:cNvPr id="26" name="WVU DSPIRA university"/>
+          <p:cNvSpPr>
+            <a:spLocks noGrp="1"/>
+          </p:cNvSpPr>
+          <p:nvPr/>
+        </p:nvSpPr>
+        <p:spPr>
+          <a:xfrm>
+            <a:off x="9334500" y="114300"/>
+            <a:ext cx="2628900" cy="171450"/>
+          </a:xfrm>
+          <a:prstGeom prst="rect">
+            <a:avLst/>
+          </a:prstGeom>
+          <a:noFill/>
+          <a:ln w="0">
+            <a:noFill/>
+          </a:ln>
+        </p:spPr>
+        <p:txBody>
+          <a:bodyPr>
+            <a:noAutofit/>
+          </a:bodyPr>
+          <a:lstStyle/>
+          <a:p>
+            <a:pPr algn="r">
+              <a:defRPr sz="900">
+                <a:solidFill>
+                  <a:srgbClr val="FFFFFF"/>
+                </a:solidFill>
+                <a:latin typeface="Arial"/>
+                <a:ea typeface="Arial"/>
+                <a:cs typeface="Arial"/>
+              </a:defRPr>
+            </a:pPr>
+            <a:r>
+              <a:rPr sz="900">
+                <a:solidFill>
+                  <a:srgbClr val="FFFFFF"/>
+                </a:solidFill>
+                <a:latin typeface="Arial"/>
+                <a:ea typeface="Arial"/>
+                <a:cs typeface="Arial"/>
+              </a:rPr>
+              <a:t>WEST VIRGINIA UNIVERSITY</a:t>
             </a:r>
           </a:p>
         </p:txBody>
@@ -8681,7 +8981,7 @@
       </p:pic>
       <p:sp>
         <p:nvSpPr>
-          <p:cNvPr id="35" name="DSPIRA 1"/>
+          <p:cNvPr id="36" name="DSPIRA 2"/>
           <p:cNvSpPr>
             <a:spLocks noGrp="1"/>
           </p:cNvSpPr>
@@ -8689,7 +8989,7 @@
         </p:nvSpPr>
         <p:spPr>
           <a:xfrm>
-            <a:off x="0" y="0"/>
+            <a:off x="0" y="7200900"/>
             <a:ext cx="12192000" cy="342900"/>
           </a:xfrm>
           <a:prstGeom prst="rect">
@@ -8702,81 +9002,6 @@
             <a:noFill/>
           </a:ln>
         </p:spPr>
-      </p:sp>
-      <p:sp>
-        <p:nvSpPr>
-          <p:cNvPr id="36" name="DSPIRA 2"/>
-          <p:cNvSpPr>
-            <a:spLocks noGrp="1"/>
-          </p:cNvSpPr>
-          <p:nvPr/>
-        </p:nvSpPr>
-        <p:spPr>
-          <a:xfrm>
-            <a:off x="0" y="7200900"/>
-            <a:ext cx="12192000" cy="342900"/>
-          </a:xfrm>
-          <a:prstGeom prst="rect">
-            <a:avLst/>
-          </a:prstGeom>
-          <a:solidFill>
-            <a:srgbClr val="FFFFFF"/>
-          </a:solidFill>
-          <a:ln w="0">
-            <a:noFill/>
-          </a:ln>
-        </p:spPr>
-      </p:sp>
-      <p:sp>
-        <p:nvSpPr>
-          <p:cNvPr id="37" name="DSPIRA 3"/>
-          <p:cNvSpPr>
-            <a:spLocks noGrp="1"/>
-          </p:cNvSpPr>
-          <p:nvPr/>
-        </p:nvSpPr>
-        <p:spPr>
-          <a:xfrm>
-            <a:off x="228600" y="76200"/>
-            <a:ext cx="4762500" cy="228600"/>
-          </a:xfrm>
-          <a:prstGeom prst="rect">
-            <a:avLst/>
-          </a:prstGeom>
-          <a:noFill/>
-          <a:ln w="0">
-            <a:noFill/>
-          </a:ln>
-        </p:spPr>
-        <p:txBody>
-          <a:bodyPr>
-            <a:noAutofit/>
-          </a:bodyPr>
-          <a:lstStyle/>
-          <a:p>
-            <a:pPr>
-              <a:defRPr sz="1200" b="1">
-                <a:solidFill>
-                  <a:srgbClr val="002855"/>
-                </a:solidFill>
-                <a:latin typeface="Arial"/>
-                <a:ea typeface="Arial"/>
-                <a:cs typeface="Arial"/>
-              </a:defRPr>
-            </a:pPr>
-            <a:r>
-              <a:rPr sz="1200" b="1">
-                <a:solidFill>
-                  <a:srgbClr val="002855"/>
-                </a:solidFill>
-                <a:latin typeface="Arial"/>
-                <a:ea typeface="Arial"/>
-                <a:cs typeface="Arial"/>
-              </a:rPr>
-              <a:t>WVU DSPIRA</a:t>
-            </a:r>
-          </a:p>
-        </p:txBody>
       </p:sp>
       <p:sp>
         <p:nvSpPr>
@@ -8876,6 +9101,156 @@
                 <a:cs typeface="Arial"/>
               </a:rPr>
               <a:t>2 of 12</a:t>
+            </a:r>
+          </a:p>
+        </p:txBody>
+      </p:sp>
+      <p:sp>
+        <p:nvSpPr>
+          <p:cNvPr id="40" name="WVU DSPIRA navy band"/>
+          <p:cNvSpPr>
+            <a:spLocks noGrp="1"/>
+          </p:cNvSpPr>
+          <p:nvPr/>
+        </p:nvSpPr>
+        <p:spPr>
+          <a:xfrm>
+            <a:off x="0" y="0"/>
+            <a:ext cx="12192000" cy="323850"/>
+          </a:xfrm>
+          <a:prstGeom prst="rect">
+            <a:avLst/>
+          </a:prstGeom>
+          <a:solidFill>
+            <a:srgbClr val="002855"/>
+          </a:solidFill>
+          <a:ln w="0">
+            <a:noFill/>
+          </a:ln>
+        </p:spPr>
+      </p:sp>
+      <p:sp>
+        <p:nvSpPr>
+          <p:cNvPr id="41" name="WVU DSPIRA gold rule"/>
+          <p:cNvSpPr>
+            <a:spLocks noGrp="1"/>
+          </p:cNvSpPr>
+          <p:nvPr/>
+        </p:nvSpPr>
+        <p:spPr>
+          <a:xfrm>
+            <a:off x="0" y="323850"/>
+            <a:ext cx="12192000" cy="19050"/>
+          </a:xfrm>
+          <a:prstGeom prst="rect">
+            <a:avLst/>
+          </a:prstGeom>
+          <a:solidFill>
+            <a:srgbClr val="EEAA00"/>
+          </a:solidFill>
+          <a:ln w="0">
+            <a:noFill/>
+          </a:ln>
+        </p:spPr>
+      </p:sp>
+      <p:sp>
+        <p:nvSpPr>
+          <p:cNvPr id="42" name="WVU DSPIRA name"/>
+          <p:cNvSpPr>
+            <a:spLocks noGrp="1"/>
+          </p:cNvSpPr>
+          <p:nvPr/>
+        </p:nvSpPr>
+        <p:spPr>
+          <a:xfrm>
+            <a:off x="228600" y="19050"/>
+            <a:ext cx="2857500" cy="257175"/>
+          </a:xfrm>
+          <a:prstGeom prst="rect">
+            <a:avLst/>
+          </a:prstGeom>
+          <a:noFill/>
+          <a:ln w="0">
+            <a:noFill/>
+          </a:ln>
+        </p:spPr>
+        <p:txBody>
+          <a:bodyPr>
+            <a:noAutofit/>
+          </a:bodyPr>
+          <a:lstStyle/>
+          <a:p>
+            <a:pPr>
+              <a:defRPr sz="1600" b="1">
+                <a:solidFill>
+                  <a:srgbClr val="FFFFFF"/>
+                </a:solidFill>
+                <a:latin typeface="Arial"/>
+                <a:ea typeface="Arial"/>
+                <a:cs typeface="Arial"/>
+              </a:defRPr>
+            </a:pPr>
+            <a:r>
+              <a:rPr sz="1600" b="1">
+                <a:solidFill>
+                  <a:srgbClr val="FFFFFF"/>
+                </a:solidFill>
+                <a:latin typeface="Arial"/>
+                <a:ea typeface="Arial"/>
+                <a:cs typeface="Arial"/>
+              </a:rPr>
+              <a:t>WVU DSPIRA</a:t>
+            </a:r>
+          </a:p>
+        </p:txBody>
+      </p:sp>
+      <p:sp>
+        <p:nvSpPr>
+          <p:cNvPr id="43" name="WVU DSPIRA university"/>
+          <p:cNvSpPr>
+            <a:spLocks noGrp="1"/>
+          </p:cNvSpPr>
+          <p:nvPr/>
+        </p:nvSpPr>
+        <p:spPr>
+          <a:xfrm>
+            <a:off x="9334500" y="114300"/>
+            <a:ext cx="2628900" cy="171450"/>
+          </a:xfrm>
+          <a:prstGeom prst="rect">
+            <a:avLst/>
+          </a:prstGeom>
+          <a:noFill/>
+          <a:ln w="0">
+            <a:noFill/>
+          </a:ln>
+        </p:spPr>
+        <p:txBody>
+          <a:bodyPr>
+            <a:noAutofit/>
+          </a:bodyPr>
+          <a:lstStyle/>
+          <a:p>
+            <a:pPr algn="r">
+              <a:defRPr sz="900">
+                <a:solidFill>
+                  <a:srgbClr val="FFFFFF"/>
+                </a:solidFill>
+                <a:latin typeface="Arial"/>
+                <a:ea typeface="Arial"/>
+                <a:cs typeface="Arial"/>
+              </a:defRPr>
+            </a:pPr>
+            <a:r>
+              <a:rPr sz="900">
+                <a:solidFill>
+                  <a:srgbClr val="FFFFFF"/>
+                </a:solidFill>
+                <a:latin typeface="Arial"/>
+                <a:ea typeface="Arial"/>
+                <a:cs typeface="Arial"/>
+              </a:rPr>
+              <a:t>WEST VIRGINIA UNIVERSITY</a:t>
             </a:r>
           </a:p>
         </p:txBody>
@@ -9412,7 +9787,7 @@
       </p:sp>
       <p:sp>
         <p:nvSpPr>
-          <p:cNvPr id="15" name="DSPIRA 1"/>
+          <p:cNvPr id="16" name="DSPIRA 2"/>
           <p:cNvSpPr>
             <a:spLocks noGrp="1"/>
           </p:cNvSpPr>
@@ -9420,7 +9795,7 @@
         </p:nvSpPr>
         <p:spPr>
           <a:xfrm>
-            <a:off x="0" y="0"/>
+            <a:off x="0" y="7200900"/>
             <a:ext cx="12192000" cy="342900"/>
           </a:xfrm>
           <a:prstGeom prst="rect">
@@ -9433,81 +9808,6 @@
             <a:noFill/>
           </a:ln>
         </p:spPr>
-      </p:sp>
-      <p:sp>
-        <p:nvSpPr>
-          <p:cNvPr id="16" name="DSPIRA 2"/>
-          <p:cNvSpPr>
-            <a:spLocks noGrp="1"/>
-          </p:cNvSpPr>
-          <p:nvPr/>
-        </p:nvSpPr>
-        <p:spPr>
-          <a:xfrm>
-            <a:off x="0" y="7200900"/>
-            <a:ext cx="12192000" cy="342900"/>
-          </a:xfrm>
-          <a:prstGeom prst="rect">
-            <a:avLst/>
-          </a:prstGeom>
-          <a:solidFill>
-            <a:srgbClr val="FFFFFF"/>
-          </a:solidFill>
-          <a:ln w="0">
-            <a:noFill/>
-          </a:ln>
-        </p:spPr>
-      </p:sp>
-      <p:sp>
-        <p:nvSpPr>
-          <p:cNvPr id="17" name="DSPIRA 3"/>
-          <p:cNvSpPr>
-            <a:spLocks noGrp="1"/>
-          </p:cNvSpPr>
-          <p:nvPr/>
-        </p:nvSpPr>
-        <p:spPr>
-          <a:xfrm>
-            <a:off x="228600" y="76200"/>
-            <a:ext cx="4762500" cy="228600"/>
-          </a:xfrm>
-          <a:prstGeom prst="rect">
-            <a:avLst/>
-          </a:prstGeom>
-          <a:noFill/>
-          <a:ln w="0">
-            <a:noFill/>
-          </a:ln>
-        </p:spPr>
-        <p:txBody>
-          <a:bodyPr>
-            <a:noAutofit/>
-          </a:bodyPr>
-          <a:lstStyle/>
-          <a:p>
-            <a:pPr>
-              <a:defRPr sz="1200" b="1">
-                <a:solidFill>
-                  <a:srgbClr val="002855"/>
-                </a:solidFill>
-                <a:latin typeface="Arial"/>
-                <a:ea typeface="Arial"/>
-                <a:cs typeface="Arial"/>
-              </a:defRPr>
-            </a:pPr>
-            <a:r>
-              <a:rPr sz="1200" b="1">
-                <a:solidFill>
-                  <a:srgbClr val="002855"/>
-                </a:solidFill>
-                <a:latin typeface="Arial"/>
-                <a:ea typeface="Arial"/>
-                <a:cs typeface="Arial"/>
-              </a:rPr>
-              <a:t>WVU DSPIRA</a:t>
-            </a:r>
-          </a:p>
-        </p:txBody>
       </p:sp>
       <p:sp>
         <p:nvSpPr>
@@ -9607,6 +9907,156 @@
                 <a:cs typeface="Arial"/>
               </a:rPr>
               <a:t>3 of 12</a:t>
+            </a:r>
+          </a:p>
+        </p:txBody>
+      </p:sp>
+      <p:sp>
+        <p:nvSpPr>
+          <p:cNvPr id="20" name="WVU DSPIRA navy band"/>
+          <p:cNvSpPr>
+            <a:spLocks noGrp="1"/>
+          </p:cNvSpPr>
+          <p:nvPr/>
+        </p:nvSpPr>
+        <p:spPr>
+          <a:xfrm>
+            <a:off x="0" y="0"/>
+            <a:ext cx="12192000" cy="323850"/>
+          </a:xfrm>
+          <a:prstGeom prst="rect">
+            <a:avLst/>
+          </a:prstGeom>
+          <a:solidFill>
+            <a:srgbClr val="002855"/>
+          </a:solidFill>
+          <a:ln w="0">
+            <a:noFill/>
+          </a:ln>
+        </p:spPr>
+      </p:sp>
+      <p:sp>
+        <p:nvSpPr>
+          <p:cNvPr id="21" name="WVU DSPIRA gold rule"/>
+          <p:cNvSpPr>
+            <a:spLocks noGrp="1"/>
+          </p:cNvSpPr>
+          <p:nvPr/>
+        </p:nvSpPr>
+        <p:spPr>
+          <a:xfrm>
+            <a:off x="0" y="323850"/>
+            <a:ext cx="12192000" cy="19050"/>
+          </a:xfrm>
+          <a:prstGeom prst="rect">
+            <a:avLst/>
+          </a:prstGeom>
+          <a:solidFill>
+            <a:srgbClr val="EEAA00"/>
+          </a:solidFill>
+          <a:ln w="0">
+            <a:noFill/>
+          </a:ln>
+        </p:spPr>
+      </p:sp>
+      <p:sp>
+        <p:nvSpPr>
+          <p:cNvPr id="22" name="WVU DSPIRA name"/>
+          <p:cNvSpPr>
+            <a:spLocks noGrp="1"/>
+          </p:cNvSpPr>
+          <p:nvPr/>
+        </p:nvSpPr>
+        <p:spPr>
+          <a:xfrm>
+            <a:off x="228600" y="19050"/>
+            <a:ext cx="2857500" cy="257175"/>
+          </a:xfrm>
+          <a:prstGeom prst="rect">
+            <a:avLst/>
+          </a:prstGeom>
+          <a:noFill/>
+          <a:ln w="0">
+            <a:noFill/>
+          </a:ln>
+        </p:spPr>
+        <p:txBody>
+          <a:bodyPr>
+            <a:noAutofit/>
+          </a:bodyPr>
+          <a:lstStyle/>
+          <a:p>
+            <a:pPr>
+              <a:defRPr sz="1600" b="1">
+                <a:solidFill>
+                  <a:srgbClr val="FFFFFF"/>
+                </a:solidFill>
+                <a:latin typeface="Arial"/>
+                <a:ea typeface="Arial"/>
+                <a:cs typeface="Arial"/>
+              </a:defRPr>
+            </a:pPr>
+            <a:r>
+              <a:rPr sz="1600" b="1">
+                <a:solidFill>
+                  <a:srgbClr val="FFFFFF"/>
+                </a:solidFill>
+                <a:latin typeface="Arial"/>
+                <a:ea typeface="Arial"/>
+                <a:cs typeface="Arial"/>
+              </a:rPr>
+              <a:t>WVU DSPIRA</a:t>
+            </a:r>
+          </a:p>
+        </p:txBody>
+      </p:sp>
+      <p:sp>
+        <p:nvSpPr>
+          <p:cNvPr id="23" name="WVU DSPIRA university"/>
+          <p:cNvSpPr>
+            <a:spLocks noGrp="1"/>
+          </p:cNvSpPr>
+          <p:nvPr/>
+        </p:nvSpPr>
+        <p:spPr>
+          <a:xfrm>
+            <a:off x="9334500" y="114300"/>
+            <a:ext cx="2628900" cy="171450"/>
+          </a:xfrm>
+          <a:prstGeom prst="rect">
+            <a:avLst/>
+          </a:prstGeom>
+          <a:noFill/>
+          <a:ln w="0">
+            <a:noFill/>
+          </a:ln>
+        </p:spPr>
+        <p:txBody>
+          <a:bodyPr>
+            <a:noAutofit/>
+          </a:bodyPr>
+          <a:lstStyle/>
+          <a:p>
+            <a:pPr algn="r">
+              <a:defRPr sz="900">
+                <a:solidFill>
+                  <a:srgbClr val="FFFFFF"/>
+                </a:solidFill>
+                <a:latin typeface="Arial"/>
+                <a:ea typeface="Arial"/>
+                <a:cs typeface="Arial"/>
+              </a:defRPr>
+            </a:pPr>
+            <a:r>
+              <a:rPr sz="900">
+                <a:solidFill>
+                  <a:srgbClr val="FFFFFF"/>
+                </a:solidFill>
+                <a:latin typeface="Arial"/>
+                <a:ea typeface="Arial"/>
+                <a:cs typeface="Arial"/>
+              </a:rPr>
+              <a:t>WEST VIRGINIA UNIVERSITY</a:t>
             </a:r>
           </a:p>
         </p:txBody>
@@ -9835,7 +10285,7 @@
       </p:graphicFrame>
       <p:sp>
         <p:nvSpPr>
-          <p:cNvPr id="31" name="DSPIRA 1"/>
+          <p:cNvPr id="32" name="DSPIRA 2"/>
           <p:cNvSpPr>
             <a:spLocks noGrp="1"/>
           </p:cNvSpPr>
@@ -9843,7 +10293,7 @@
         </p:nvSpPr>
         <p:spPr>
           <a:xfrm>
-            <a:off x="0" y="0"/>
+            <a:off x="0" y="7200900"/>
             <a:ext cx="12192000" cy="342900"/>
           </a:xfrm>
           <a:prstGeom prst="rect">
@@ -9856,81 +10306,6 @@
             <a:noFill/>
           </a:ln>
         </p:spPr>
-      </p:sp>
-      <p:sp>
-        <p:nvSpPr>
-          <p:cNvPr id="32" name="DSPIRA 2"/>
-          <p:cNvSpPr>
-            <a:spLocks noGrp="1"/>
-          </p:cNvSpPr>
-          <p:nvPr/>
-        </p:nvSpPr>
-        <p:spPr>
-          <a:xfrm>
-            <a:off x="0" y="7200900"/>
-            <a:ext cx="12192000" cy="342900"/>
-          </a:xfrm>
-          <a:prstGeom prst="rect">
-            <a:avLst/>
-          </a:prstGeom>
-          <a:solidFill>
-            <a:srgbClr val="FFFFFF"/>
-          </a:solidFill>
-          <a:ln w="0">
-            <a:noFill/>
-          </a:ln>
-        </p:spPr>
-      </p:sp>
-      <p:sp>
-        <p:nvSpPr>
-          <p:cNvPr id="33" name="DSPIRA 3"/>
-          <p:cNvSpPr>
-            <a:spLocks noGrp="1"/>
-          </p:cNvSpPr>
-          <p:nvPr/>
-        </p:nvSpPr>
-        <p:spPr>
-          <a:xfrm>
-            <a:off x="228600" y="76200"/>
-            <a:ext cx="4762500" cy="228600"/>
-          </a:xfrm>
-          <a:prstGeom prst="rect">
-            <a:avLst/>
-          </a:prstGeom>
-          <a:noFill/>
-          <a:ln w="0">
-            <a:noFill/>
-          </a:ln>
-        </p:spPr>
-        <p:txBody>
-          <a:bodyPr>
-            <a:noAutofit/>
-          </a:bodyPr>
-          <a:lstStyle/>
-          <a:p>
-            <a:pPr>
-              <a:defRPr sz="1200" b="1">
-                <a:solidFill>
-                  <a:srgbClr val="002855"/>
-                </a:solidFill>
-                <a:latin typeface="Arial"/>
-                <a:ea typeface="Arial"/>
-                <a:cs typeface="Arial"/>
-              </a:defRPr>
-            </a:pPr>
-            <a:r>
-              <a:rPr sz="1200" b="1">
-                <a:solidFill>
-                  <a:srgbClr val="002855"/>
-                </a:solidFill>
-                <a:latin typeface="Arial"/>
-                <a:ea typeface="Arial"/>
-                <a:cs typeface="Arial"/>
-              </a:rPr>
-              <a:t>WVU DSPIRA</a:t>
-            </a:r>
-          </a:p>
-        </p:txBody>
       </p:sp>
       <p:sp>
         <p:nvSpPr>
@@ -10030,6 +10405,156 @@
                 <a:cs typeface="Arial"/>
               </a:rPr>
               <a:t>4 of 12</a:t>
+            </a:r>
+          </a:p>
+        </p:txBody>
+      </p:sp>
+      <p:sp>
+        <p:nvSpPr>
+          <p:cNvPr id="36" name="WVU DSPIRA navy band"/>
+          <p:cNvSpPr>
+            <a:spLocks noGrp="1"/>
+          </p:cNvSpPr>
+          <p:nvPr/>
+        </p:nvSpPr>
+        <p:spPr>
+          <a:xfrm>
+            <a:off x="0" y="0"/>
+            <a:ext cx="12192000" cy="323850"/>
+          </a:xfrm>
+          <a:prstGeom prst="rect">
+            <a:avLst/>
+          </a:prstGeom>
+          <a:solidFill>
+            <a:srgbClr val="002855"/>
+          </a:solidFill>
+          <a:ln w="0">
+            <a:noFill/>
+          </a:ln>
+        </p:spPr>
+      </p:sp>
+      <p:sp>
+        <p:nvSpPr>
+          <p:cNvPr id="37" name="WVU DSPIRA gold rule"/>
+          <p:cNvSpPr>
+            <a:spLocks noGrp="1"/>
+          </p:cNvSpPr>
+          <p:nvPr/>
+        </p:nvSpPr>
+        <p:spPr>
+          <a:xfrm>
+            <a:off x="0" y="323850"/>
+            <a:ext cx="12192000" cy="19050"/>
+          </a:xfrm>
+          <a:prstGeom prst="rect">
+            <a:avLst/>
+          </a:prstGeom>
+          <a:solidFill>
+            <a:srgbClr val="EEAA00"/>
+          </a:solidFill>
+          <a:ln w="0">
+            <a:noFill/>
+          </a:ln>
+        </p:spPr>
+      </p:sp>
+      <p:sp>
+        <p:nvSpPr>
+          <p:cNvPr id="38" name="WVU DSPIRA name"/>
+          <p:cNvSpPr>
+            <a:spLocks noGrp="1"/>
+          </p:cNvSpPr>
+          <p:nvPr/>
+        </p:nvSpPr>
+        <p:spPr>
+          <a:xfrm>
+            <a:off x="228600" y="19050"/>
+            <a:ext cx="2857500" cy="257175"/>
+          </a:xfrm>
+          <a:prstGeom prst="rect">
+            <a:avLst/>
+          </a:prstGeom>
+          <a:noFill/>
+          <a:ln w="0">
+            <a:noFill/>
+          </a:ln>
+        </p:spPr>
+        <p:txBody>
+          <a:bodyPr>
+            <a:noAutofit/>
+          </a:bodyPr>
+          <a:lstStyle/>
+          <a:p>
+            <a:pPr>
+              <a:defRPr sz="1600" b="1">
+                <a:solidFill>
+                  <a:srgbClr val="FFFFFF"/>
+                </a:solidFill>
+                <a:latin typeface="Arial"/>
+                <a:ea typeface="Arial"/>
+                <a:cs typeface="Arial"/>
+              </a:defRPr>
+            </a:pPr>
+            <a:r>
+              <a:rPr sz="1600" b="1">
+                <a:solidFill>
+                  <a:srgbClr val="FFFFFF"/>
+                </a:solidFill>
+                <a:latin typeface="Arial"/>
+                <a:ea typeface="Arial"/>
+                <a:cs typeface="Arial"/>
+              </a:rPr>
+              <a:t>WVU DSPIRA</a:t>
+            </a:r>
+          </a:p>
+        </p:txBody>
+      </p:sp>
+      <p:sp>
+        <p:nvSpPr>
+          <p:cNvPr id="39" name="WVU DSPIRA university"/>
+          <p:cNvSpPr>
+            <a:spLocks noGrp="1"/>
+          </p:cNvSpPr>
+          <p:nvPr/>
+        </p:nvSpPr>
+        <p:spPr>
+          <a:xfrm>
+            <a:off x="9334500" y="114300"/>
+            <a:ext cx="2628900" cy="171450"/>
+          </a:xfrm>
+          <a:prstGeom prst="rect">
+            <a:avLst/>
+          </a:prstGeom>
+          <a:noFill/>
+          <a:ln w="0">
+            <a:noFill/>
+          </a:ln>
+        </p:spPr>
+        <p:txBody>
+          <a:bodyPr>
+            <a:noAutofit/>
+          </a:bodyPr>
+          <a:lstStyle/>
+          <a:p>
+            <a:pPr algn="r">
+              <a:defRPr sz="900">
+                <a:solidFill>
+                  <a:srgbClr val="FFFFFF"/>
+                </a:solidFill>
+                <a:latin typeface="Arial"/>
+                <a:ea typeface="Arial"/>
+                <a:cs typeface="Arial"/>
+              </a:defRPr>
+            </a:pPr>
+            <a:r>
+              <a:rPr sz="900">
+                <a:solidFill>
+                  <a:srgbClr val="FFFFFF"/>
+                </a:solidFill>
+                <a:latin typeface="Arial"/>
+                <a:ea typeface="Arial"/>
+                <a:cs typeface="Arial"/>
+              </a:rPr>
+              <a:t>WEST VIRGINIA UNIVERSITY</a:t>
             </a:r>
           </a:p>
         </p:txBody>
@@ -10393,7 +10918,7 @@
       </p:sp>
       <p:sp>
         <p:nvSpPr>
-          <p:cNvPr id="32" name="DSPIRA 1"/>
+          <p:cNvPr id="33" name="DSPIRA 2"/>
           <p:cNvSpPr>
             <a:spLocks noGrp="1"/>
           </p:cNvSpPr>
@@ -10401,7 +10926,7 @@
         </p:nvSpPr>
         <p:spPr>
           <a:xfrm>
-            <a:off x="0" y="0"/>
+            <a:off x="0" y="7200900"/>
             <a:ext cx="12192000" cy="342900"/>
           </a:xfrm>
           <a:prstGeom prst="rect">
@@ -10414,81 +10939,6 @@
             <a:noFill/>
           </a:ln>
         </p:spPr>
-      </p:sp>
-      <p:sp>
-        <p:nvSpPr>
-          <p:cNvPr id="33" name="DSPIRA 2"/>
-          <p:cNvSpPr>
-            <a:spLocks noGrp="1"/>
-          </p:cNvSpPr>
-          <p:nvPr/>
-        </p:nvSpPr>
-        <p:spPr>
-          <a:xfrm>
-            <a:off x="0" y="7200900"/>
-            <a:ext cx="12192000" cy="342900"/>
-          </a:xfrm>
-          <a:prstGeom prst="rect">
-            <a:avLst/>
-          </a:prstGeom>
-          <a:solidFill>
-            <a:srgbClr val="FFFFFF"/>
-          </a:solidFill>
-          <a:ln w="0">
-            <a:noFill/>
-          </a:ln>
-        </p:spPr>
-      </p:sp>
-      <p:sp>
-        <p:nvSpPr>
-          <p:cNvPr id="34" name="DSPIRA 3"/>
-          <p:cNvSpPr>
-            <a:spLocks noGrp="1"/>
-          </p:cNvSpPr>
-          <p:nvPr/>
-        </p:nvSpPr>
-        <p:spPr>
-          <a:xfrm>
-            <a:off x="228600" y="76200"/>
-            <a:ext cx="4762500" cy="228600"/>
-          </a:xfrm>
-          <a:prstGeom prst="rect">
-            <a:avLst/>
-          </a:prstGeom>
-          <a:noFill/>
-          <a:ln w="0">
-            <a:noFill/>
-          </a:ln>
-        </p:spPr>
-        <p:txBody>
-          <a:bodyPr>
-            <a:noAutofit/>
-          </a:bodyPr>
-          <a:lstStyle/>
-          <a:p>
-            <a:pPr>
-              <a:defRPr sz="1200" b="1">
-                <a:solidFill>
-                  <a:srgbClr val="002855"/>
-                </a:solidFill>
-                <a:latin typeface="Arial"/>
-                <a:ea typeface="Arial"/>
-                <a:cs typeface="Arial"/>
-              </a:defRPr>
-            </a:pPr>
-            <a:r>
-              <a:rPr sz="1200" b="1">
-                <a:solidFill>
-                  <a:srgbClr val="002855"/>
-                </a:solidFill>
-                <a:latin typeface="Arial"/>
-                <a:ea typeface="Arial"/>
-                <a:cs typeface="Arial"/>
-              </a:rPr>
-              <a:t>WVU DSPIRA</a:t>
-            </a:r>
-          </a:p>
-        </p:txBody>
       </p:sp>
       <p:sp>
         <p:nvSpPr>
@@ -10588,6 +11038,156 @@
                 <a:cs typeface="Arial"/>
               </a:rPr>
               <a:t>5 of 12</a:t>
+            </a:r>
+          </a:p>
+        </p:txBody>
+      </p:sp>
+      <p:sp>
+        <p:nvSpPr>
+          <p:cNvPr id="37" name="WVU DSPIRA navy band"/>
+          <p:cNvSpPr>
+            <a:spLocks noGrp="1"/>
+          </p:cNvSpPr>
+          <p:nvPr/>
+        </p:nvSpPr>
+        <p:spPr>
+          <a:xfrm>
+            <a:off x="0" y="0"/>
+            <a:ext cx="12192000" cy="323850"/>
+          </a:xfrm>
+          <a:prstGeom prst="rect">
+            <a:avLst/>
+          </a:prstGeom>
+          <a:solidFill>
+            <a:srgbClr val="002855"/>
+          </a:solidFill>
+          <a:ln w="0">
+            <a:noFill/>
+          </a:ln>
+        </p:spPr>
+      </p:sp>
+      <p:sp>
+        <p:nvSpPr>
+          <p:cNvPr id="38" name="WVU DSPIRA gold rule"/>
+          <p:cNvSpPr>
+            <a:spLocks noGrp="1"/>
+          </p:cNvSpPr>
+          <p:nvPr/>
+        </p:nvSpPr>
+        <p:spPr>
+          <a:xfrm>
+            <a:off x="0" y="323850"/>
+            <a:ext cx="12192000" cy="19050"/>
+          </a:xfrm>
+          <a:prstGeom prst="rect">
+            <a:avLst/>
+          </a:prstGeom>
+          <a:solidFill>
+            <a:srgbClr val="EEAA00"/>
+          </a:solidFill>
+          <a:ln w="0">
+            <a:noFill/>
+          </a:ln>
+        </p:spPr>
+      </p:sp>
+      <p:sp>
+        <p:nvSpPr>
+          <p:cNvPr id="39" name="WVU DSPIRA name"/>
+          <p:cNvSpPr>
+            <a:spLocks noGrp="1"/>
+          </p:cNvSpPr>
+          <p:nvPr/>
+        </p:nvSpPr>
+        <p:spPr>
+          <a:xfrm>
+            <a:off x="228600" y="19050"/>
+            <a:ext cx="2857500" cy="257175"/>
+          </a:xfrm>
+          <a:prstGeom prst="rect">
+            <a:avLst/>
+          </a:prstGeom>
+          <a:noFill/>
+          <a:ln w="0">
+            <a:noFill/>
+          </a:ln>
+        </p:spPr>
+        <p:txBody>
+          <a:bodyPr>
+            <a:noAutofit/>
+          </a:bodyPr>
+          <a:lstStyle/>
+          <a:p>
+            <a:pPr>
+              <a:defRPr sz="1600" b="1">
+                <a:solidFill>
+                  <a:srgbClr val="FFFFFF"/>
+                </a:solidFill>
+                <a:latin typeface="Arial"/>
+                <a:ea typeface="Arial"/>
+                <a:cs typeface="Arial"/>
+              </a:defRPr>
+            </a:pPr>
+            <a:r>
+              <a:rPr sz="1600" b="1">
+                <a:solidFill>
+                  <a:srgbClr val="FFFFFF"/>
+                </a:solidFill>
+                <a:latin typeface="Arial"/>
+                <a:ea typeface="Arial"/>
+                <a:cs typeface="Arial"/>
+              </a:rPr>
+              <a:t>WVU DSPIRA</a:t>
+            </a:r>
+          </a:p>
+        </p:txBody>
+      </p:sp>
+      <p:sp>
+        <p:nvSpPr>
+          <p:cNvPr id="40" name="WVU DSPIRA university"/>
+          <p:cNvSpPr>
+            <a:spLocks noGrp="1"/>
+          </p:cNvSpPr>
+          <p:nvPr/>
+        </p:nvSpPr>
+        <p:spPr>
+          <a:xfrm>
+            <a:off x="9334500" y="114300"/>
+            <a:ext cx="2628900" cy="171450"/>
+          </a:xfrm>
+          <a:prstGeom prst="rect">
+            <a:avLst/>
+          </a:prstGeom>
+          <a:noFill/>
+          <a:ln w="0">
+            <a:noFill/>
+          </a:ln>
+        </p:spPr>
+        <p:txBody>
+          <a:bodyPr>
+            <a:noAutofit/>
+          </a:bodyPr>
+          <a:lstStyle/>
+          <a:p>
+            <a:pPr algn="r">
+              <a:defRPr sz="900">
+                <a:solidFill>
+                  <a:srgbClr val="FFFFFF"/>
+                </a:solidFill>
+                <a:latin typeface="Arial"/>
+                <a:ea typeface="Arial"/>
+                <a:cs typeface="Arial"/>
+              </a:defRPr>
+            </a:pPr>
+            <a:r>
+              <a:rPr sz="900">
+                <a:solidFill>
+                  <a:srgbClr val="FFFFFF"/>
+                </a:solidFill>
+                <a:latin typeface="Arial"/>
+                <a:ea typeface="Arial"/>
+                <a:cs typeface="Arial"/>
+              </a:rPr>
+              <a:t>WEST VIRGINIA UNIVERSITY</a:t>
             </a:r>
           </a:p>
         </p:txBody>
@@ -10844,7 +11444,7 @@
       </p:sp>
       <p:sp>
         <p:nvSpPr>
-          <p:cNvPr id="10" name="DSPIRA 1"/>
+          <p:cNvPr id="11" name="DSPIRA 2"/>
           <p:cNvSpPr>
             <a:spLocks noGrp="1"/>
           </p:cNvSpPr>
@@ -10852,7 +11452,7 @@
         </p:nvSpPr>
         <p:spPr>
           <a:xfrm>
-            <a:off x="0" y="0"/>
+            <a:off x="0" y="7200900"/>
             <a:ext cx="12192000" cy="342900"/>
           </a:xfrm>
           <a:prstGeom prst="rect">
@@ -10865,81 +11465,6 @@
             <a:noFill/>
           </a:ln>
         </p:spPr>
-      </p:sp>
-      <p:sp>
-        <p:nvSpPr>
-          <p:cNvPr id="11" name="DSPIRA 2"/>
-          <p:cNvSpPr>
-            <a:spLocks noGrp="1"/>
-          </p:cNvSpPr>
-          <p:nvPr/>
-        </p:nvSpPr>
-        <p:spPr>
-          <a:xfrm>
-            <a:off x="0" y="7200900"/>
-            <a:ext cx="12192000" cy="342900"/>
-          </a:xfrm>
-          <a:prstGeom prst="rect">
-            <a:avLst/>
-          </a:prstGeom>
-          <a:solidFill>
-            <a:srgbClr val="FFFFFF"/>
-          </a:solidFill>
-          <a:ln w="0">
-            <a:noFill/>
-          </a:ln>
-        </p:spPr>
-      </p:sp>
-      <p:sp>
-        <p:nvSpPr>
-          <p:cNvPr id="12" name="DSPIRA 3"/>
-          <p:cNvSpPr>
-            <a:spLocks noGrp="1"/>
-          </p:cNvSpPr>
-          <p:nvPr/>
-        </p:nvSpPr>
-        <p:spPr>
-          <a:xfrm>
-            <a:off x="228600" y="76200"/>
-            <a:ext cx="4762500" cy="228600"/>
-          </a:xfrm>
-          <a:prstGeom prst="rect">
-            <a:avLst/>
-          </a:prstGeom>
-          <a:noFill/>
-          <a:ln w="0">
-            <a:noFill/>
-          </a:ln>
-        </p:spPr>
-        <p:txBody>
-          <a:bodyPr>
-            <a:noAutofit/>
-          </a:bodyPr>
-          <a:lstStyle/>
-          <a:p>
-            <a:pPr>
-              <a:defRPr sz="1200" b="1">
-                <a:solidFill>
-                  <a:srgbClr val="002855"/>
-                </a:solidFill>
-                <a:latin typeface="Arial"/>
-                <a:ea typeface="Arial"/>
-                <a:cs typeface="Arial"/>
-              </a:defRPr>
-            </a:pPr>
-            <a:r>
-              <a:rPr sz="1200" b="1">
-                <a:solidFill>
-                  <a:srgbClr val="002855"/>
-                </a:solidFill>
-                <a:latin typeface="Arial"/>
-                <a:ea typeface="Arial"/>
-                <a:cs typeface="Arial"/>
-              </a:rPr>
-              <a:t>WVU DSPIRA</a:t>
-            </a:r>
-          </a:p>
-        </p:txBody>
       </p:sp>
       <p:sp>
         <p:nvSpPr>
@@ -11039,6 +11564,156 @@
                 <a:cs typeface="Arial"/>
               </a:rPr>
               <a:t>6 of 12</a:t>
+            </a:r>
+          </a:p>
+        </p:txBody>
+      </p:sp>
+      <p:sp>
+        <p:nvSpPr>
+          <p:cNvPr id="15" name="WVU DSPIRA navy band"/>
+          <p:cNvSpPr>
+            <a:spLocks noGrp="1"/>
+          </p:cNvSpPr>
+          <p:nvPr/>
+        </p:nvSpPr>
+        <p:spPr>
+          <a:xfrm>
+            <a:off x="0" y="0"/>
+            <a:ext cx="12192000" cy="323850"/>
+          </a:xfrm>
+          <a:prstGeom prst="rect">
+            <a:avLst/>
+          </a:prstGeom>
+          <a:solidFill>
+            <a:srgbClr val="002855"/>
+          </a:solidFill>
+          <a:ln w="0">
+            <a:noFill/>
+          </a:ln>
+        </p:spPr>
+      </p:sp>
+      <p:sp>
+        <p:nvSpPr>
+          <p:cNvPr id="16" name="WVU DSPIRA gold rule"/>
+          <p:cNvSpPr>
+            <a:spLocks noGrp="1"/>
+          </p:cNvSpPr>
+          <p:nvPr/>
+        </p:nvSpPr>
+        <p:spPr>
+          <a:xfrm>
+            <a:off x="0" y="323850"/>
+            <a:ext cx="12192000" cy="19050"/>
+          </a:xfrm>
+          <a:prstGeom prst="rect">
+            <a:avLst/>
+          </a:prstGeom>
+          <a:solidFill>
+            <a:srgbClr val="EEAA00"/>
+          </a:solidFill>
+          <a:ln w="0">
+            <a:noFill/>
+          </a:ln>
+        </p:spPr>
+      </p:sp>
+      <p:sp>
+        <p:nvSpPr>
+          <p:cNvPr id="17" name="WVU DSPIRA name"/>
+          <p:cNvSpPr>
+            <a:spLocks noGrp="1"/>
+          </p:cNvSpPr>
+          <p:nvPr/>
+        </p:nvSpPr>
+        <p:spPr>
+          <a:xfrm>
+            <a:off x="228600" y="19050"/>
+            <a:ext cx="2857500" cy="257175"/>
+          </a:xfrm>
+          <a:prstGeom prst="rect">
+            <a:avLst/>
+          </a:prstGeom>
+          <a:noFill/>
+          <a:ln w="0">
+            <a:noFill/>
+          </a:ln>
+        </p:spPr>
+        <p:txBody>
+          <a:bodyPr>
+            <a:noAutofit/>
+          </a:bodyPr>
+          <a:lstStyle/>
+          <a:p>
+            <a:pPr>
+              <a:defRPr sz="1600" b="1">
+                <a:solidFill>
+                  <a:srgbClr val="FFFFFF"/>
+                </a:solidFill>
+                <a:latin typeface="Arial"/>
+                <a:ea typeface="Arial"/>
+                <a:cs typeface="Arial"/>
+              </a:defRPr>
+            </a:pPr>
+            <a:r>
+              <a:rPr sz="1600" b="1">
+                <a:solidFill>
+                  <a:srgbClr val="FFFFFF"/>
+                </a:solidFill>
+                <a:latin typeface="Arial"/>
+                <a:ea typeface="Arial"/>
+                <a:cs typeface="Arial"/>
+              </a:rPr>
+              <a:t>WVU DSPIRA</a:t>
+            </a:r>
+          </a:p>
+        </p:txBody>
+      </p:sp>
+      <p:sp>
+        <p:nvSpPr>
+          <p:cNvPr id="18" name="WVU DSPIRA university"/>
+          <p:cNvSpPr>
+            <a:spLocks noGrp="1"/>
+          </p:cNvSpPr>
+          <p:nvPr/>
+        </p:nvSpPr>
+        <p:spPr>
+          <a:xfrm>
+            <a:off x="9334500" y="114300"/>
+            <a:ext cx="2628900" cy="171450"/>
+          </a:xfrm>
+          <a:prstGeom prst="rect">
+            <a:avLst/>
+          </a:prstGeom>
+          <a:noFill/>
+          <a:ln w="0">
+            <a:noFill/>
+          </a:ln>
+        </p:spPr>
+        <p:txBody>
+          <a:bodyPr>
+            <a:noAutofit/>
+          </a:bodyPr>
+          <a:lstStyle/>
+          <a:p>
+            <a:pPr algn="r">
+              <a:defRPr sz="900">
+                <a:solidFill>
+                  <a:srgbClr val="FFFFFF"/>
+                </a:solidFill>
+                <a:latin typeface="Arial"/>
+                <a:ea typeface="Arial"/>
+                <a:cs typeface="Arial"/>
+              </a:defRPr>
+            </a:pPr>
+            <a:r>
+              <a:rPr sz="900">
+                <a:solidFill>
+                  <a:srgbClr val="FFFFFF"/>
+                </a:solidFill>
+                <a:latin typeface="Arial"/>
+                <a:ea typeface="Arial"/>
+                <a:cs typeface="Arial"/>
+              </a:rPr>
+              <a:t>WEST VIRGINIA UNIVERSITY</a:t>
             </a:r>
           </a:p>
         </p:txBody>
@@ -11222,7 +11897,7 @@
       </p:sp>
       <p:sp>
         <p:nvSpPr>
-          <p:cNvPr id="55" name="DSPIRA 1"/>
+          <p:cNvPr id="56" name="DSPIRA 2"/>
           <p:cNvSpPr>
             <a:spLocks noGrp="1"/>
           </p:cNvSpPr>
@@ -11230,7 +11905,7 @@
         </p:nvSpPr>
         <p:spPr>
           <a:xfrm>
-            <a:off x="0" y="0"/>
+            <a:off x="0" y="7200900"/>
             <a:ext cx="12192000" cy="342900"/>
           </a:xfrm>
           <a:prstGeom prst="rect">
@@ -11243,81 +11918,6 @@
             <a:noFill/>
           </a:ln>
         </p:spPr>
-      </p:sp>
-      <p:sp>
-        <p:nvSpPr>
-          <p:cNvPr id="56" name="DSPIRA 2"/>
-          <p:cNvSpPr>
-            <a:spLocks noGrp="1"/>
-          </p:cNvSpPr>
-          <p:nvPr/>
-        </p:nvSpPr>
-        <p:spPr>
-          <a:xfrm>
-            <a:off x="0" y="7200900"/>
-            <a:ext cx="12192000" cy="342900"/>
-          </a:xfrm>
-          <a:prstGeom prst="rect">
-            <a:avLst/>
-          </a:prstGeom>
-          <a:solidFill>
-            <a:srgbClr val="FFFFFF"/>
-          </a:solidFill>
-          <a:ln w="0">
-            <a:noFill/>
-          </a:ln>
-        </p:spPr>
-      </p:sp>
-      <p:sp>
-        <p:nvSpPr>
-          <p:cNvPr id="57" name="DSPIRA 3"/>
-          <p:cNvSpPr>
-            <a:spLocks noGrp="1"/>
-          </p:cNvSpPr>
-          <p:nvPr/>
-        </p:nvSpPr>
-        <p:spPr>
-          <a:xfrm>
-            <a:off x="228600" y="76200"/>
-            <a:ext cx="4762500" cy="228600"/>
-          </a:xfrm>
-          <a:prstGeom prst="rect">
-            <a:avLst/>
-          </a:prstGeom>
-          <a:noFill/>
-          <a:ln w="0">
-            <a:noFill/>
-          </a:ln>
-        </p:spPr>
-        <p:txBody>
-          <a:bodyPr>
-            <a:noAutofit/>
-          </a:bodyPr>
-          <a:lstStyle/>
-          <a:p>
-            <a:pPr>
-              <a:defRPr sz="1200" b="1">
-                <a:solidFill>
-                  <a:srgbClr val="002855"/>
-                </a:solidFill>
-                <a:latin typeface="Arial"/>
-                <a:ea typeface="Arial"/>
-                <a:cs typeface="Arial"/>
-              </a:defRPr>
-            </a:pPr>
-            <a:r>
-              <a:rPr sz="1200" b="1">
-                <a:solidFill>
-                  <a:srgbClr val="002855"/>
-                </a:solidFill>
-                <a:latin typeface="Arial"/>
-                <a:ea typeface="Arial"/>
-                <a:cs typeface="Arial"/>
-              </a:rPr>
-              <a:t>WVU DSPIRA</a:t>
-            </a:r>
-          </a:p>
-        </p:txBody>
       </p:sp>
       <p:sp>
         <p:nvSpPr>
@@ -11417,6 +12017,156 @@
                 <a:cs typeface="Arial"/>
               </a:rPr>
               <a:t>7 of 12</a:t>
+            </a:r>
+          </a:p>
+        </p:txBody>
+      </p:sp>
+      <p:sp>
+        <p:nvSpPr>
+          <p:cNvPr id="60" name="WVU DSPIRA navy band"/>
+          <p:cNvSpPr>
+            <a:spLocks noGrp="1"/>
+          </p:cNvSpPr>
+          <p:nvPr/>
+        </p:nvSpPr>
+        <p:spPr>
+          <a:xfrm>
+            <a:off x="0" y="0"/>
+            <a:ext cx="12192000" cy="323850"/>
+          </a:xfrm>
+          <a:prstGeom prst="rect">
+            <a:avLst/>
+          </a:prstGeom>
+          <a:solidFill>
+            <a:srgbClr val="002855"/>
+          </a:solidFill>
+          <a:ln w="0">
+            <a:noFill/>
+          </a:ln>
+        </p:spPr>
+      </p:sp>
+      <p:sp>
+        <p:nvSpPr>
+          <p:cNvPr id="61" name="WVU DSPIRA gold rule"/>
+          <p:cNvSpPr>
+            <a:spLocks noGrp="1"/>
+          </p:cNvSpPr>
+          <p:nvPr/>
+        </p:nvSpPr>
+        <p:spPr>
+          <a:xfrm>
+            <a:off x="0" y="323850"/>
+            <a:ext cx="12192000" cy="19050"/>
+          </a:xfrm>
+          <a:prstGeom prst="rect">
+            <a:avLst/>
+          </a:prstGeom>
+          <a:solidFill>
+            <a:srgbClr val="EEAA00"/>
+          </a:solidFill>
+          <a:ln w="0">
+            <a:noFill/>
+          </a:ln>
+        </p:spPr>
+      </p:sp>
+      <p:sp>
+        <p:nvSpPr>
+          <p:cNvPr id="62" name="WVU DSPIRA name"/>
+          <p:cNvSpPr>
+            <a:spLocks noGrp="1"/>
+          </p:cNvSpPr>
+          <p:nvPr/>
+        </p:nvSpPr>
+        <p:spPr>
+          <a:xfrm>
+            <a:off x="228600" y="19050"/>
+            <a:ext cx="2857500" cy="257175"/>
+          </a:xfrm>
+          <a:prstGeom prst="rect">
+            <a:avLst/>
+          </a:prstGeom>
+          <a:noFill/>
+          <a:ln w="0">
+            <a:noFill/>
+          </a:ln>
+        </p:spPr>
+        <p:txBody>
+          <a:bodyPr>
+            <a:noAutofit/>
+          </a:bodyPr>
+          <a:lstStyle/>
+          <a:p>
+            <a:pPr>
+              <a:defRPr sz="1600" b="1">
+                <a:solidFill>
+                  <a:srgbClr val="FFFFFF"/>
+                </a:solidFill>
+                <a:latin typeface="Arial"/>
+                <a:ea typeface="Arial"/>
+                <a:cs typeface="Arial"/>
+              </a:defRPr>
+            </a:pPr>
+            <a:r>
+              <a:rPr sz="1600" b="1">
+                <a:solidFill>
+                  <a:srgbClr val="FFFFFF"/>
+                </a:solidFill>
+                <a:latin typeface="Arial"/>
+                <a:ea typeface="Arial"/>
+                <a:cs typeface="Arial"/>
+              </a:rPr>
+              <a:t>WVU DSPIRA</a:t>
+            </a:r>
+          </a:p>
+        </p:txBody>
+      </p:sp>
+      <p:sp>
+        <p:nvSpPr>
+          <p:cNvPr id="63" name="WVU DSPIRA university"/>
+          <p:cNvSpPr>
+            <a:spLocks noGrp="1"/>
+          </p:cNvSpPr>
+          <p:nvPr/>
+        </p:nvSpPr>
+        <p:spPr>
+          <a:xfrm>
+            <a:off x="9334500" y="114300"/>
+            <a:ext cx="2628900" cy="171450"/>
+          </a:xfrm>
+          <a:prstGeom prst="rect">
+            <a:avLst/>
+          </a:prstGeom>
+          <a:noFill/>
+          <a:ln w="0">
+            <a:noFill/>
+          </a:ln>
+        </p:spPr>
+        <p:txBody>
+          <a:bodyPr>
+            <a:noAutofit/>
+          </a:bodyPr>
+          <a:lstStyle/>
+          <a:p>
+            <a:pPr algn="r">
+              <a:defRPr sz="900">
+                <a:solidFill>
+                  <a:srgbClr val="FFFFFF"/>
+                </a:solidFill>
+                <a:latin typeface="Arial"/>
+                <a:ea typeface="Arial"/>
+                <a:cs typeface="Arial"/>
+              </a:defRPr>
+            </a:pPr>
+            <a:r>
+              <a:rPr sz="900">
+                <a:solidFill>
+                  <a:srgbClr val="FFFFFF"/>
+                </a:solidFill>
+                <a:latin typeface="Arial"/>
+                <a:ea typeface="Arial"/>
+                <a:cs typeface="Arial"/>
+              </a:rPr>
+              <a:t>WEST VIRGINIA UNIVERSITY</a:t>
             </a:r>
           </a:p>
         </p:txBody>
@@ -12081,7 +12831,7 @@
       </p:pic>
       <p:sp>
         <p:nvSpPr>
-          <p:cNvPr id="7" name="DSPIRA 1"/>
+          <p:cNvPr id="8" name="DSPIRA 2"/>
           <p:cNvSpPr>
             <a:spLocks noGrp="1"/>
           </p:cNvSpPr>
@@ -12089,7 +12839,7 @@
         </p:nvSpPr>
         <p:spPr>
           <a:xfrm>
-            <a:off x="0" y="0"/>
+            <a:off x="0" y="7200900"/>
             <a:ext cx="12192000" cy="342900"/>
           </a:xfrm>
           <a:prstGeom prst="rect">
@@ -12102,81 +12852,6 @@
             <a:noFill/>
           </a:ln>
         </p:spPr>
-      </p:sp>
-      <p:sp>
-        <p:nvSpPr>
-          <p:cNvPr id="8" name="DSPIRA 2"/>
-          <p:cNvSpPr>
-            <a:spLocks noGrp="1"/>
-          </p:cNvSpPr>
-          <p:nvPr/>
-        </p:nvSpPr>
-        <p:spPr>
-          <a:xfrm>
-            <a:off x="0" y="7200900"/>
-            <a:ext cx="12192000" cy="342900"/>
-          </a:xfrm>
-          <a:prstGeom prst="rect">
-            <a:avLst/>
-          </a:prstGeom>
-          <a:solidFill>
-            <a:srgbClr val="FFFFFF"/>
-          </a:solidFill>
-          <a:ln w="0">
-            <a:noFill/>
-          </a:ln>
-        </p:spPr>
-      </p:sp>
-      <p:sp>
-        <p:nvSpPr>
-          <p:cNvPr id="9" name="DSPIRA 3"/>
-          <p:cNvSpPr>
-            <a:spLocks noGrp="1"/>
-          </p:cNvSpPr>
-          <p:nvPr/>
-        </p:nvSpPr>
-        <p:spPr>
-          <a:xfrm>
-            <a:off x="228600" y="76200"/>
-            <a:ext cx="4762500" cy="228600"/>
-          </a:xfrm>
-          <a:prstGeom prst="rect">
-            <a:avLst/>
-          </a:prstGeom>
-          <a:noFill/>
-          <a:ln w="0">
-            <a:noFill/>
-          </a:ln>
-        </p:spPr>
-        <p:txBody>
-          <a:bodyPr>
-            <a:noAutofit/>
-          </a:bodyPr>
-          <a:lstStyle/>
-          <a:p>
-            <a:pPr>
-              <a:defRPr sz="1200" b="1">
-                <a:solidFill>
-                  <a:srgbClr val="002855"/>
-                </a:solidFill>
-                <a:latin typeface="Arial"/>
-                <a:ea typeface="Arial"/>
-                <a:cs typeface="Arial"/>
-              </a:defRPr>
-            </a:pPr>
-            <a:r>
-              <a:rPr sz="1200" b="1">
-                <a:solidFill>
-                  <a:srgbClr val="002855"/>
-                </a:solidFill>
-                <a:latin typeface="Arial"/>
-                <a:ea typeface="Arial"/>
-                <a:cs typeface="Arial"/>
-              </a:rPr>
-              <a:t>WVU DSPIRA</a:t>
-            </a:r>
-          </a:p>
-        </p:txBody>
       </p:sp>
       <p:sp>
         <p:nvSpPr>
@@ -12276,6 +12951,156 @@
                 <a:cs typeface="Arial"/>
               </a:rPr>
               <a:t>8 of 12</a:t>
+            </a:r>
+          </a:p>
+        </p:txBody>
+      </p:sp>
+      <p:sp>
+        <p:nvSpPr>
+          <p:cNvPr id="12" name="WVU DSPIRA navy band"/>
+          <p:cNvSpPr>
+            <a:spLocks noGrp="1"/>
+          </p:cNvSpPr>
+          <p:nvPr/>
+        </p:nvSpPr>
+        <p:spPr>
+          <a:xfrm>
+            <a:off x="0" y="0"/>
+            <a:ext cx="12192000" cy="323850"/>
+          </a:xfrm>
+          <a:prstGeom prst="rect">
+            <a:avLst/>
+          </a:prstGeom>
+          <a:solidFill>
+            <a:srgbClr val="002855"/>
+          </a:solidFill>
+          <a:ln w="0">
+            <a:noFill/>
+          </a:ln>
+        </p:spPr>
+      </p:sp>
+      <p:sp>
+        <p:nvSpPr>
+          <p:cNvPr id="13" name="WVU DSPIRA gold rule"/>
+          <p:cNvSpPr>
+            <a:spLocks noGrp="1"/>
+          </p:cNvSpPr>
+          <p:nvPr/>
+        </p:nvSpPr>
+        <p:spPr>
+          <a:xfrm>
+            <a:off x="0" y="323850"/>
+            <a:ext cx="12192000" cy="19050"/>
+          </a:xfrm>
+          <a:prstGeom prst="rect">
+            <a:avLst/>
+          </a:prstGeom>
+          <a:solidFill>
+            <a:srgbClr val="EEAA00"/>
+          </a:solidFill>
+          <a:ln w="0">
+            <a:noFill/>
+          </a:ln>
+        </p:spPr>
+      </p:sp>
+      <p:sp>
+        <p:nvSpPr>
+          <p:cNvPr id="14" name="WVU DSPIRA name"/>
+          <p:cNvSpPr>
+            <a:spLocks noGrp="1"/>
+          </p:cNvSpPr>
+          <p:nvPr/>
+        </p:nvSpPr>
+        <p:spPr>
+          <a:xfrm>
+            <a:off x="228600" y="19050"/>
+            <a:ext cx="2857500" cy="257175"/>
+          </a:xfrm>
+          <a:prstGeom prst="rect">
+            <a:avLst/>
+          </a:prstGeom>
+          <a:noFill/>
+          <a:ln w="0">
+            <a:noFill/>
+          </a:ln>
+        </p:spPr>
+        <p:txBody>
+          <a:bodyPr>
+            <a:noAutofit/>
+          </a:bodyPr>
+          <a:lstStyle/>
+          <a:p>
+            <a:pPr>
+              <a:defRPr sz="1600" b="1">
+                <a:solidFill>
+                  <a:srgbClr val="FFFFFF"/>
+                </a:solidFill>
+                <a:latin typeface="Arial"/>
+                <a:ea typeface="Arial"/>
+                <a:cs typeface="Arial"/>
+              </a:defRPr>
+            </a:pPr>
+            <a:r>
+              <a:rPr sz="1600" b="1">
+                <a:solidFill>
+                  <a:srgbClr val="FFFFFF"/>
+                </a:solidFill>
+                <a:latin typeface="Arial"/>
+                <a:ea typeface="Arial"/>
+                <a:cs typeface="Arial"/>
+              </a:rPr>
+              <a:t>WVU DSPIRA</a:t>
+            </a:r>
+          </a:p>
+        </p:txBody>
+      </p:sp>
+      <p:sp>
+        <p:nvSpPr>
+          <p:cNvPr id="15" name="WVU DSPIRA university"/>
+          <p:cNvSpPr>
+            <a:spLocks noGrp="1"/>
+          </p:cNvSpPr>
+          <p:nvPr/>
+        </p:nvSpPr>
+        <p:spPr>
+          <a:xfrm>
+            <a:off x="9334500" y="114300"/>
+            <a:ext cx="2628900" cy="171450"/>
+          </a:xfrm>
+          <a:prstGeom prst="rect">
+            <a:avLst/>
+          </a:prstGeom>
+          <a:noFill/>
+          <a:ln w="0">
+            <a:noFill/>
+          </a:ln>
+        </p:spPr>
+        <p:txBody>
+          <a:bodyPr>
+            <a:noAutofit/>
+          </a:bodyPr>
+          <a:lstStyle/>
+          <a:p>
+            <a:pPr algn="r">
+              <a:defRPr sz="900">
+                <a:solidFill>
+                  <a:srgbClr val="FFFFFF"/>
+                </a:solidFill>
+                <a:latin typeface="Arial"/>
+                <a:ea typeface="Arial"/>
+                <a:cs typeface="Arial"/>
+              </a:defRPr>
+            </a:pPr>
+            <a:r>
+              <a:rPr sz="900">
+                <a:solidFill>
+                  <a:srgbClr val="FFFFFF"/>
+                </a:solidFill>
+                <a:latin typeface="Arial"/>
+                <a:ea typeface="Arial"/>
+                <a:cs typeface="Arial"/>
+              </a:rPr>
+              <a:t>WEST VIRGINIA UNIVERSITY</a:t>
             </a:r>
           </a:p>
         </p:txBody>
@@ -12631,7 +13456,7 @@
       </p:sp>
       <p:sp>
         <p:nvSpPr>
-          <p:cNvPr id="12" name="DSPIRA 1"/>
+          <p:cNvPr id="13" name="DSPIRA 2"/>
           <p:cNvSpPr>
             <a:spLocks noGrp="1"/>
           </p:cNvSpPr>
@@ -12639,7 +13464,7 @@
         </p:nvSpPr>
         <p:spPr>
           <a:xfrm>
-            <a:off x="0" y="0"/>
+            <a:off x="0" y="7200900"/>
             <a:ext cx="12192000" cy="342900"/>
           </a:xfrm>
           <a:prstGeom prst="rect">
@@ -12652,81 +13477,6 @@
             <a:noFill/>
           </a:ln>
         </p:spPr>
-      </p:sp>
-      <p:sp>
-        <p:nvSpPr>
-          <p:cNvPr id="13" name="DSPIRA 2"/>
-          <p:cNvSpPr>
-            <a:spLocks noGrp="1"/>
-          </p:cNvSpPr>
-          <p:nvPr/>
-        </p:nvSpPr>
-        <p:spPr>
-          <a:xfrm>
-            <a:off x="0" y="7200900"/>
-            <a:ext cx="12192000" cy="342900"/>
-          </a:xfrm>
-          <a:prstGeom prst="rect">
-            <a:avLst/>
-          </a:prstGeom>
-          <a:solidFill>
-            <a:srgbClr val="FFFFFF"/>
-          </a:solidFill>
-          <a:ln w="0">
-            <a:noFill/>
-          </a:ln>
-        </p:spPr>
-      </p:sp>
-      <p:sp>
-        <p:nvSpPr>
-          <p:cNvPr id="14" name="DSPIRA 3"/>
-          <p:cNvSpPr>
-            <a:spLocks noGrp="1"/>
-          </p:cNvSpPr>
-          <p:nvPr/>
-        </p:nvSpPr>
-        <p:spPr>
-          <a:xfrm>
-            <a:off x="228600" y="76200"/>
-            <a:ext cx="4762500" cy="228600"/>
-          </a:xfrm>
-          <a:prstGeom prst="rect">
-            <a:avLst/>
-          </a:prstGeom>
-          <a:noFill/>
-          <a:ln w="0">
-            <a:noFill/>
-          </a:ln>
-        </p:spPr>
-        <p:txBody>
-          <a:bodyPr>
-            <a:noAutofit/>
-          </a:bodyPr>
-          <a:lstStyle/>
-          <a:p>
-            <a:pPr>
-              <a:defRPr sz="1200" b="1">
-                <a:solidFill>
-                  <a:srgbClr val="002855"/>
-                </a:solidFill>
-                <a:latin typeface="Arial"/>
-                <a:ea typeface="Arial"/>
-                <a:cs typeface="Arial"/>
-              </a:defRPr>
-            </a:pPr>
-            <a:r>
-              <a:rPr sz="1200" b="1">
-                <a:solidFill>
-                  <a:srgbClr val="002855"/>
-                </a:solidFill>
-                <a:latin typeface="Arial"/>
-                <a:ea typeface="Arial"/>
-                <a:cs typeface="Arial"/>
-              </a:rPr>
-              <a:t>WVU DSPIRA</a:t>
-            </a:r>
-          </a:p>
-        </p:txBody>
       </p:sp>
       <p:sp>
         <p:nvSpPr>
@@ -12826,6 +13576,156 @@
                 <a:cs typeface="Arial"/>
               </a:rPr>
               <a:t>9 of 12</a:t>
+            </a:r>
+          </a:p>
+        </p:txBody>
+      </p:sp>
+      <p:sp>
+        <p:nvSpPr>
+          <p:cNvPr id="17" name="WVU DSPIRA navy band"/>
+          <p:cNvSpPr>
+            <a:spLocks noGrp="1"/>
+          </p:cNvSpPr>
+          <p:nvPr/>
+        </p:nvSpPr>
+        <p:spPr>
+          <a:xfrm>
+            <a:off x="0" y="0"/>
+            <a:ext cx="12192000" cy="323850"/>
+          </a:xfrm>
+          <a:prstGeom prst="rect">
+            <a:avLst/>
+          </a:prstGeom>
+          <a:solidFill>
+            <a:srgbClr val="002855"/>
+          </a:solidFill>
+          <a:ln w="0">
+            <a:noFill/>
+          </a:ln>
+        </p:spPr>
+      </p:sp>
+      <p:sp>
+        <p:nvSpPr>
+          <p:cNvPr id="18" name="WVU DSPIRA gold rule"/>
+          <p:cNvSpPr>
+            <a:spLocks noGrp="1"/>
+          </p:cNvSpPr>
+          <p:nvPr/>
+        </p:nvSpPr>
+        <p:spPr>
+          <a:xfrm>
+            <a:off x="0" y="323850"/>
+            <a:ext cx="12192000" cy="19050"/>
+          </a:xfrm>
+          <a:prstGeom prst="rect">
+            <a:avLst/>
+          </a:prstGeom>
+          <a:solidFill>
+            <a:srgbClr val="EEAA00"/>
+          </a:solidFill>
+          <a:ln w="0">
+            <a:noFill/>
+          </a:ln>
+        </p:spPr>
+      </p:sp>
+      <p:sp>
+        <p:nvSpPr>
+          <p:cNvPr id="19" name="WVU DSPIRA name"/>
+          <p:cNvSpPr>
+            <a:spLocks noGrp="1"/>
+          </p:cNvSpPr>
+          <p:nvPr/>
+        </p:nvSpPr>
+        <p:spPr>
+          <a:xfrm>
+            <a:off x="228600" y="19050"/>
+            <a:ext cx="2857500" cy="257175"/>
+          </a:xfrm>
+          <a:prstGeom prst="rect">
+            <a:avLst/>
+          </a:prstGeom>
+          <a:noFill/>
+          <a:ln w="0">
+            <a:noFill/>
+          </a:ln>
+        </p:spPr>
+        <p:txBody>
+          <a:bodyPr>
+            <a:noAutofit/>
+          </a:bodyPr>
+          <a:lstStyle/>
+          <a:p>
+            <a:pPr>
+              <a:defRPr sz="1600" b="1">
+                <a:solidFill>
+                  <a:srgbClr val="FFFFFF"/>
+                </a:solidFill>
+                <a:latin typeface="Arial"/>
+                <a:ea typeface="Arial"/>
+                <a:cs typeface="Arial"/>
+              </a:defRPr>
+            </a:pPr>
+            <a:r>
+              <a:rPr sz="1600" b="1">
+                <a:solidFill>
+                  <a:srgbClr val="FFFFFF"/>
+                </a:solidFill>
+                <a:latin typeface="Arial"/>
+                <a:ea typeface="Arial"/>
+                <a:cs typeface="Arial"/>
+              </a:rPr>
+              <a:t>WVU DSPIRA</a:t>
+            </a:r>
+          </a:p>
+        </p:txBody>
+      </p:sp>
+      <p:sp>
+        <p:nvSpPr>
+          <p:cNvPr id="20" name="WVU DSPIRA university"/>
+          <p:cNvSpPr>
+            <a:spLocks noGrp="1"/>
+          </p:cNvSpPr>
+          <p:nvPr/>
+        </p:nvSpPr>
+        <p:spPr>
+          <a:xfrm>
+            <a:off x="9334500" y="114300"/>
+            <a:ext cx="2628900" cy="171450"/>
+          </a:xfrm>
+          <a:prstGeom prst="rect">
+            <a:avLst/>
+          </a:prstGeom>
+          <a:noFill/>
+          <a:ln w="0">
+            <a:noFill/>
+          </a:ln>
+        </p:spPr>
+        <p:txBody>
+          <a:bodyPr>
+            <a:noAutofit/>
+          </a:bodyPr>
+          <a:lstStyle/>
+          <a:p>
+            <a:pPr algn="r">
+              <a:defRPr sz="900">
+                <a:solidFill>
+                  <a:srgbClr val="FFFFFF"/>
+                </a:solidFill>
+                <a:latin typeface="Arial"/>
+                <a:ea typeface="Arial"/>
+                <a:cs typeface="Arial"/>
+              </a:defRPr>
+            </a:pPr>
+            <a:r>
+              <a:rPr sz="900">
+                <a:solidFill>
+                  <a:srgbClr val="FFFFFF"/>
+                </a:solidFill>
+                <a:latin typeface="Arial"/>
+                <a:ea typeface="Arial"/>
+                <a:cs typeface="Arial"/>
+              </a:rPr>
+              <a:t>WEST VIRGINIA UNIVERSITY</a:t>
             </a:r>
           </a:p>
         </p:txBody>

--- a/assets/lessons/lectures/digital-signal-processing/signals-2018.pptx
+++ b/assets/lessons/lectures/digital-signal-processing/signals-2018.pptx
@@ -7314,7 +7314,7 @@
                 <a:ea typeface="Arial"/>
                 <a:cs typeface="Arial"/>
               </a:rPr>
-              <a:t>wvurail.org/dspira</a:t>
+              <a:t>rail.wvu.edu/dspira</a:t>
             </a:r>
           </a:p>
         </p:txBody>
